--- a/docs/slides/DSPH_Workshop2_Workflow_Enhancement.pptx
+++ b/docs/slides/DSPH_Workshop2_Workflow_Enhancement.pptx
@@ -25,9 +25,10 @@
     <p:sldId id="273" r:id="rId19"/>
     <p:sldId id="274" r:id="rId20"/>
     <p:sldId id="275" r:id="rId21"/>
+    <p:sldId id="276" r:id="rId22"/>
   </p:sldIdLst>
   <p:notesMasterIdLst>
-    <p:notesMasterId r:id="rId22"/>
+    <p:notesMasterId r:id="rId23"/>
   </p:notesMasterIdLst>
   <p:sldSz cx="18288000" cy="10287000"/>
   <p:notesSz cx="10287000" cy="18288000"/>
@@ -521,7 +522,7 @@
           <a:p>
             <a:r>
               <a:rPr lang="en-US" dirty="0"/>
-              <a:t>This picks up where Core 1 left off. Everything today works in Copilot Chat or ChatGPT Edu by pasting text or uploading a file. Drexel does not have the Microsoft 365 Copilot license, so there is no Copilot button inside Word or Excel.</a:t>
+              <a:t>On Zoom. Paste the Core 2 page link, the demo-file links, and m365.cloud.microsoft/chat in the chat now. Two ideas run through the hour: plan first, then decide whether AI drafts or refines.</a:t>
             </a:r>
             <a:endParaRPr lang="en-US" dirty="0"/>
           </a:p>
@@ -609,7 +610,7 @@
           <a:p>
             <a:r>
               <a:rPr lang="en-US" dirty="0"/>
-              <a:t>Trace one draft through the three diamonds. Verified: names, dates, numbers. Disclosed: official, research, or external work. Yours: does it say what you mean? Any "no" sends it back. Core 4 covers this in depth.</a:t>
+              <a:t/>
             </a:r>
             <a:endParaRPr lang="en-US" dirty="0"/>
           </a:p>
@@ -697,7 +698,7 @@
           <a:p>
             <a:r>
               <a:rPr lang="en-US" dirty="0"/>
-              <a:t>Applies to numbers as much as citations. If you cannot trace it to a source you opened, it does not go in.</a:t>
+              <a:t>Trace one draft through the three diamonds. Verified: check it against your plan and the original. Disclosed: official, research, or external work. Yours: does it say what you mean? Any "no" sends it back. Core 4 covers this in depth.</a:t>
             </a:r>
             <a:endParaRPr lang="en-US" dirty="0"/>
           </a:p>
@@ -785,7 +786,7 @@
           <a:p>
             <a:r>
               <a:rPr lang="en-US" dirty="0"/>
-              <a:t/>
+              <a:t>Applies to numbers as much as citations. If you cannot trace it to a source you opened, it does not go in.</a:t>
             </a:r>
             <a:endParaRPr lang="en-US" dirty="0"/>
           </a:p>
@@ -873,7 +874,7 @@
           <a:p>
             <a:r>
               <a:rPr lang="en-US" dirty="0"/>
-              <a:t>Do each step on the projector and pause. Ask for a thumbs-up after the upload step; that is where people get stuck. No shield icon: they are signed in with a personal Microsoft account. Upload fails: open the file and paste the text.</a:t>
+              <a:t/>
             </a:r>
             <a:endParaRPr lang="en-US" dirty="0"/>
           </a:p>
@@ -961,7 +962,7 @@
           <a:p>
             <a:r>
               <a:rPr lang="en-US" dirty="0"/>
-              <a:t>Ask people to pick within one minute. Leave the slide for the most popular job on screen while they work.</a:t>
+              <a:t>Do each step on your shared screen and pause. Ask for a thumbs-up reaction after the upload step. Summarizing is a safe first job: the content already exists, so every bullet can be checked. No shield icon: personal Microsoft account. Upload fails: paste the text. Cannot find the file: repost the link.</a:t>
             </a:r>
             <a:endParaRPr lang="en-US" dirty="0"/>
           </a:p>
@@ -1049,7 +1050,7 @@
           <a:p>
             <a:r>
               <a:rPr lang="en-US" dirty="0"/>
-              <a:t>Read one sentence of the plain-language rewrite aloud and check a fact against the original. The Next Steps are invented by the AI; fine for a draft, and exactly why you edit.</a:t>
+              <a:t>Ask people to type A, B, or C in the chat. Leave the slide for the most common choice on screen; switch if the chat asks.</a:t>
             </a:r>
             <a:endParaRPr lang="en-US" dirty="0"/>
           </a:p>
@@ -1137,7 +1138,7 @@
           <a:p>
             <a:r>
               <a:rPr lang="en-US" dirty="0"/>
-              <a:t>The accreditation crosswalk was flagged and put on the September agenda, with no owner. Ask: decision, action item, or open question? Summaries often file it wrong.</a:t>
+              <a:t>Find what is missing: the description has aims, methods, products, and partners, but no timeline, budget, sample size, team roles, or plan for privacy in street imagery. Ask people to post one gap in the chat and whether it is real. AI lists gaps; the author decides what to add.</a:t>
             </a:r>
             <a:endParaRPr lang="en-US" dirty="0"/>
           </a:p>
@@ -1225,7 +1226,7 @@
           <a:p>
             <a:r>
               <a:rPr lang="en-US" dirty="0"/>
-              <a:t>8 of 30 rows are over $12 per attendee (Oct EOH and HMP; Dec EOH and HMP; Jan HMP; all three in June). Nov HMP is exactly $12.00: a formula with &gt; will not flag it, &gt;= will. Check the formula, not just the answer.</a:t>
+              <a:t>The person supplies the two points; AI only turns them into sentences. Did the reply add anything they did not say? The accreditation crosswalk was put on the September agenda with no owner: decision, action item, or open question?</a:t>
             </a:r>
             <a:endParaRPr lang="en-US" dirty="0"/>
           </a:p>
@@ -1313,7 +1314,7 @@
           <a:p>
             <a:r>
               <a:rPr lang="en-US" dirty="0"/>
-              <a:t>Push two or three rounds of follow-ups. Make sure everyone saves at least one recipe in a "My prompts" document before leaving; Core 3 builds on these. For the abstracts fallback, check the confidence intervals live.</a:t>
+              <a:t>8 of 30 rows are over $12 per attendee (Oct EOH and HMP; Dec EOH and HMP; Jan HMP; all three in June). Nov HMP is exactly $12.00: a formula with &gt; will not flag it, &gt;= will. Check the formula, not just the answer.</a:t>
             </a:r>
             <a:endParaRPr lang="en-US" dirty="0"/>
           </a:p>
@@ -1401,7 +1402,7 @@
           <a:p>
             <a:r>
               <a:rPr lang="en-US" dirty="0"/>
-              <a:t>Two recipes before Core 3. Point to the feedback form at the bottom of the workshop page.</a:t>
+              <a:t>Hold people to step 1: a plan before AI. Ask them to type "plan done" in the chat before opening AI. Routine task: recipe 1. Expertise or high stakes: write it, then recipe 2. Everyone saves at least one recipe before leaving.</a:t>
             </a:r>
             <a:endParaRPr lang="en-US" dirty="0"/>
           </a:p>
@@ -1489,7 +1490,7 @@
           <a:p>
             <a:r>
               <a:rPr lang="en-US" dirty="0"/>
-              <a:t>Five goals. The real one: leave with one task set up as a routine and one saved prompt.</a:t>
+              <a:t>Five goals. The real ones: a plan before any AI, and knowing when to let AI draft versus refine.</a:t>
             </a:r>
             <a:endParaRPr lang="en-US" dirty="0"/>
           </a:p>
@@ -1577,7 +1578,7 @@
           <a:p>
             <a:r>
               <a:rPr lang="en-US" dirty="0"/>
-              <a:t/>
+              <a:t>Ask for one line in the chat: one thing they will try this week. Paste the feedback form link (bottom of the Core 2 page) in the chat.</a:t>
             </a:r>
             <a:endParaRPr lang="en-US" dirty="0"/>
           </a:p>
@@ -1601,6 +1602,94 @@
             <a:fld id="{F7021451-1387-4CA6-816F-3879F97B5CBC}" type="slidenum">
               <a:rPr lang="en-US"/>
               <a:t>20</a:t>
+            </a:fld>
+            <a:endParaRPr lang="en-US"/>
+          </a:p>
+        </p:txBody>
+      </p:sp>
+    </p:spTree>
+    <p:extLst>
+      <p:ext uri="{BB962C8B-B14F-4D97-AF65-F5344CB8AC3E}">
+        <p14:creationId xmlns:p14="http://schemas.microsoft.com/office/powerpoint/2010/main" val="1024086991"/>
+      </p:ext>
+    </p:extLst>
+  </p:cSld>
+  <p:clrMapOvr>
+    <a:masterClrMapping/>
+  </p:clrMapOvr>
+</p:notes>
+</file>
+
+<file path=ppt/notesSlides/notesSlide21.xml><?xml version="1.0" encoding="utf-8"?>
+<p:notes xmlns:a="http://schemas.openxmlformats.org/drawingml/2006/main" xmlns:r="http://schemas.openxmlformats.org/officeDocument/2006/relationships" xmlns:p="http://schemas.openxmlformats.org/presentationml/2006/main">
+  <p:cSld>
+    <p:spTree>
+      <p:nvGrpSpPr>
+        <p:cNvPr id="1" name=""/>
+        <p:cNvGrpSpPr/>
+        <p:nvPr/>
+      </p:nvGrpSpPr>
+      <p:grpSpPr>
+        <a:xfrm>
+          <a:off x="0" y="0"/>
+          <a:ext cx="0" cy="0"/>
+          <a:chOff x="0" y="0"/>
+          <a:chExt cx="0" cy="0"/>
+        </a:xfrm>
+      </p:grpSpPr>
+      <p:sp>
+        <p:nvSpPr>
+          <p:cNvPr id="2" name="Slide Image Placeholder 1"/>
+          <p:cNvSpPr>
+            <a:spLocks noGrp="1" noRot="1" noChangeAspect="1"/>
+          </p:cNvSpPr>
+          <p:nvPr>
+            <p:ph type="sldImg"/>
+          </p:nvPr>
+        </p:nvSpPr>
+        <p:spPr/>
+      </p:sp>
+      <p:sp>
+        <p:nvSpPr>
+          <p:cNvPr id="3" name="Notes Placeholder 2"/>
+          <p:cNvSpPr>
+            <a:spLocks noGrp="1"/>
+          </p:cNvSpPr>
+          <p:nvPr>
+            <p:ph type="body" idx="1"/>
+          </p:nvPr>
+        </p:nvSpPr>
+        <p:spPr/>
+        <p:txBody>
+          <a:bodyPr/>
+          <a:lstStyle/>
+          <a:p>
+            <a:r>
+              <a:rPr lang="en-US" dirty="0"/>
+              <a:t/>
+            </a:r>
+            <a:endParaRPr lang="en-US" dirty="0"/>
+          </a:p>
+        </p:txBody>
+      </p:sp>
+      <p:sp>
+        <p:nvSpPr>
+          <p:cNvPr id="4" name="Slide Number Placeholder 3"/>
+          <p:cNvSpPr>
+            <a:spLocks noGrp="1"/>
+          </p:cNvSpPr>
+          <p:nvPr>
+            <p:ph type="sldNum" sz="quarter" idx="10"/>
+          </p:nvPr>
+        </p:nvSpPr>
+        <p:spPr/>
+        <p:txBody>
+          <a:bodyPr/>
+          <a:lstStyle/>
+          <a:p>
+            <a:fld id="{F7021451-1387-4CA6-816F-3879F97B5CBC}" type="slidenum">
+              <a:rPr lang="en-US"/>
+              <a:t>21</a:t>
             </a:fld>
             <a:endParaRPr lang="en-US"/>
           </a:p>
@@ -1665,7 +1754,7 @@
           <a:p>
             <a:r>
               <a:rPr lang="en-US" dirty="0"/>
-              <a:t>Show of hands: who tried a task after Core 1? Take one or two examples. If few did, say so lightly: "Today you leave with two tasks set up."</a:t>
+              <a:t>Ask for one line in the Zoom chat. Read two or three aloud. Then cover the right box: Zoom and browser side by side, thumbs-up reaction when done, questions in the chat.</a:t>
             </a:r>
             <a:endParaRPr lang="en-US" dirty="0"/>
           </a:p>
@@ -1841,7 +1930,7 @@
           <a:p>
             <a:r>
               <a:rPr lang="en-US" dirty="0"/>
-              <a:t>You frame it, AI drafts the middle, you finish it. The middle is where the weekly hours go.</a:t>
+              <a:t>Before AI, write a few bullets: the point, who it is for, the key facts. Two minutes. AI then drafts from your plan or refines what you wrote, and you check the result against your plan.</a:t>
             </a:r>
             <a:endParaRPr lang="en-US" dirty="0"/>
           </a:p>
@@ -1929,7 +2018,7 @@
           <a:p>
             <a:r>
               <a:rPr lang="en-US" dirty="0"/>
-              <a:t>Point at the gold quadrant: frequent and low-stakes is where to start. Ask the room to name one task that fits there.</a:t>
+              <a:t>The center of the session. AI drafts from your outline: routine, low stakes, you know the content. You write, AI refines: your expertise, judgment, or voice is the point, or the stakes are high. Leave AI out: sensitive information and the decision itself. Ask in the chat for one task per column.</a:t>
             </a:r>
             <a:endParaRPr lang="en-US" dirty="0"/>
           </a:p>
@@ -2017,7 +2106,7 @@
           <a:p>
             <a:r>
               <a:rPr lang="en-US" dirty="0"/>
-              <a:t>Both take pasted text or an uploaded file. Use whichever you like. If asked about Copilot inside Word or Excel: Drexel does not have that license, and you do not need it. In Outlook, the Summarize button at the top of a thread works for everyone.</a:t>
+              <a:t>Each prompt asks for a list, not a rewrite. You stay the author; AI is the second reader. Inconsistencies are the sleeper hit: dates that do not match, a name spelled two ways, a number that changes between sections.</a:t>
             </a:r>
             <a:endParaRPr lang="en-US" dirty="0"/>
           </a:p>
@@ -2105,7 +2194,7 @@
           <a:p>
             <a:r>
               <a:rPr lang="en-US" dirty="0"/>
-              <a:t>Same rule as Core 1. Drexel lists Copilot Chat (signed in) as approved for High Risk Data, but for this session keep the simple rule.</a:t>
+              <a:t>Brief. Both take pasted text or an uploaded file. If asked about Copilot inside Word or Excel: Drexel does not have that license, and you do not need it. In Outlook, the Summarize button works for everyone.</a:t>
             </a:r>
             <a:endParaRPr lang="en-US" dirty="0"/>
           </a:p>
@@ -2193,7 +2282,7 @@
           <a:p>
             <a:r>
               <a:rPr lang="en-US" dirty="0"/>
-              <a:t/>
+              <a:t>Same rule as Core 1. Drexel lists Copilot Chat (signed in) as approved for High Risk Data, but for this session keep the simple rule.</a:t>
             </a:r>
             <a:endParaRPr lang="en-US" dirty="0"/>
           </a:p>
@@ -2853,7 +2942,7 @@
                 <a:ea typeface="Futura" pitchFamily="34" charset="-122"/>
                 <a:cs typeface="Futura" pitchFamily="34" charset="-120"/>
               </a:rPr>
-              <a:t>Turn tasks you do every week into quick routines with ChatGPT Edu and Copilot Chat</a:t>
+              <a:t>Start from your own plan, then let ChatGPT Edu or Copilot Chat draft or refine</a:t>
             </a:r>
             <a:endParaRPr lang="en-US" sz="2600" dirty="0"/>
           </a:p>
@@ -2970,7 +3059,7 @@
                 <a:ea typeface="Futura" pitchFamily="34" charset="-122"/>
                 <a:cs typeface="Futura" pitchFamily="34" charset="-120"/>
               </a:rPr>
-              <a:t>Core 2 · Fall 2026</a:t>
+              <a:t>Core 2 · Fall 2026 · on Zoom</a:t>
             </a:r>
             <a:endParaRPr lang="en-US" sz="1900" dirty="0"/>
           </a:p>
@@ -2987,6 +3076,175 @@
 <file path=ppt/slides/slide10.xml><?xml version="1.0" encoding="utf-8"?>
 <p:sld xmlns:a="http://schemas.openxmlformats.org/drawingml/2006/main" xmlns:r="http://schemas.openxmlformats.org/officeDocument/2006/relationships" xmlns:p="http://schemas.openxmlformats.org/presentationml/2006/main">
   <p:cSld name="Slide 10">
+    <p:bg>
+      <p:bgPr>
+        <a:solidFill>
+          <a:srgbClr val="07294D"/>
+        </a:solidFill>
+      </p:bgPr>
+    </p:bg>
+    <p:spTree>
+      <p:nvGrpSpPr>
+        <p:cNvPr id="1" name=""/>
+        <p:cNvGrpSpPr/>
+        <p:nvPr/>
+      </p:nvGrpSpPr>
+      <p:grpSpPr>
+        <a:xfrm>
+          <a:off x="0" y="0"/>
+          <a:ext cx="0" cy="0"/>
+          <a:chOff x="0" y="0"/>
+          <a:chExt cx="0" cy="0"/>
+        </a:xfrm>
+      </p:grpSpPr>
+      <p:sp>
+        <p:nvSpPr>
+          <p:cNvPr id="2" name="Text 0"/>
+          <p:cNvSpPr txBox="1"/>
+          <p:nvPr/>
+        </p:nvSpPr>
+        <p:spPr>
+          <a:xfrm>
+            <a:off x="1028700" y="3383280"/>
+            <a:ext cx="16230600" cy="274320"/>
+          </a:xfrm>
+          <a:prstGeom prst="rect">
+            <a:avLst/>
+          </a:prstGeom>
+          <a:noFill/>
+          <a:ln/>
+        </p:spPr>
+        <p:txBody>
+          <a:bodyPr wrap="square" lIns="0" tIns="0" rIns="0" bIns="0" rtlCol="0" anchor="t"/>
+          <a:lstStyle/>
+          <a:p>
+            <a:pPr indent="0" marL="0">
+              <a:buNone/>
+            </a:pPr>
+            <a:r>
+              <a:rPr lang="en-US" sz="1800" b="1" spc="300" kern="0" dirty="0">
+                <a:solidFill>
+                  <a:srgbClr val="FFC600"/>
+                </a:solidFill>
+                <a:latin typeface="Futura" pitchFamily="34" charset="0"/>
+                <a:ea typeface="Futura" pitchFamily="34" charset="-122"/>
+                <a:cs typeface="Futura" pitchFamily="34" charset="-120"/>
+              </a:rPr>
+              <a:t>SECTION 02</a:t>
+            </a:r>
+            <a:endParaRPr lang="en-US" sz="1800" dirty="0"/>
+          </a:p>
+        </p:txBody>
+      </p:sp>
+      <p:sp>
+        <p:nvSpPr>
+          <p:cNvPr id="3" name="Text 1"/>
+          <p:cNvSpPr txBox="1"/>
+          <p:nvPr/>
+        </p:nvSpPr>
+        <p:spPr>
+          <a:xfrm>
+            <a:off x="1028700" y="3749040"/>
+            <a:ext cx="16230600" cy="1097280"/>
+          </a:xfrm>
+          <a:prstGeom prst="rect">
+            <a:avLst/>
+          </a:prstGeom>
+          <a:noFill/>
+          <a:ln/>
+        </p:spPr>
+        <p:txBody>
+          <a:bodyPr wrap="square" lIns="0" tIns="0" rIns="0" bIns="0" rtlCol="0" anchor="ctr"/>
+          <a:lstStyle/>
+          <a:p>
+            <a:pPr indent="0" marL="0">
+              <a:buNone/>
+            </a:pPr>
+            <a:r>
+              <a:rPr lang="en-US" sz="7400" b="1" dirty="0">
+                <a:solidFill>
+                  <a:srgbClr val="FFFFFF"/>
+                </a:solidFill>
+                <a:latin typeface="Georgia" pitchFamily="34" charset="0"/>
+                <a:ea typeface="Georgia" pitchFamily="34" charset="-122"/>
+                <a:cs typeface="Georgia" pitchFamily="34" charset="-120"/>
+              </a:rPr>
+              <a:t>Check Before You Use It</a:t>
+            </a:r>
+            <a:endParaRPr lang="en-US" sz="7400" dirty="0"/>
+          </a:p>
+        </p:txBody>
+      </p:sp>
+      <p:sp>
+        <p:nvSpPr>
+          <p:cNvPr id="4" name="Shape 2"/>
+          <p:cNvSpPr/>
+          <p:nvPr/>
+        </p:nvSpPr>
+        <p:spPr>
+          <a:xfrm>
+            <a:off x="1028700" y="5074920"/>
+            <a:ext cx="777240" cy="73152"/>
+          </a:xfrm>
+          <a:prstGeom prst="rect">
+            <a:avLst/>
+          </a:prstGeom>
+          <a:solidFill>
+            <a:srgbClr val="FFC600"/>
+          </a:solidFill>
+          <a:ln/>
+        </p:spPr>
+      </p:sp>
+      <p:sp>
+        <p:nvSpPr>
+          <p:cNvPr id="5" name="Text 3"/>
+          <p:cNvSpPr txBox="1"/>
+          <p:nvPr/>
+        </p:nvSpPr>
+        <p:spPr>
+          <a:xfrm>
+            <a:off x="1028700" y="5486400"/>
+            <a:ext cx="13258800" cy="914400"/>
+          </a:xfrm>
+          <a:prstGeom prst="rect">
+            <a:avLst/>
+          </a:prstGeom>
+          <a:noFill/>
+          <a:ln/>
+        </p:spPr>
+        <p:txBody>
+          <a:bodyPr wrap="square" lIns="0" tIns="0" rIns="0" bIns="0" rtlCol="0" anchor="t"/>
+          <a:lstStyle/>
+          <a:p>
+            <a:pPr indent="0" marL="0">
+              <a:buNone/>
+            </a:pPr>
+            <a:r>
+              <a:rPr lang="en-US" sz="2800" dirty="0">
+                <a:solidFill>
+                  <a:srgbClr val="C7D2DF"/>
+                </a:solidFill>
+                <a:latin typeface="Futura" pitchFamily="34" charset="0"/>
+                <a:ea typeface="Futura" pitchFamily="34" charset="-122"/>
+                <a:cs typeface="Futura" pitchFamily="34" charset="-120"/>
+              </a:rPr>
+              <a:t>Three quick questions before anything leaves your hands.</a:t>
+            </a:r>
+            <a:endParaRPr lang="en-US" sz="2800" dirty="0"/>
+          </a:p>
+        </p:txBody>
+      </p:sp>
+    </p:spTree>
+  </p:cSld>
+  <p:clrMapOvr>
+    <a:masterClrMapping/>
+  </p:clrMapOvr>
+</p:sld>
+</file>
+
+<file path=ppt/slides/slide11.xml><?xml version="1.0" encoding="utf-8"?>
+<p:sld xmlns:a="http://schemas.openxmlformats.org/drawingml/2006/main" xmlns:r="http://schemas.openxmlformats.org/officeDocument/2006/relationships" xmlns:p="http://schemas.openxmlformats.org/presentationml/2006/main">
+  <p:cSld name="Slide 11">
     <p:bg>
       <p:bgPr>
         <a:solidFill>
@@ -3010,7 +3268,7 @@
       </p:grpSpPr>
       <p:pic>
         <p:nvPicPr>
-          <p:cNvPr id="2" name="Image 0" descr="/private/tmp/claude-1279606903/-Users-daq26-Library-CloudStorage-OneDrive-DrexelUniversity-Anthropic-AI-for-UH-Course-workshop-website/f22b16b1-71f0-4e6b-b603-aa7f51f0b99e/scratchpad/w2img/s10.png">    </p:cNvPr>
+          <p:cNvPr id="2" name="Image 0" descr="/private/tmp/claude-1279606903/-Users-daq26-Library-CloudStorage-OneDrive-DrexelUniversity-Anthropic-AI-for-UH-Course-workshop-website/f22b16b1-71f0-4e6b-b603-aa7f51f0b99e/scratchpad/w2img/s11.png">    </p:cNvPr>
           <p:cNvPicPr>
             <a:picLocks noChangeAspect="1"/>
           </p:cNvPicPr>
@@ -3040,9 +3298,9 @@
 </p:sld>
 </file>
 
-<file path=ppt/slides/slide11.xml><?xml version="1.0" encoding="utf-8"?>
+<file path=ppt/slides/slide12.xml><?xml version="1.0" encoding="utf-8"?>
 <p:sld xmlns:a="http://schemas.openxmlformats.org/drawingml/2006/main" xmlns:r="http://schemas.openxmlformats.org/officeDocument/2006/relationships" xmlns:p="http://schemas.openxmlformats.org/presentationml/2006/main">
-  <p:cSld name="Slide 11">
+  <p:cSld name="Slide 12">
     <p:bg>
       <p:bgPr>
         <a:solidFill>
@@ -3248,9 +3506,9 @@
 </p:sld>
 </file>
 
-<file path=ppt/slides/slide12.xml><?xml version="1.0" encoding="utf-8"?>
+<file path=ppt/slides/slide13.xml><?xml version="1.0" encoding="utf-8"?>
 <p:sld xmlns:a="http://schemas.openxmlformats.org/drawingml/2006/main" xmlns:r="http://schemas.openxmlformats.org/officeDocument/2006/relationships" xmlns:p="http://schemas.openxmlformats.org/presentationml/2006/main">
-  <p:cSld name="Slide 12">
+  <p:cSld name="Slide 13">
     <p:bg>
       <p:bgPr>
         <a:solidFill>
@@ -3403,769 +3661,9 @@
                 <a:ea typeface="Futura" pitchFamily="34" charset="-122"/>
                 <a:cs typeface="Futura" pitchFamily="34" charset="-120"/>
               </a:rPr>
-              <a:t>Upload a file together, then pick one everyday job, then your own task. Demo files are on the workshop page.</a:t>
+              <a:t>Upload a file together, then pick one everyday job, then your own task. Demo file links are in the Zoom chat.</a:t>
             </a:r>
             <a:endParaRPr lang="en-US" sz="2800" dirty="0"/>
-          </a:p>
-        </p:txBody>
-      </p:sp>
-    </p:spTree>
-  </p:cSld>
-  <p:clrMapOvr>
-    <a:masterClrMapping/>
-  </p:clrMapOvr>
-</p:sld>
-</file>
-
-<file path=ppt/slides/slide13.xml><?xml version="1.0" encoding="utf-8"?>
-<p:sld xmlns:a="http://schemas.openxmlformats.org/drawingml/2006/main" xmlns:r="http://schemas.openxmlformats.org/officeDocument/2006/relationships" xmlns:p="http://schemas.openxmlformats.org/presentationml/2006/main">
-  <p:cSld name="Slide 13">
-    <p:bg>
-      <p:bgPr>
-        <a:solidFill>
-          <a:srgbClr val="FFFFFF"/>
-        </a:solidFill>
-      </p:bgPr>
-    </p:bg>
-    <p:spTree>
-      <p:nvGrpSpPr>
-        <p:cNvPr id="1" name=""/>
-        <p:cNvGrpSpPr/>
-        <p:nvPr/>
-      </p:nvGrpSpPr>
-      <p:grpSpPr>
-        <a:xfrm>
-          <a:off x="0" y="0"/>
-          <a:ext cx="0" cy="0"/>
-          <a:chOff x="0" y="0"/>
-          <a:chExt cx="0" cy="0"/>
-        </a:xfrm>
-      </p:grpSpPr>
-      <p:sp>
-        <p:nvSpPr>
-          <p:cNvPr id="2" name="Text 0"/>
-          <p:cNvSpPr txBox="1"/>
-          <p:nvPr/>
-        </p:nvSpPr>
-        <p:spPr>
-          <a:xfrm>
-            <a:off x="1028700" y="868680"/>
-            <a:ext cx="16230600" cy="274320"/>
-          </a:xfrm>
-          <a:prstGeom prst="rect">
-            <a:avLst/>
-          </a:prstGeom>
-          <a:noFill/>
-          <a:ln/>
-        </p:spPr>
-        <p:txBody>
-          <a:bodyPr wrap="square" lIns="0" tIns="0" rIns="0" bIns="0" rtlCol="0" anchor="t"/>
-          <a:lstStyle/>
-          <a:p>
-            <a:pPr indent="0" marL="0">
-              <a:buNone/>
-            </a:pPr>
-            <a:r>
-              <a:rPr lang="en-US" sz="1800" b="1" spc="300" kern="0" dirty="0">
-                <a:solidFill>
-                  <a:srgbClr val="006699"/>
-                </a:solidFill>
-                <a:latin typeface="Futura" pitchFamily="34" charset="0"/>
-                <a:ea typeface="Futura" pitchFamily="34" charset="-122"/>
-                <a:cs typeface="Futura" pitchFamily="34" charset="-120"/>
-              </a:rPr>
-              <a:t>GUIDED START · ~5 MIN · FOLLOW ALONG</a:t>
-            </a:r>
-            <a:endParaRPr lang="en-US" sz="1800" dirty="0"/>
-          </a:p>
-        </p:txBody>
-      </p:sp>
-      <p:sp>
-        <p:nvSpPr>
-          <p:cNvPr id="3" name="Text 1"/>
-          <p:cNvSpPr txBox="1"/>
-          <p:nvPr/>
-        </p:nvSpPr>
-        <p:spPr>
-          <a:xfrm>
-            <a:off x="1028700" y="1188720"/>
-            <a:ext cx="16230600" cy="822960"/>
-          </a:xfrm>
-          <a:prstGeom prst="rect">
-            <a:avLst/>
-          </a:prstGeom>
-          <a:noFill/>
-          <a:ln/>
-        </p:spPr>
-        <p:txBody>
-          <a:bodyPr wrap="square" lIns="0" tIns="0" rIns="0" bIns="0" rtlCol="0" anchor="ctr"/>
-          <a:lstStyle/>
-          <a:p>
-            <a:pPr indent="0" marL="0">
-              <a:buNone/>
-            </a:pPr>
-            <a:r>
-              <a:rPr lang="en-US" sz="5500" b="1" dirty="0">
-                <a:solidFill>
-                  <a:srgbClr val="07294D"/>
-                </a:solidFill>
-                <a:latin typeface="Georgia" pitchFamily="34" charset="0"/>
-                <a:ea typeface="Georgia" pitchFamily="34" charset="-122"/>
-                <a:cs typeface="Georgia" pitchFamily="34" charset="-120"/>
-              </a:rPr>
-              <a:t>Upload a File to Copilot Chat</a:t>
-            </a:r>
-            <a:endParaRPr lang="en-US" sz="5500" dirty="0"/>
-          </a:p>
-        </p:txBody>
-      </p:sp>
-      <p:sp>
-        <p:nvSpPr>
-          <p:cNvPr id="4" name="Shape 2"/>
-          <p:cNvSpPr/>
-          <p:nvPr/>
-        </p:nvSpPr>
-        <p:spPr>
-          <a:xfrm>
-            <a:off x="1028700" y="2103120"/>
-            <a:ext cx="777240" cy="73152"/>
-          </a:xfrm>
-          <a:prstGeom prst="rect">
-            <a:avLst/>
-          </a:prstGeom>
-          <a:solidFill>
-            <a:srgbClr val="FFC600"/>
-          </a:solidFill>
-          <a:ln/>
-        </p:spPr>
-      </p:sp>
-      <p:sp>
-        <p:nvSpPr>
-          <p:cNvPr id="5" name="Shape 3"/>
-          <p:cNvSpPr/>
-          <p:nvPr/>
-        </p:nvSpPr>
-        <p:spPr>
-          <a:xfrm>
-            <a:off x="1028700" y="9646920"/>
-            <a:ext cx="16230600" cy="0"/>
-          </a:xfrm>
-          <a:prstGeom prst="line">
-            <a:avLst/>
-          </a:prstGeom>
-          <a:noFill/>
-          <a:ln w="9525">
-            <a:solidFill>
-              <a:srgbClr val="D0D3D4"/>
-            </a:solidFill>
-            <a:prstDash val="solid"/>
-          </a:ln>
-        </p:spPr>
-      </p:sp>
-      <p:sp>
-        <p:nvSpPr>
-          <p:cNvPr id="6" name="Text 4"/>
-          <p:cNvSpPr txBox="1"/>
-          <p:nvPr/>
-        </p:nvSpPr>
-        <p:spPr>
-          <a:xfrm>
-            <a:off x="1028700" y="9784080"/>
-            <a:ext cx="7315200" cy="274320"/>
-          </a:xfrm>
-          <a:prstGeom prst="rect">
-            <a:avLst/>
-          </a:prstGeom>
-          <a:noFill/>
-          <a:ln/>
-        </p:spPr>
-        <p:txBody>
-          <a:bodyPr wrap="square" lIns="0" tIns="0" rIns="0" bIns="0" rtlCol="0" anchor="t"/>
-          <a:lstStyle/>
-          <a:p>
-            <a:pPr indent="0" marL="0">
-              <a:buNone/>
-            </a:pPr>
-            <a:r>
-              <a:rPr lang="en-US" sz="1400" b="1" dirty="0">
-                <a:solidFill>
-                  <a:srgbClr val="07294D"/>
-                </a:solidFill>
-                <a:latin typeface="Futura" pitchFamily="34" charset="0"/>
-                <a:ea typeface="Futura" pitchFamily="34" charset="-122"/>
-                <a:cs typeface="Futura" pitchFamily="34" charset="-120"/>
-              </a:rPr>
-              <a:t>Environmental &amp; Occupational Health</a:t>
-            </a:r>
-            <a:endParaRPr lang="en-US" sz="1400" dirty="0"/>
-          </a:p>
-        </p:txBody>
-      </p:sp>
-      <p:sp>
-        <p:nvSpPr>
-          <p:cNvPr id="7" name="Text 5"/>
-          <p:cNvSpPr txBox="1"/>
-          <p:nvPr/>
-        </p:nvSpPr>
-        <p:spPr>
-          <a:xfrm>
-            <a:off x="9944100" y="9784080"/>
-            <a:ext cx="7315200" cy="274320"/>
-          </a:xfrm>
-          <a:prstGeom prst="rect">
-            <a:avLst/>
-          </a:prstGeom>
-          <a:noFill/>
-          <a:ln/>
-        </p:spPr>
-        <p:txBody>
-          <a:bodyPr wrap="square" lIns="0" tIns="0" rIns="0" bIns="0" rtlCol="0" anchor="t"/>
-          <a:lstStyle/>
-          <a:p>
-            <a:pPr algn="r" indent="0" marL="0">
-              <a:buNone/>
-            </a:pPr>
-            <a:r>
-              <a:rPr lang="en-US" sz="1400" dirty="0">
-                <a:solidFill>
-                  <a:srgbClr val="5A6571"/>
-                </a:solidFill>
-                <a:latin typeface="Futura" pitchFamily="34" charset="0"/>
-                <a:ea typeface="Futura" pitchFamily="34" charset="-122"/>
-                <a:cs typeface="Futura" pitchFamily="34" charset="-120"/>
-              </a:rPr>
-              <a:t>Dornsife School of Public Health</a:t>
-            </a:r>
-            <a:endParaRPr lang="en-US" sz="1400" dirty="0"/>
-          </a:p>
-        </p:txBody>
-      </p:sp>
-      <p:sp>
-        <p:nvSpPr>
-          <p:cNvPr id="9" name="Shape 6"/>
-          <p:cNvSpPr/>
-          <p:nvPr/>
-        </p:nvSpPr>
-        <p:spPr>
-          <a:xfrm>
-            <a:off x="1028700" y="2697480"/>
-            <a:ext cx="502920" cy="502920"/>
-          </a:xfrm>
-          <a:prstGeom prst="ellipse">
-            <a:avLst/>
-          </a:prstGeom>
-          <a:solidFill>
-            <a:srgbClr val="FFC600"/>
-          </a:solidFill>
-          <a:ln/>
-        </p:spPr>
-      </p:sp>
-      <p:sp>
-        <p:nvSpPr>
-          <p:cNvPr id="10" name="Text 7"/>
-          <p:cNvSpPr txBox="1"/>
-          <p:nvPr/>
-        </p:nvSpPr>
-        <p:spPr>
-          <a:xfrm>
-            <a:off x="1028700" y="2697480"/>
-            <a:ext cx="502920" cy="502920"/>
-          </a:xfrm>
-          <a:prstGeom prst="rect">
-            <a:avLst/>
-          </a:prstGeom>
-          <a:noFill/>
-          <a:ln/>
-        </p:spPr>
-        <p:txBody>
-          <a:bodyPr wrap="square" lIns="0" tIns="0" rIns="0" bIns="0" rtlCol="0" anchor="ctr"/>
-          <a:lstStyle/>
-          <a:p>
-            <a:pPr algn="ctr" indent="0" marL="0">
-              <a:buNone/>
-            </a:pPr>
-            <a:r>
-              <a:rPr lang="en-US" sz="2200" b="1" dirty="0">
-                <a:solidFill>
-                  <a:srgbClr val="07294D"/>
-                </a:solidFill>
-                <a:latin typeface="Futura" pitchFamily="34" charset="0"/>
-                <a:ea typeface="Futura" pitchFamily="34" charset="-122"/>
-                <a:cs typeface="Futura" pitchFamily="34" charset="-120"/>
-              </a:rPr>
-              <a:t>1</a:t>
-            </a:r>
-            <a:endParaRPr lang="en-US" sz="2200" dirty="0"/>
-          </a:p>
-        </p:txBody>
-      </p:sp>
-      <p:sp>
-        <p:nvSpPr>
-          <p:cNvPr id="11" name="Text 8"/>
-          <p:cNvSpPr txBox="1"/>
-          <p:nvPr/>
-        </p:nvSpPr>
-        <p:spPr>
-          <a:xfrm>
-            <a:off x="1805940" y="2697480"/>
-            <a:ext cx="15453360" cy="502920"/>
-          </a:xfrm>
-          <a:prstGeom prst="rect">
-            <a:avLst/>
-          </a:prstGeom>
-          <a:noFill/>
-          <a:ln/>
-        </p:spPr>
-        <p:txBody>
-          <a:bodyPr wrap="square" lIns="0" tIns="0" rIns="0" bIns="0" rtlCol="0" anchor="ctr"/>
-          <a:lstStyle/>
-          <a:p>
-            <a:pPr indent="0" marL="0">
-              <a:buNone/>
-            </a:pPr>
-            <a:r>
-              <a:rPr lang="en-US" sz="2500" dirty="0">
-                <a:solidFill>
-                  <a:srgbClr val="1C2530"/>
-                </a:solidFill>
-                <a:latin typeface="Futura" pitchFamily="34" charset="0"/>
-                <a:ea typeface="Futura" pitchFamily="34" charset="-122"/>
-                <a:cs typeface="Futura" pitchFamily="34" charset="-120"/>
-              </a:rPr>
-              <a:t>Download Workshop2_Demo_StudyDescription.docx from the Core 2 page.</a:t>
-            </a:r>
-            <a:endParaRPr lang="en-US" sz="2500" dirty="0"/>
-          </a:p>
-        </p:txBody>
-      </p:sp>
-      <p:sp>
-        <p:nvSpPr>
-          <p:cNvPr id="12" name="Shape 9"/>
-          <p:cNvSpPr/>
-          <p:nvPr/>
-        </p:nvSpPr>
-        <p:spPr>
-          <a:xfrm>
-            <a:off x="1028700" y="3566160"/>
-            <a:ext cx="502920" cy="502920"/>
-          </a:xfrm>
-          <a:prstGeom prst="ellipse">
-            <a:avLst/>
-          </a:prstGeom>
-          <a:solidFill>
-            <a:srgbClr val="FFC600"/>
-          </a:solidFill>
-          <a:ln/>
-        </p:spPr>
-      </p:sp>
-      <p:sp>
-        <p:nvSpPr>
-          <p:cNvPr id="13" name="Text 10"/>
-          <p:cNvSpPr txBox="1"/>
-          <p:nvPr/>
-        </p:nvSpPr>
-        <p:spPr>
-          <a:xfrm>
-            <a:off x="1028700" y="3566160"/>
-            <a:ext cx="502920" cy="502920"/>
-          </a:xfrm>
-          <a:prstGeom prst="rect">
-            <a:avLst/>
-          </a:prstGeom>
-          <a:noFill/>
-          <a:ln/>
-        </p:spPr>
-        <p:txBody>
-          <a:bodyPr wrap="square" lIns="0" tIns="0" rIns="0" bIns="0" rtlCol="0" anchor="ctr"/>
-          <a:lstStyle/>
-          <a:p>
-            <a:pPr algn="ctr" indent="0" marL="0">
-              <a:buNone/>
-            </a:pPr>
-            <a:r>
-              <a:rPr lang="en-US" sz="2200" b="1" dirty="0">
-                <a:solidFill>
-                  <a:srgbClr val="07294D"/>
-                </a:solidFill>
-                <a:latin typeface="Futura" pitchFamily="34" charset="0"/>
-                <a:ea typeface="Futura" pitchFamily="34" charset="-122"/>
-                <a:cs typeface="Futura" pitchFamily="34" charset="-120"/>
-              </a:rPr>
-              <a:t>2</a:t>
-            </a:r>
-            <a:endParaRPr lang="en-US" sz="2200" dirty="0"/>
-          </a:p>
-        </p:txBody>
-      </p:sp>
-      <p:sp>
-        <p:nvSpPr>
-          <p:cNvPr id="14" name="Text 11"/>
-          <p:cNvSpPr txBox="1"/>
-          <p:nvPr/>
-        </p:nvSpPr>
-        <p:spPr>
-          <a:xfrm>
-            <a:off x="1805940" y="3566160"/>
-            <a:ext cx="15453360" cy="502920"/>
-          </a:xfrm>
-          <a:prstGeom prst="rect">
-            <a:avLst/>
-          </a:prstGeom>
-          <a:noFill/>
-          <a:ln/>
-        </p:spPr>
-        <p:txBody>
-          <a:bodyPr wrap="square" lIns="0" tIns="0" rIns="0" bIns="0" rtlCol="0" anchor="ctr"/>
-          <a:lstStyle/>
-          <a:p>
-            <a:pPr indent="0" marL="0">
-              <a:buNone/>
-            </a:pPr>
-            <a:r>
-              <a:rPr lang="en-US" sz="2500" dirty="0">
-                <a:solidFill>
-                  <a:srgbClr val="1C2530"/>
-                </a:solidFill>
-                <a:latin typeface="Futura" pitchFamily="34" charset="0"/>
-                <a:ea typeface="Futura" pitchFamily="34" charset="-122"/>
-                <a:cs typeface="Futura" pitchFamily="34" charset="-120"/>
-              </a:rPr>
-              <a:t>Go to m365.cloud.microsoft/chat and sign in with your Drexel account. Look for the shield icon.</a:t>
-            </a:r>
-            <a:endParaRPr lang="en-US" sz="2500" dirty="0"/>
-          </a:p>
-        </p:txBody>
-      </p:sp>
-      <p:sp>
-        <p:nvSpPr>
-          <p:cNvPr id="15" name="Shape 12"/>
-          <p:cNvSpPr/>
-          <p:nvPr/>
-        </p:nvSpPr>
-        <p:spPr>
-          <a:xfrm>
-            <a:off x="1028700" y="4434840"/>
-            <a:ext cx="502920" cy="502920"/>
-          </a:xfrm>
-          <a:prstGeom prst="ellipse">
-            <a:avLst/>
-          </a:prstGeom>
-          <a:solidFill>
-            <a:srgbClr val="FFC600"/>
-          </a:solidFill>
-          <a:ln/>
-        </p:spPr>
-      </p:sp>
-      <p:sp>
-        <p:nvSpPr>
-          <p:cNvPr id="16" name="Text 13"/>
-          <p:cNvSpPr txBox="1"/>
-          <p:nvPr/>
-        </p:nvSpPr>
-        <p:spPr>
-          <a:xfrm>
-            <a:off x="1028700" y="4434840"/>
-            <a:ext cx="502920" cy="502920"/>
-          </a:xfrm>
-          <a:prstGeom prst="rect">
-            <a:avLst/>
-          </a:prstGeom>
-          <a:noFill/>
-          <a:ln/>
-        </p:spPr>
-        <p:txBody>
-          <a:bodyPr wrap="square" lIns="0" tIns="0" rIns="0" bIns="0" rtlCol="0" anchor="ctr"/>
-          <a:lstStyle/>
-          <a:p>
-            <a:pPr algn="ctr" indent="0" marL="0">
-              <a:buNone/>
-            </a:pPr>
-            <a:r>
-              <a:rPr lang="en-US" sz="2200" b="1" dirty="0">
-                <a:solidFill>
-                  <a:srgbClr val="07294D"/>
-                </a:solidFill>
-                <a:latin typeface="Futura" pitchFamily="34" charset="0"/>
-                <a:ea typeface="Futura" pitchFamily="34" charset="-122"/>
-                <a:cs typeface="Futura" pitchFamily="34" charset="-120"/>
-              </a:rPr>
-              <a:t>3</a:t>
-            </a:r>
-            <a:endParaRPr lang="en-US" sz="2200" dirty="0"/>
-          </a:p>
-        </p:txBody>
-      </p:sp>
-      <p:sp>
-        <p:nvSpPr>
-          <p:cNvPr id="17" name="Text 14"/>
-          <p:cNvSpPr txBox="1"/>
-          <p:nvPr/>
-        </p:nvSpPr>
-        <p:spPr>
-          <a:xfrm>
-            <a:off x="1805940" y="4434840"/>
-            <a:ext cx="15453360" cy="502920"/>
-          </a:xfrm>
-          <a:prstGeom prst="rect">
-            <a:avLst/>
-          </a:prstGeom>
-          <a:noFill/>
-          <a:ln/>
-        </p:spPr>
-        <p:txBody>
-          <a:bodyPr wrap="square" lIns="0" tIns="0" rIns="0" bIns="0" rtlCol="0" anchor="ctr"/>
-          <a:lstStyle/>
-          <a:p>
-            <a:pPr indent="0" marL="0">
-              <a:buNone/>
-            </a:pPr>
-            <a:r>
-              <a:rPr lang="en-US" sz="2500" dirty="0">
-                <a:solidFill>
-                  <a:srgbClr val="1C2530"/>
-                </a:solidFill>
-                <a:latin typeface="Futura" pitchFamily="34" charset="0"/>
-                <a:ea typeface="Futura" pitchFamily="34" charset="-122"/>
-                <a:cs typeface="Futura" pitchFamily="34" charset="-120"/>
-              </a:rPr>
-              <a:t>Click + next to the message box and upload the file (or paste the text).</a:t>
-            </a:r>
-            <a:endParaRPr lang="en-US" sz="2500" dirty="0"/>
-          </a:p>
-        </p:txBody>
-      </p:sp>
-      <p:sp>
-        <p:nvSpPr>
-          <p:cNvPr id="18" name="Shape 15"/>
-          <p:cNvSpPr/>
-          <p:nvPr/>
-        </p:nvSpPr>
-        <p:spPr>
-          <a:xfrm>
-            <a:off x="1028700" y="5303520"/>
-            <a:ext cx="502920" cy="502920"/>
-          </a:xfrm>
-          <a:prstGeom prst="ellipse">
-            <a:avLst/>
-          </a:prstGeom>
-          <a:solidFill>
-            <a:srgbClr val="FFC600"/>
-          </a:solidFill>
-          <a:ln/>
-        </p:spPr>
-      </p:sp>
-      <p:sp>
-        <p:nvSpPr>
-          <p:cNvPr id="19" name="Text 16"/>
-          <p:cNvSpPr txBox="1"/>
-          <p:nvPr/>
-        </p:nvSpPr>
-        <p:spPr>
-          <a:xfrm>
-            <a:off x="1028700" y="5303520"/>
-            <a:ext cx="502920" cy="502920"/>
-          </a:xfrm>
-          <a:prstGeom prst="rect">
-            <a:avLst/>
-          </a:prstGeom>
-          <a:noFill/>
-          <a:ln/>
-        </p:spPr>
-        <p:txBody>
-          <a:bodyPr wrap="square" lIns="0" tIns="0" rIns="0" bIns="0" rtlCol="0" anchor="ctr"/>
-          <a:lstStyle/>
-          <a:p>
-            <a:pPr algn="ctr" indent="0" marL="0">
-              <a:buNone/>
-            </a:pPr>
-            <a:r>
-              <a:rPr lang="en-US" sz="2200" b="1" dirty="0">
-                <a:solidFill>
-                  <a:srgbClr val="07294D"/>
-                </a:solidFill>
-                <a:latin typeface="Futura" pitchFamily="34" charset="0"/>
-                <a:ea typeface="Futura" pitchFamily="34" charset="-122"/>
-                <a:cs typeface="Futura" pitchFamily="34" charset="-120"/>
-              </a:rPr>
-              <a:t>4</a:t>
-            </a:r>
-            <a:endParaRPr lang="en-US" sz="2200" dirty="0"/>
-          </a:p>
-        </p:txBody>
-      </p:sp>
-      <p:sp>
-        <p:nvSpPr>
-          <p:cNvPr id="20" name="Text 17"/>
-          <p:cNvSpPr txBox="1"/>
-          <p:nvPr/>
-        </p:nvSpPr>
-        <p:spPr>
-          <a:xfrm>
-            <a:off x="1805940" y="5303520"/>
-            <a:ext cx="15453360" cy="502920"/>
-          </a:xfrm>
-          <a:prstGeom prst="rect">
-            <a:avLst/>
-          </a:prstGeom>
-          <a:noFill/>
-          <a:ln/>
-        </p:spPr>
-        <p:txBody>
-          <a:bodyPr wrap="square" lIns="0" tIns="0" rIns="0" bIns="0" rtlCol="0" anchor="ctr"/>
-          <a:lstStyle/>
-          <a:p>
-            <a:pPr indent="0" marL="0">
-              <a:buNone/>
-            </a:pPr>
-            <a:r>
-              <a:rPr lang="en-US" sz="2500" dirty="0">
-                <a:solidFill>
-                  <a:srgbClr val="1C2530"/>
-                </a:solidFill>
-                <a:latin typeface="Futura" pitchFamily="34" charset="0"/>
-                <a:ea typeface="Futura" pitchFamily="34" charset="-122"/>
-                <a:cs typeface="Futura" pitchFamily="34" charset="-120"/>
-              </a:rPr>
-              <a:t>Type: “Summarize this document in 5 bullet points for a project status update.”</a:t>
-            </a:r>
-            <a:endParaRPr lang="en-US" sz="2500" dirty="0"/>
-          </a:p>
-        </p:txBody>
-      </p:sp>
-      <p:sp>
-        <p:nvSpPr>
-          <p:cNvPr id="21" name="Shape 18"/>
-          <p:cNvSpPr/>
-          <p:nvPr/>
-        </p:nvSpPr>
-        <p:spPr>
-          <a:xfrm>
-            <a:off x="1028700" y="6172200"/>
-            <a:ext cx="502920" cy="502920"/>
-          </a:xfrm>
-          <a:prstGeom prst="ellipse">
-            <a:avLst/>
-          </a:prstGeom>
-          <a:solidFill>
-            <a:srgbClr val="FFC600"/>
-          </a:solidFill>
-          <a:ln/>
-        </p:spPr>
-      </p:sp>
-      <p:sp>
-        <p:nvSpPr>
-          <p:cNvPr id="22" name="Text 19"/>
-          <p:cNvSpPr txBox="1"/>
-          <p:nvPr/>
-        </p:nvSpPr>
-        <p:spPr>
-          <a:xfrm>
-            <a:off x="1028700" y="6172200"/>
-            <a:ext cx="502920" cy="502920"/>
-          </a:xfrm>
-          <a:prstGeom prst="rect">
-            <a:avLst/>
-          </a:prstGeom>
-          <a:noFill/>
-          <a:ln/>
-        </p:spPr>
-        <p:txBody>
-          <a:bodyPr wrap="square" lIns="0" tIns="0" rIns="0" bIns="0" rtlCol="0" anchor="ctr"/>
-          <a:lstStyle/>
-          <a:p>
-            <a:pPr algn="ctr" indent="0" marL="0">
-              <a:buNone/>
-            </a:pPr>
-            <a:r>
-              <a:rPr lang="en-US" sz="2200" b="1" dirty="0">
-                <a:solidFill>
-                  <a:srgbClr val="07294D"/>
-                </a:solidFill>
-                <a:latin typeface="Futura" pitchFamily="34" charset="0"/>
-                <a:ea typeface="Futura" pitchFamily="34" charset="-122"/>
-                <a:cs typeface="Futura" pitchFamily="34" charset="-120"/>
-              </a:rPr>
-              <a:t>5</a:t>
-            </a:r>
-            <a:endParaRPr lang="en-US" sz="2200" dirty="0"/>
-          </a:p>
-        </p:txBody>
-      </p:sp>
-      <p:sp>
-        <p:nvSpPr>
-          <p:cNvPr id="23" name="Text 20"/>
-          <p:cNvSpPr txBox="1"/>
-          <p:nvPr/>
-        </p:nvSpPr>
-        <p:spPr>
-          <a:xfrm>
-            <a:off x="1805940" y="6172200"/>
-            <a:ext cx="15453360" cy="502920"/>
-          </a:xfrm>
-          <a:prstGeom prst="rect">
-            <a:avLst/>
-          </a:prstGeom>
-          <a:noFill/>
-          <a:ln/>
-        </p:spPr>
-        <p:txBody>
-          <a:bodyPr wrap="square" lIns="0" tIns="0" rIns="0" bIns="0" rtlCol="0" anchor="ctr"/>
-          <a:lstStyle/>
-          <a:p>
-            <a:pPr indent="0" marL="0">
-              <a:buNone/>
-            </a:pPr>
-            <a:r>
-              <a:rPr lang="en-US" sz="2500" dirty="0">
-                <a:solidFill>
-                  <a:srgbClr val="1C2530"/>
-                </a:solidFill>
-                <a:latin typeface="Futura" pitchFamily="34" charset="0"/>
-                <a:ea typeface="Futura" pitchFamily="34" charset="-122"/>
-                <a:cs typeface="Futura" pitchFamily="34" charset="-120"/>
-              </a:rPr>
-              <a:t>Follow up: “Now make it 3 bullets for a busy dean.”</a:t>
-            </a:r>
-            <a:endParaRPr lang="en-US" sz="2500" dirty="0"/>
-          </a:p>
-        </p:txBody>
-      </p:sp>
-      <p:sp>
-        <p:nvSpPr>
-          <p:cNvPr id="24" name="Text 21"/>
-          <p:cNvSpPr txBox="1"/>
-          <p:nvPr/>
-        </p:nvSpPr>
-        <p:spPr>
-          <a:xfrm>
-            <a:off x="1028700" y="7132320"/>
-            <a:ext cx="10972800" cy="365760"/>
-          </a:xfrm>
-          <a:prstGeom prst="rect">
-            <a:avLst/>
-          </a:prstGeom>
-          <a:noFill/>
-          <a:ln/>
-        </p:spPr>
-        <p:txBody>
-          <a:bodyPr wrap="square" lIns="0" tIns="0" rIns="0" bIns="0" rtlCol="0" anchor="t"/>
-          <a:lstStyle/>
-          <a:p>
-            <a:pPr indent="0" marL="0">
-              <a:buNone/>
-            </a:pPr>
-            <a:r>
-              <a:rPr lang="en-US" sz="2000" i="1" dirty="0">
-                <a:solidFill>
-                  <a:srgbClr val="5A6571"/>
-                </a:solidFill>
-                <a:latin typeface="Futura" pitchFamily="34" charset="0"/>
-                <a:ea typeface="Futura" pitchFamily="34" charset="-122"/>
-                <a:cs typeface="Futura" pitchFamily="34" charset="-120"/>
-              </a:rPr>
-              <a:t>The same steps work in ChatGPT Edu.</a:t>
-            </a:r>
-            <a:endParaRPr lang="en-US" sz="2000" dirty="0"/>
           </a:p>
         </p:txBody>
       </p:sp>
@@ -4234,7 +3732,7 @@
                 <a:ea typeface="Futura" pitchFamily="34" charset="-122"/>
                 <a:cs typeface="Futura" pitchFamily="34" charset="-120"/>
               </a:rPr>
-              <a:t>ACTIVITY 1 · ~20 MIN</a:t>
+              <a:t>GUIDED START · ~5 MIN · FOLLOW ALONG</a:t>
             </a:r>
             <a:endParaRPr lang="en-US" sz="1800" dirty="0"/>
           </a:p>
@@ -4273,7 +3771,7 @@
                 <a:ea typeface="Georgia" pitchFamily="34" charset="-122"/>
                 <a:cs typeface="Georgia" pitchFamily="34" charset="-120"/>
               </a:rPr>
-              <a:t>Three Everyday Jobs: Pick One</a:t>
+              <a:t>Upload a File to Copilot Chat</a:t>
             </a:r>
             <a:endParaRPr lang="en-US" sz="5500" dirty="0"/>
           </a:p>
@@ -4402,297 +3900,156 @@
       </p:sp>
       <p:sp>
         <p:nvSpPr>
-          <p:cNvPr id="9" name="Text 6"/>
-          <p:cNvSpPr txBox="1"/>
-          <p:nvPr/>
-        </p:nvSpPr>
-        <p:spPr>
-          <a:xfrm>
-            <a:off x="1028700" y="2606040"/>
-            <a:ext cx="15544800" cy="1005840"/>
-          </a:xfrm>
-          <a:prstGeom prst="rect">
-            <a:avLst/>
-          </a:prstGeom>
-          <a:noFill/>
-          <a:ln/>
-        </p:spPr>
-        <p:txBody>
-          <a:bodyPr wrap="square" lIns="0" tIns="0" rIns="0" bIns="0" rtlCol="0" anchor="t"/>
-          <a:lstStyle/>
-          <a:p>
-            <a:pPr indent="0" marL="0">
-              <a:lnSpc>
-                <a:spcPct val="120000"/>
-              </a:lnSpc>
-              <a:buNone/>
-            </a:pPr>
-            <a:r>
-              <a:rPr lang="en-US" sz="2800" dirty="0">
-                <a:solidFill>
-                  <a:srgbClr val="1C2530"/>
+          <p:cNvPr id="9" name="Shape 6"/>
+          <p:cNvSpPr/>
+          <p:nvPr/>
+        </p:nvSpPr>
+        <p:spPr>
+          <a:xfrm>
+            <a:off x="1028700" y="2697480"/>
+            <a:ext cx="502920" cy="502920"/>
+          </a:xfrm>
+          <a:prstGeom prst="ellipse">
+            <a:avLst/>
+          </a:prstGeom>
+          <a:solidFill>
+            <a:srgbClr val="FFC600"/>
+          </a:solidFill>
+          <a:ln/>
+        </p:spPr>
+      </p:sp>
+      <p:sp>
+        <p:nvSpPr>
+          <p:cNvPr id="10" name="Text 7"/>
+          <p:cNvSpPr txBox="1"/>
+          <p:nvPr/>
+        </p:nvSpPr>
+        <p:spPr>
+          <a:xfrm>
+            <a:off x="1028700" y="2697480"/>
+            <a:ext cx="502920" cy="502920"/>
+          </a:xfrm>
+          <a:prstGeom prst="rect">
+            <a:avLst/>
+          </a:prstGeom>
+          <a:noFill/>
+          <a:ln/>
+        </p:spPr>
+        <p:txBody>
+          <a:bodyPr wrap="square" lIns="0" tIns="0" rIns="0" bIns="0" rtlCol="0" anchor="ctr"/>
+          <a:lstStyle/>
+          <a:p>
+            <a:pPr algn="ctr" indent="0" marL="0">
+              <a:buNone/>
+            </a:pPr>
+            <a:r>
+              <a:rPr lang="en-US" sz="2200" b="1" dirty="0">
+                <a:solidFill>
+                  <a:srgbClr val="07294D"/>
                 </a:solidFill>
                 <a:latin typeface="Futura" pitchFamily="34" charset="0"/>
                 <a:ea typeface="Futura" pitchFamily="34" charset="-122"/>
                 <a:cs typeface="Futura" pitchFamily="34" charset="-120"/>
               </a:rPr>
-              <a:t>Use Copilot Chat or ChatGPT Edu. Upload the demo file or use your own non-sensitive material. Three prompts each; the next slides show them.</a:t>
-            </a:r>
-            <a:endParaRPr lang="en-US" sz="2800" dirty="0"/>
-          </a:p>
-        </p:txBody>
-      </p:sp>
-      <p:sp>
-        <p:nvSpPr>
-          <p:cNvPr id="10" name="Shape 7"/>
-          <p:cNvSpPr/>
-          <p:nvPr/>
-        </p:nvSpPr>
-        <p:spPr>
-          <a:xfrm>
-            <a:off x="1028700" y="3931920"/>
-            <a:ext cx="5029200" cy="3017520"/>
-          </a:xfrm>
-          <a:prstGeom prst="rect">
-            <a:avLst/>
-          </a:prstGeom>
-          <a:solidFill>
-            <a:srgbClr val="FFFFFF"/>
-          </a:solidFill>
-          <a:ln w="9525">
-            <a:solidFill>
-              <a:srgbClr val="D0D3D4"/>
-            </a:solidFill>
-            <a:prstDash val="solid"/>
-          </a:ln>
-        </p:spPr>
-      </p:sp>
-      <p:sp>
-        <p:nvSpPr>
-          <p:cNvPr id="11" name="Shape 8"/>
-          <p:cNvSpPr/>
-          <p:nvPr/>
-        </p:nvSpPr>
-        <p:spPr>
-          <a:xfrm>
-            <a:off x="1028700" y="3931920"/>
-            <a:ext cx="5029200" cy="91440"/>
-          </a:xfrm>
-          <a:prstGeom prst="rect">
-            <a:avLst/>
-          </a:prstGeom>
-          <a:solidFill>
-            <a:srgbClr val="07294D"/>
-          </a:solidFill>
-          <a:ln/>
-        </p:spPr>
-      </p:sp>
-      <p:sp>
-        <p:nvSpPr>
-          <p:cNvPr id="12" name="Text 9"/>
-          <p:cNvSpPr txBox="1"/>
-          <p:nvPr/>
-        </p:nvSpPr>
-        <p:spPr>
-          <a:xfrm>
-            <a:off x="1394460" y="4251960"/>
-            <a:ext cx="4297680" cy="868680"/>
-          </a:xfrm>
-          <a:prstGeom prst="rect">
-            <a:avLst/>
-          </a:prstGeom>
-          <a:noFill/>
-          <a:ln/>
-        </p:spPr>
-        <p:txBody>
-          <a:bodyPr wrap="square" lIns="0" tIns="0" rIns="0" bIns="0" rtlCol="0" anchor="t">
-            <a:normAutofit/>
-          </a:bodyPr>
+              <a:t>1</a:t>
+            </a:r>
+            <a:endParaRPr lang="en-US" sz="2200" dirty="0"/>
+          </a:p>
+        </p:txBody>
+      </p:sp>
+      <p:sp>
+        <p:nvSpPr>
+          <p:cNvPr id="11" name="Text 8"/>
+          <p:cNvSpPr txBox="1"/>
+          <p:nvPr/>
+        </p:nvSpPr>
+        <p:spPr>
+          <a:xfrm>
+            <a:off x="1805940" y="2697480"/>
+            <a:ext cx="15453360" cy="502920"/>
+          </a:xfrm>
+          <a:prstGeom prst="rect">
+            <a:avLst/>
+          </a:prstGeom>
+          <a:noFill/>
+          <a:ln/>
+        </p:spPr>
+        <p:txBody>
+          <a:bodyPr wrap="square" lIns="0" tIns="0" rIns="0" bIns="0" rtlCol="0" anchor="ctr"/>
           <a:lstStyle/>
           <a:p>
             <a:pPr indent="0" marL="0">
               <a:buNone/>
             </a:pPr>
             <a:r>
-              <a:rPr lang="en-US" sz="2600" b="1" dirty="0">
-                <a:solidFill>
-                  <a:srgbClr val="07294D"/>
-                </a:solidFill>
-                <a:latin typeface="Georgia" pitchFamily="34" charset="0"/>
-                <a:ea typeface="Georgia" pitchFamily="34" charset="-122"/>
-                <a:cs typeface="Georgia" pitchFamily="34" charset="-120"/>
-              </a:rPr>
-              <a:t>Job A · A Document</a:t>
-            </a:r>
-            <a:endParaRPr lang="en-US" sz="2600" dirty="0"/>
-          </a:p>
-        </p:txBody>
-      </p:sp>
-      <p:sp>
-        <p:nvSpPr>
-          <p:cNvPr id="13" name="Text 10"/>
-          <p:cNvSpPr txBox="1"/>
-          <p:nvPr/>
-        </p:nvSpPr>
-        <p:spPr>
-          <a:xfrm>
-            <a:off x="1394460" y="5166360"/>
-            <a:ext cx="4297680" cy="1600200"/>
-          </a:xfrm>
-          <a:prstGeom prst="rect">
-            <a:avLst/>
-          </a:prstGeom>
-          <a:noFill/>
-          <a:ln/>
-        </p:spPr>
-        <p:txBody>
-          <a:bodyPr wrap="square" lIns="0" tIns="0" rIns="0" bIns="0" rtlCol="0" anchor="t"/>
-          <a:lstStyle/>
-          <a:p>
-            <a:pPr indent="0" marL="0">
-              <a:lnSpc>
-                <a:spcPct val="125000"/>
-              </a:lnSpc>
-              <a:buNone/>
-            </a:pPr>
-            <a:r>
-              <a:rPr lang="en-US" sz="2200" dirty="0">
-                <a:solidFill>
-                  <a:srgbClr val="5A6571"/>
+              <a:rPr lang="en-US" sz="2500" dirty="0">
+                <a:solidFill>
+                  <a:srgbClr val="1C2530"/>
                 </a:solidFill>
                 <a:latin typeface="Futura" pitchFamily="34" charset="0"/>
                 <a:ea typeface="Futura" pitchFamily="34" charset="-122"/>
                 <a:cs typeface="Futura" pitchFamily="34" charset="-120"/>
               </a:rPr>
-              <a:t>Summarize a study description, rewrite it for a community board, draft next steps.</a:t>
-            </a:r>
-            <a:endParaRPr lang="en-US" sz="2200" dirty="0"/>
-          </a:p>
-        </p:txBody>
-      </p:sp>
-      <p:sp>
-        <p:nvSpPr>
-          <p:cNvPr id="14" name="Shape 11"/>
+              <a:t>Download Workshop2_Demo_StudyDescription.docx (link in the Zoom chat).</a:t>
+            </a:r>
+            <a:endParaRPr lang="en-US" sz="2500" dirty="0"/>
+          </a:p>
+        </p:txBody>
+      </p:sp>
+      <p:sp>
+        <p:nvSpPr>
+          <p:cNvPr id="12" name="Shape 9"/>
           <p:cNvSpPr/>
           <p:nvPr/>
         </p:nvSpPr>
         <p:spPr>
           <a:xfrm>
-            <a:off x="6629400" y="3931920"/>
-            <a:ext cx="5029200" cy="3017520"/>
-          </a:xfrm>
-          <a:prstGeom prst="rect">
+            <a:off x="1028700" y="3566160"/>
+            <a:ext cx="502920" cy="502920"/>
+          </a:xfrm>
+          <a:prstGeom prst="ellipse">
             <a:avLst/>
           </a:prstGeom>
           <a:solidFill>
-            <a:srgbClr val="FFFFFF"/>
+            <a:srgbClr val="FFC600"/>
           </a:solidFill>
-          <a:ln w="9525">
-            <a:solidFill>
-              <a:srgbClr val="D0D3D4"/>
-            </a:solidFill>
-            <a:prstDash val="solid"/>
-          </a:ln>
-        </p:spPr>
-      </p:sp>
-      <p:sp>
-        <p:nvSpPr>
-          <p:cNvPr id="15" name="Shape 12"/>
-          <p:cNvSpPr/>
-          <p:nvPr/>
-        </p:nvSpPr>
-        <p:spPr>
-          <a:xfrm>
-            <a:off x="6629400" y="3931920"/>
-            <a:ext cx="5029200" cy="91440"/>
-          </a:xfrm>
-          <a:prstGeom prst="rect">
-            <a:avLst/>
-          </a:prstGeom>
-          <a:solidFill>
-            <a:srgbClr val="006699"/>
-          </a:solidFill>
-          <a:ln/>
-        </p:spPr>
-      </p:sp>
-      <p:sp>
-        <p:nvSpPr>
-          <p:cNvPr id="16" name="Text 13"/>
-          <p:cNvSpPr txBox="1"/>
-          <p:nvPr/>
-        </p:nvSpPr>
-        <p:spPr>
-          <a:xfrm>
-            <a:off x="6995160" y="4251960"/>
-            <a:ext cx="4297680" cy="868680"/>
-          </a:xfrm>
-          <a:prstGeom prst="rect">
-            <a:avLst/>
-          </a:prstGeom>
-          <a:noFill/>
-          <a:ln/>
-        </p:spPr>
-        <p:txBody>
-          <a:bodyPr wrap="square" lIns="0" tIns="0" rIns="0" bIns="0" rtlCol="0" anchor="t">
-            <a:normAutofit/>
-          </a:bodyPr>
-          <a:lstStyle/>
-          <a:p>
-            <a:pPr indent="0" marL="0">
-              <a:buNone/>
-            </a:pPr>
-            <a:r>
-              <a:rPr lang="en-US" sz="2600" b="1" dirty="0">
+          <a:ln/>
+        </p:spPr>
+      </p:sp>
+      <p:sp>
+        <p:nvSpPr>
+          <p:cNvPr id="13" name="Text 10"/>
+          <p:cNvSpPr txBox="1"/>
+          <p:nvPr/>
+        </p:nvSpPr>
+        <p:spPr>
+          <a:xfrm>
+            <a:off x="1028700" y="3566160"/>
+            <a:ext cx="502920" cy="502920"/>
+          </a:xfrm>
+          <a:prstGeom prst="rect">
+            <a:avLst/>
+          </a:prstGeom>
+          <a:noFill/>
+          <a:ln/>
+        </p:spPr>
+        <p:txBody>
+          <a:bodyPr wrap="square" lIns="0" tIns="0" rIns="0" bIns="0" rtlCol="0" anchor="ctr"/>
+          <a:lstStyle/>
+          <a:p>
+            <a:pPr algn="ctr" indent="0" marL="0">
+              <a:buNone/>
+            </a:pPr>
+            <a:r>
+              <a:rPr lang="en-US" sz="2200" b="1" dirty="0">
                 <a:solidFill>
                   <a:srgbClr val="07294D"/>
-                </a:solidFill>
-                <a:latin typeface="Georgia" pitchFamily="34" charset="0"/>
-                <a:ea typeface="Georgia" pitchFamily="34" charset="-122"/>
-                <a:cs typeface="Georgia" pitchFamily="34" charset="-120"/>
-              </a:rPr>
-              <a:t>Job B · An Email Thread</a:t>
-            </a:r>
-            <a:endParaRPr lang="en-US" sz="2600" dirty="0"/>
-          </a:p>
-        </p:txBody>
-      </p:sp>
-      <p:sp>
-        <p:nvSpPr>
-          <p:cNvPr id="17" name="Text 14"/>
-          <p:cNvSpPr txBox="1"/>
-          <p:nvPr/>
-        </p:nvSpPr>
-        <p:spPr>
-          <a:xfrm>
-            <a:off x="6995160" y="5166360"/>
-            <a:ext cx="4297680" cy="1600200"/>
-          </a:xfrm>
-          <a:prstGeom prst="rect">
-            <a:avLst/>
-          </a:prstGeom>
-          <a:noFill/>
-          <a:ln/>
-        </p:spPr>
-        <p:txBody>
-          <a:bodyPr wrap="square" lIns="0" tIns="0" rIns="0" bIns="0" rtlCol="0" anchor="t"/>
-          <a:lstStyle/>
-          <a:p>
-            <a:pPr indent="0" marL="0">
-              <a:lnSpc>
-                <a:spcPct val="125000"/>
-              </a:lnSpc>
-              <a:buNone/>
-            </a:pPr>
-            <a:r>
-              <a:rPr lang="en-US" sz="2200" dirty="0">
-                <a:solidFill>
-                  <a:srgbClr val="5A6571"/>
                 </a:solidFill>
                 <a:latin typeface="Futura" pitchFamily="34" charset="0"/>
                 <a:ea typeface="Futura" pitchFamily="34" charset="-122"/>
                 <a:cs typeface="Futura" pitchFamily="34" charset="-120"/>
               </a:rPr>
-              <a:t>Find the decisions and open questions, make an action-item table, draft the reply.</a:t>
+              <a:t>2</a:t>
             </a:r>
             <a:endParaRPr lang="en-US" sz="2200" dirty="0"/>
           </a:p>
@@ -4700,41 +4057,55 @@
       </p:sp>
       <p:sp>
         <p:nvSpPr>
-          <p:cNvPr id="18" name="Shape 15"/>
+          <p:cNvPr id="14" name="Text 11"/>
+          <p:cNvSpPr txBox="1"/>
+          <p:nvPr/>
+        </p:nvSpPr>
+        <p:spPr>
+          <a:xfrm>
+            <a:off x="1805940" y="3566160"/>
+            <a:ext cx="15453360" cy="502920"/>
+          </a:xfrm>
+          <a:prstGeom prst="rect">
+            <a:avLst/>
+          </a:prstGeom>
+          <a:noFill/>
+          <a:ln/>
+        </p:spPr>
+        <p:txBody>
+          <a:bodyPr wrap="square" lIns="0" tIns="0" rIns="0" bIns="0" rtlCol="0" anchor="ctr"/>
+          <a:lstStyle/>
+          <a:p>
+            <a:pPr indent="0" marL="0">
+              <a:buNone/>
+            </a:pPr>
+            <a:r>
+              <a:rPr lang="en-US" sz="2500" dirty="0">
+                <a:solidFill>
+                  <a:srgbClr val="1C2530"/>
+                </a:solidFill>
+                <a:latin typeface="Futura" pitchFamily="34" charset="0"/>
+                <a:ea typeface="Futura" pitchFamily="34" charset="-122"/>
+                <a:cs typeface="Futura" pitchFamily="34" charset="-120"/>
+              </a:rPr>
+              <a:t>Go to m365.cloud.microsoft/chat and sign in with your Drexel account. Look for the shield icon.</a:t>
+            </a:r>
+            <a:endParaRPr lang="en-US" sz="2500" dirty="0"/>
+          </a:p>
+        </p:txBody>
+      </p:sp>
+      <p:sp>
+        <p:nvSpPr>
+          <p:cNvPr id="15" name="Shape 12"/>
           <p:cNvSpPr/>
           <p:nvPr/>
         </p:nvSpPr>
         <p:spPr>
           <a:xfrm>
-            <a:off x="12230100" y="3931920"/>
-            <a:ext cx="5029200" cy="3017520"/>
-          </a:xfrm>
-          <a:prstGeom prst="rect">
-            <a:avLst/>
-          </a:prstGeom>
-          <a:solidFill>
-            <a:srgbClr val="FFFFFF"/>
-          </a:solidFill>
-          <a:ln w="9525">
-            <a:solidFill>
-              <a:srgbClr val="D0D3D4"/>
-            </a:solidFill>
-            <a:prstDash val="solid"/>
-          </a:ln>
-        </p:spPr>
-      </p:sp>
-      <p:sp>
-        <p:nvSpPr>
-          <p:cNvPr id="19" name="Shape 16"/>
-          <p:cNvSpPr/>
-          <p:nvPr/>
-        </p:nvSpPr>
-        <p:spPr>
-          <a:xfrm>
-            <a:off x="12230100" y="3931920"/>
-            <a:ext cx="5029200" cy="91440"/>
-          </a:xfrm>
-          <a:prstGeom prst="rect">
+            <a:off x="1028700" y="4434840"/>
+            <a:ext cx="502920" cy="502920"/>
+          </a:xfrm>
+          <a:prstGeom prst="ellipse">
             <a:avLst/>
           </a:prstGeom>
           <a:solidFill>
@@ -4745,84 +4116,314 @@
       </p:sp>
       <p:sp>
         <p:nvSpPr>
-          <p:cNvPr id="20" name="Text 17"/>
-          <p:cNvSpPr txBox="1"/>
-          <p:nvPr/>
-        </p:nvSpPr>
-        <p:spPr>
-          <a:xfrm>
-            <a:off x="12595860" y="4251960"/>
-            <a:ext cx="4297680" cy="868680"/>
-          </a:xfrm>
-          <a:prstGeom prst="rect">
-            <a:avLst/>
-          </a:prstGeom>
-          <a:noFill/>
-          <a:ln/>
-        </p:spPr>
-        <p:txBody>
-          <a:bodyPr wrap="square" lIns="0" tIns="0" rIns="0" bIns="0" rtlCol="0" anchor="t">
-            <a:normAutofit/>
-          </a:bodyPr>
-          <a:lstStyle/>
-          <a:p>
-            <a:pPr indent="0" marL="0">
-              <a:buNone/>
-            </a:pPr>
-            <a:r>
-              <a:rPr lang="en-US" sz="2600" b="1" dirty="0">
+          <p:cNvPr id="16" name="Text 13"/>
+          <p:cNvSpPr txBox="1"/>
+          <p:nvPr/>
+        </p:nvSpPr>
+        <p:spPr>
+          <a:xfrm>
+            <a:off x="1028700" y="4434840"/>
+            <a:ext cx="502920" cy="502920"/>
+          </a:xfrm>
+          <a:prstGeom prst="rect">
+            <a:avLst/>
+          </a:prstGeom>
+          <a:noFill/>
+          <a:ln/>
+        </p:spPr>
+        <p:txBody>
+          <a:bodyPr wrap="square" lIns="0" tIns="0" rIns="0" bIns="0" rtlCol="0" anchor="ctr"/>
+          <a:lstStyle/>
+          <a:p>
+            <a:pPr algn="ctr" indent="0" marL="0">
+              <a:buNone/>
+            </a:pPr>
+            <a:r>
+              <a:rPr lang="en-US" sz="2200" b="1" dirty="0">
                 <a:solidFill>
                   <a:srgbClr val="07294D"/>
-                </a:solidFill>
-                <a:latin typeface="Georgia" pitchFamily="34" charset="0"/>
-                <a:ea typeface="Georgia" pitchFamily="34" charset="-122"/>
-                <a:cs typeface="Georgia" pitchFamily="34" charset="-120"/>
-              </a:rPr>
-              <a:t>Job C · A Spreadsheet</a:t>
-            </a:r>
-            <a:endParaRPr lang="en-US" sz="2600" dirty="0"/>
-          </a:p>
-        </p:txBody>
-      </p:sp>
-      <p:sp>
-        <p:nvSpPr>
-          <p:cNvPr id="21" name="Text 18"/>
-          <p:cNvSpPr txBox="1"/>
-          <p:nvPr/>
-        </p:nvSpPr>
-        <p:spPr>
-          <a:xfrm>
-            <a:off x="12595860" y="5166360"/>
-            <a:ext cx="4297680" cy="1600200"/>
-          </a:xfrm>
-          <a:prstGeom prst="rect">
-            <a:avLst/>
-          </a:prstGeom>
-          <a:noFill/>
-          <a:ln/>
-        </p:spPr>
-        <p:txBody>
-          <a:bodyPr wrap="square" lIns="0" tIns="0" rIns="0" bIns="0" rtlCol="0" anchor="t"/>
-          <a:lstStyle/>
-          <a:p>
-            <a:pPr indent="0" marL="0">
-              <a:lnSpc>
-                <a:spcPct val="125000"/>
-              </a:lnSpc>
-              <a:buNone/>
-            </a:pPr>
-            <a:r>
-              <a:rPr lang="en-US" sz="2200" dirty="0">
-                <a:solidFill>
-                  <a:srgbClr val="5A6571"/>
                 </a:solidFill>
                 <a:latin typeface="Futura" pitchFamily="34" charset="0"/>
                 <a:ea typeface="Futura" pitchFamily="34" charset="-122"/>
                 <a:cs typeface="Futura" pitchFamily="34" charset="-120"/>
               </a:rPr>
-              <a:t>Find what stands out, get an Excel formula to flag rows, pick a chart.</a:t>
+              <a:t>3</a:t>
             </a:r>
             <a:endParaRPr lang="en-US" sz="2200" dirty="0"/>
+          </a:p>
+        </p:txBody>
+      </p:sp>
+      <p:sp>
+        <p:nvSpPr>
+          <p:cNvPr id="17" name="Text 14"/>
+          <p:cNvSpPr txBox="1"/>
+          <p:nvPr/>
+        </p:nvSpPr>
+        <p:spPr>
+          <a:xfrm>
+            <a:off x="1805940" y="4434840"/>
+            <a:ext cx="15453360" cy="502920"/>
+          </a:xfrm>
+          <a:prstGeom prst="rect">
+            <a:avLst/>
+          </a:prstGeom>
+          <a:noFill/>
+          <a:ln/>
+        </p:spPr>
+        <p:txBody>
+          <a:bodyPr wrap="square" lIns="0" tIns="0" rIns="0" bIns="0" rtlCol="0" anchor="ctr"/>
+          <a:lstStyle/>
+          <a:p>
+            <a:pPr indent="0" marL="0">
+              <a:buNone/>
+            </a:pPr>
+            <a:r>
+              <a:rPr lang="en-US" sz="2500" dirty="0">
+                <a:solidFill>
+                  <a:srgbClr val="1C2530"/>
+                </a:solidFill>
+                <a:latin typeface="Futura" pitchFamily="34" charset="0"/>
+                <a:ea typeface="Futura" pitchFamily="34" charset="-122"/>
+                <a:cs typeface="Futura" pitchFamily="34" charset="-120"/>
+              </a:rPr>
+              <a:t>Click + next to the message box and upload the file (or paste the text).</a:t>
+            </a:r>
+            <a:endParaRPr lang="en-US" sz="2500" dirty="0"/>
+          </a:p>
+        </p:txBody>
+      </p:sp>
+      <p:sp>
+        <p:nvSpPr>
+          <p:cNvPr id="18" name="Shape 15"/>
+          <p:cNvSpPr/>
+          <p:nvPr/>
+        </p:nvSpPr>
+        <p:spPr>
+          <a:xfrm>
+            <a:off x="1028700" y="5303520"/>
+            <a:ext cx="502920" cy="502920"/>
+          </a:xfrm>
+          <a:prstGeom prst="ellipse">
+            <a:avLst/>
+          </a:prstGeom>
+          <a:solidFill>
+            <a:srgbClr val="FFC600"/>
+          </a:solidFill>
+          <a:ln/>
+        </p:spPr>
+      </p:sp>
+      <p:sp>
+        <p:nvSpPr>
+          <p:cNvPr id="19" name="Text 16"/>
+          <p:cNvSpPr txBox="1"/>
+          <p:nvPr/>
+        </p:nvSpPr>
+        <p:spPr>
+          <a:xfrm>
+            <a:off x="1028700" y="5303520"/>
+            <a:ext cx="502920" cy="502920"/>
+          </a:xfrm>
+          <a:prstGeom prst="rect">
+            <a:avLst/>
+          </a:prstGeom>
+          <a:noFill/>
+          <a:ln/>
+        </p:spPr>
+        <p:txBody>
+          <a:bodyPr wrap="square" lIns="0" tIns="0" rIns="0" bIns="0" rtlCol="0" anchor="ctr"/>
+          <a:lstStyle/>
+          <a:p>
+            <a:pPr algn="ctr" indent="0" marL="0">
+              <a:buNone/>
+            </a:pPr>
+            <a:r>
+              <a:rPr lang="en-US" sz="2200" b="1" dirty="0">
+                <a:solidFill>
+                  <a:srgbClr val="07294D"/>
+                </a:solidFill>
+                <a:latin typeface="Futura" pitchFamily="34" charset="0"/>
+                <a:ea typeface="Futura" pitchFamily="34" charset="-122"/>
+                <a:cs typeface="Futura" pitchFamily="34" charset="-120"/>
+              </a:rPr>
+              <a:t>4</a:t>
+            </a:r>
+            <a:endParaRPr lang="en-US" sz="2200" dirty="0"/>
+          </a:p>
+        </p:txBody>
+      </p:sp>
+      <p:sp>
+        <p:nvSpPr>
+          <p:cNvPr id="20" name="Text 17"/>
+          <p:cNvSpPr txBox="1"/>
+          <p:nvPr/>
+        </p:nvSpPr>
+        <p:spPr>
+          <a:xfrm>
+            <a:off x="1805940" y="5303520"/>
+            <a:ext cx="15453360" cy="502920"/>
+          </a:xfrm>
+          <a:prstGeom prst="rect">
+            <a:avLst/>
+          </a:prstGeom>
+          <a:noFill/>
+          <a:ln/>
+        </p:spPr>
+        <p:txBody>
+          <a:bodyPr wrap="square" lIns="0" tIns="0" rIns="0" bIns="0" rtlCol="0" anchor="ctr"/>
+          <a:lstStyle/>
+          <a:p>
+            <a:pPr indent="0" marL="0">
+              <a:buNone/>
+            </a:pPr>
+            <a:r>
+              <a:rPr lang="en-US" sz="2500" dirty="0">
+                <a:solidFill>
+                  <a:srgbClr val="1C2530"/>
+                </a:solidFill>
+                <a:latin typeface="Futura" pitchFamily="34" charset="0"/>
+                <a:ea typeface="Futura" pitchFamily="34" charset="-122"/>
+                <a:cs typeface="Futura" pitchFamily="34" charset="-120"/>
+              </a:rPr>
+              <a:t>Type: “Summarize this document in 5 bullet points for a project status update.”</a:t>
+            </a:r>
+            <a:endParaRPr lang="en-US" sz="2500" dirty="0"/>
+          </a:p>
+        </p:txBody>
+      </p:sp>
+      <p:sp>
+        <p:nvSpPr>
+          <p:cNvPr id="21" name="Shape 18"/>
+          <p:cNvSpPr/>
+          <p:nvPr/>
+        </p:nvSpPr>
+        <p:spPr>
+          <a:xfrm>
+            <a:off x="1028700" y="6172200"/>
+            <a:ext cx="502920" cy="502920"/>
+          </a:xfrm>
+          <a:prstGeom prst="ellipse">
+            <a:avLst/>
+          </a:prstGeom>
+          <a:solidFill>
+            <a:srgbClr val="FFC600"/>
+          </a:solidFill>
+          <a:ln/>
+        </p:spPr>
+      </p:sp>
+      <p:sp>
+        <p:nvSpPr>
+          <p:cNvPr id="22" name="Text 19"/>
+          <p:cNvSpPr txBox="1"/>
+          <p:nvPr/>
+        </p:nvSpPr>
+        <p:spPr>
+          <a:xfrm>
+            <a:off x="1028700" y="6172200"/>
+            <a:ext cx="502920" cy="502920"/>
+          </a:xfrm>
+          <a:prstGeom prst="rect">
+            <a:avLst/>
+          </a:prstGeom>
+          <a:noFill/>
+          <a:ln/>
+        </p:spPr>
+        <p:txBody>
+          <a:bodyPr wrap="square" lIns="0" tIns="0" rIns="0" bIns="0" rtlCol="0" anchor="ctr"/>
+          <a:lstStyle/>
+          <a:p>
+            <a:pPr algn="ctr" indent="0" marL="0">
+              <a:buNone/>
+            </a:pPr>
+            <a:r>
+              <a:rPr lang="en-US" sz="2200" b="1" dirty="0">
+                <a:solidFill>
+                  <a:srgbClr val="07294D"/>
+                </a:solidFill>
+                <a:latin typeface="Futura" pitchFamily="34" charset="0"/>
+                <a:ea typeface="Futura" pitchFamily="34" charset="-122"/>
+                <a:cs typeface="Futura" pitchFamily="34" charset="-120"/>
+              </a:rPr>
+              <a:t>5</a:t>
+            </a:r>
+            <a:endParaRPr lang="en-US" sz="2200" dirty="0"/>
+          </a:p>
+        </p:txBody>
+      </p:sp>
+      <p:sp>
+        <p:nvSpPr>
+          <p:cNvPr id="23" name="Text 20"/>
+          <p:cNvSpPr txBox="1"/>
+          <p:nvPr/>
+        </p:nvSpPr>
+        <p:spPr>
+          <a:xfrm>
+            <a:off x="1805940" y="6172200"/>
+            <a:ext cx="15453360" cy="502920"/>
+          </a:xfrm>
+          <a:prstGeom prst="rect">
+            <a:avLst/>
+          </a:prstGeom>
+          <a:noFill/>
+          <a:ln/>
+        </p:spPr>
+        <p:txBody>
+          <a:bodyPr wrap="square" lIns="0" tIns="0" rIns="0" bIns="0" rtlCol="0" anchor="ctr"/>
+          <a:lstStyle/>
+          <a:p>
+            <a:pPr indent="0" marL="0">
+              <a:buNone/>
+            </a:pPr>
+            <a:r>
+              <a:rPr lang="en-US" sz="2500" dirty="0">
+                <a:solidFill>
+                  <a:srgbClr val="1C2530"/>
+                </a:solidFill>
+                <a:latin typeface="Futura" pitchFamily="34" charset="0"/>
+                <a:ea typeface="Futura" pitchFamily="34" charset="-122"/>
+                <a:cs typeface="Futura" pitchFamily="34" charset="-120"/>
+              </a:rPr>
+              <a:t>Follow up: “Now make it 3 bullets for a busy dean.”</a:t>
+            </a:r>
+            <a:endParaRPr lang="en-US" sz="2500" dirty="0"/>
+          </a:p>
+        </p:txBody>
+      </p:sp>
+      <p:sp>
+        <p:nvSpPr>
+          <p:cNvPr id="24" name="Text 21"/>
+          <p:cNvSpPr txBox="1"/>
+          <p:nvPr/>
+        </p:nvSpPr>
+        <p:spPr>
+          <a:xfrm>
+            <a:off x="1028700" y="7132320"/>
+            <a:ext cx="14630400" cy="365760"/>
+          </a:xfrm>
+          <a:prstGeom prst="rect">
+            <a:avLst/>
+          </a:prstGeom>
+          <a:noFill/>
+          <a:ln/>
+        </p:spPr>
+        <p:txBody>
+          <a:bodyPr wrap="square" lIns="0" tIns="0" rIns="0" bIns="0" rtlCol="0" anchor="t"/>
+          <a:lstStyle/>
+          <a:p>
+            <a:pPr indent="0" marL="0">
+              <a:buNone/>
+            </a:pPr>
+            <a:r>
+              <a:rPr lang="en-US" sz="2000" i="1" dirty="0">
+                <a:solidFill>
+                  <a:srgbClr val="5A6571"/>
+                </a:solidFill>
+                <a:latin typeface="Futura" pitchFamily="34" charset="0"/>
+                <a:ea typeface="Futura" pitchFamily="34" charset="-122"/>
+                <a:cs typeface="Futura" pitchFamily="34" charset="-120"/>
+              </a:rPr>
+              <a:t>React with a thumbs-up in Zoom when you have an answer. The same steps work in ChatGPT Edu.</a:t>
+            </a:r>
+            <a:endParaRPr lang="en-US" sz="2000" dirty="0"/>
           </a:p>
         </p:txBody>
       </p:sp>
@@ -4858,30 +4459,631 @@
           <a:chExt cx="0" cy="0"/>
         </a:xfrm>
       </p:grpSpPr>
-      <p:pic>
-        <p:nvPicPr>
-          <p:cNvPr id="2" name="Image 0" descr="/private/tmp/claude-1279606903/-Users-daq26-Library-CloudStorage-OneDrive-DrexelUniversity-Anthropic-AI-for-UH-Course-workshop-website/f22b16b1-71f0-4e6b-b603-aa7f51f0b99e/scratchpad/w2img/s15.png">    </p:cNvPr>
-          <p:cNvPicPr>
-            <a:picLocks noChangeAspect="1"/>
-          </p:cNvPicPr>
-          <p:nvPr/>
-        </p:nvPicPr>
-        <p:blipFill>
-          <a:blip r:embed="rId1"/>
-          <a:stretch>
-            <a:fillRect/>
-          </a:stretch>
-        </p:blipFill>
-        <p:spPr>
-          <a:xfrm>
-            <a:off x="0" y="0"/>
-            <a:ext cx="18288000" cy="10287000"/>
-          </a:xfrm>
-          <a:prstGeom prst="rect">
-            <a:avLst/>
-          </a:prstGeom>
-        </p:spPr>
-      </p:pic>
+      <p:sp>
+        <p:nvSpPr>
+          <p:cNvPr id="2" name="Text 0"/>
+          <p:cNvSpPr txBox="1"/>
+          <p:nvPr/>
+        </p:nvSpPr>
+        <p:spPr>
+          <a:xfrm>
+            <a:off x="1028700" y="868680"/>
+            <a:ext cx="16230600" cy="274320"/>
+          </a:xfrm>
+          <a:prstGeom prst="rect">
+            <a:avLst/>
+          </a:prstGeom>
+          <a:noFill/>
+          <a:ln/>
+        </p:spPr>
+        <p:txBody>
+          <a:bodyPr wrap="square" lIns="0" tIns="0" rIns="0" bIns="0" rtlCol="0" anchor="t"/>
+          <a:lstStyle/>
+          <a:p>
+            <a:pPr indent="0" marL="0">
+              <a:buNone/>
+            </a:pPr>
+            <a:r>
+              <a:rPr lang="en-US" sz="1800" b="1" spc="300" kern="0" dirty="0">
+                <a:solidFill>
+                  <a:srgbClr val="006699"/>
+                </a:solidFill>
+                <a:latin typeface="Futura" pitchFamily="34" charset="0"/>
+                <a:ea typeface="Futura" pitchFamily="34" charset="-122"/>
+                <a:cs typeface="Futura" pitchFamily="34" charset="-120"/>
+              </a:rPr>
+              <a:t>ACTIVITY 1 · ~19 MIN</a:t>
+            </a:r>
+            <a:endParaRPr lang="en-US" sz="1800" dirty="0"/>
+          </a:p>
+        </p:txBody>
+      </p:sp>
+      <p:sp>
+        <p:nvSpPr>
+          <p:cNvPr id="3" name="Text 1"/>
+          <p:cNvSpPr txBox="1"/>
+          <p:nvPr/>
+        </p:nvSpPr>
+        <p:spPr>
+          <a:xfrm>
+            <a:off x="1028700" y="1188720"/>
+            <a:ext cx="16230600" cy="822960"/>
+          </a:xfrm>
+          <a:prstGeom prst="rect">
+            <a:avLst/>
+          </a:prstGeom>
+          <a:noFill/>
+          <a:ln/>
+        </p:spPr>
+        <p:txBody>
+          <a:bodyPr wrap="square" lIns="0" tIns="0" rIns="0" bIns="0" rtlCol="0" anchor="ctr"/>
+          <a:lstStyle/>
+          <a:p>
+            <a:pPr indent="0" marL="0">
+              <a:buNone/>
+            </a:pPr>
+            <a:r>
+              <a:rPr lang="en-US" sz="5500" b="1" dirty="0">
+                <a:solidFill>
+                  <a:srgbClr val="07294D"/>
+                </a:solidFill>
+                <a:latin typeface="Georgia" pitchFamily="34" charset="0"/>
+                <a:ea typeface="Georgia" pitchFamily="34" charset="-122"/>
+                <a:cs typeface="Georgia" pitchFamily="34" charset="-120"/>
+              </a:rPr>
+              <a:t>Three Everyday Jobs: Pick One</a:t>
+            </a:r>
+            <a:endParaRPr lang="en-US" sz="5500" dirty="0"/>
+          </a:p>
+        </p:txBody>
+      </p:sp>
+      <p:sp>
+        <p:nvSpPr>
+          <p:cNvPr id="4" name="Shape 2"/>
+          <p:cNvSpPr/>
+          <p:nvPr/>
+        </p:nvSpPr>
+        <p:spPr>
+          <a:xfrm>
+            <a:off x="1028700" y="2103120"/>
+            <a:ext cx="777240" cy="73152"/>
+          </a:xfrm>
+          <a:prstGeom prst="rect">
+            <a:avLst/>
+          </a:prstGeom>
+          <a:solidFill>
+            <a:srgbClr val="FFC600"/>
+          </a:solidFill>
+          <a:ln/>
+        </p:spPr>
+      </p:sp>
+      <p:sp>
+        <p:nvSpPr>
+          <p:cNvPr id="5" name="Shape 3"/>
+          <p:cNvSpPr/>
+          <p:nvPr/>
+        </p:nvSpPr>
+        <p:spPr>
+          <a:xfrm>
+            <a:off x="1028700" y="9646920"/>
+            <a:ext cx="16230600" cy="0"/>
+          </a:xfrm>
+          <a:prstGeom prst="line">
+            <a:avLst/>
+          </a:prstGeom>
+          <a:noFill/>
+          <a:ln w="9525">
+            <a:solidFill>
+              <a:srgbClr val="D0D3D4"/>
+            </a:solidFill>
+            <a:prstDash val="solid"/>
+          </a:ln>
+        </p:spPr>
+      </p:sp>
+      <p:sp>
+        <p:nvSpPr>
+          <p:cNvPr id="6" name="Text 4"/>
+          <p:cNvSpPr txBox="1"/>
+          <p:nvPr/>
+        </p:nvSpPr>
+        <p:spPr>
+          <a:xfrm>
+            <a:off x="1028700" y="9784080"/>
+            <a:ext cx="7315200" cy="274320"/>
+          </a:xfrm>
+          <a:prstGeom prst="rect">
+            <a:avLst/>
+          </a:prstGeom>
+          <a:noFill/>
+          <a:ln/>
+        </p:spPr>
+        <p:txBody>
+          <a:bodyPr wrap="square" lIns="0" tIns="0" rIns="0" bIns="0" rtlCol="0" anchor="t"/>
+          <a:lstStyle/>
+          <a:p>
+            <a:pPr indent="0" marL="0">
+              <a:buNone/>
+            </a:pPr>
+            <a:r>
+              <a:rPr lang="en-US" sz="1400" b="1" dirty="0">
+                <a:solidFill>
+                  <a:srgbClr val="07294D"/>
+                </a:solidFill>
+                <a:latin typeface="Futura" pitchFamily="34" charset="0"/>
+                <a:ea typeface="Futura" pitchFamily="34" charset="-122"/>
+                <a:cs typeface="Futura" pitchFamily="34" charset="-120"/>
+              </a:rPr>
+              <a:t>Environmental &amp; Occupational Health</a:t>
+            </a:r>
+            <a:endParaRPr lang="en-US" sz="1400" dirty="0"/>
+          </a:p>
+        </p:txBody>
+      </p:sp>
+      <p:sp>
+        <p:nvSpPr>
+          <p:cNvPr id="7" name="Text 5"/>
+          <p:cNvSpPr txBox="1"/>
+          <p:nvPr/>
+        </p:nvSpPr>
+        <p:spPr>
+          <a:xfrm>
+            <a:off x="9944100" y="9784080"/>
+            <a:ext cx="7315200" cy="274320"/>
+          </a:xfrm>
+          <a:prstGeom prst="rect">
+            <a:avLst/>
+          </a:prstGeom>
+          <a:noFill/>
+          <a:ln/>
+        </p:spPr>
+        <p:txBody>
+          <a:bodyPr wrap="square" lIns="0" tIns="0" rIns="0" bIns="0" rtlCol="0" anchor="t"/>
+          <a:lstStyle/>
+          <a:p>
+            <a:pPr algn="r" indent="0" marL="0">
+              <a:buNone/>
+            </a:pPr>
+            <a:r>
+              <a:rPr lang="en-US" sz="1400" dirty="0">
+                <a:solidFill>
+                  <a:srgbClr val="5A6571"/>
+                </a:solidFill>
+                <a:latin typeface="Futura" pitchFamily="34" charset="0"/>
+                <a:ea typeface="Futura" pitchFamily="34" charset="-122"/>
+                <a:cs typeface="Futura" pitchFamily="34" charset="-120"/>
+              </a:rPr>
+              <a:t>Dornsife School of Public Health</a:t>
+            </a:r>
+            <a:endParaRPr lang="en-US" sz="1400" dirty="0"/>
+          </a:p>
+        </p:txBody>
+      </p:sp>
+      <p:sp>
+        <p:nvSpPr>
+          <p:cNvPr id="9" name="Text 6"/>
+          <p:cNvSpPr txBox="1"/>
+          <p:nvPr/>
+        </p:nvSpPr>
+        <p:spPr>
+          <a:xfrm>
+            <a:off x="1028700" y="2606040"/>
+            <a:ext cx="15544800" cy="1005840"/>
+          </a:xfrm>
+          <a:prstGeom prst="rect">
+            <a:avLst/>
+          </a:prstGeom>
+          <a:noFill/>
+          <a:ln/>
+        </p:spPr>
+        <p:txBody>
+          <a:bodyPr wrap="square" lIns="0" tIns="0" rIns="0" bIns="0" rtlCol="0" anchor="t"/>
+          <a:lstStyle/>
+          <a:p>
+            <a:pPr indent="0" marL="0">
+              <a:lnSpc>
+                <a:spcPct val="120000"/>
+              </a:lnSpc>
+              <a:buNone/>
+            </a:pPr>
+            <a:r>
+              <a:rPr lang="en-US" sz="2800" dirty="0">
+                <a:solidFill>
+                  <a:srgbClr val="1C2530"/>
+                </a:solidFill>
+                <a:latin typeface="Futura" pitchFamily="34" charset="0"/>
+                <a:ea typeface="Futura" pitchFamily="34" charset="-122"/>
+                <a:cs typeface="Futura" pitchFamily="34" charset="-120"/>
+              </a:rPr>
+              <a:t>Use Copilot Chat or ChatGPT Edu, on your own screen. Upload the demo file or use your own non-sensitive material. Questions go in the Zoom chat.</a:t>
+            </a:r>
+            <a:endParaRPr lang="en-US" sz="2800" dirty="0"/>
+          </a:p>
+        </p:txBody>
+      </p:sp>
+      <p:sp>
+        <p:nvSpPr>
+          <p:cNvPr id="10" name="Shape 7"/>
+          <p:cNvSpPr/>
+          <p:nvPr/>
+        </p:nvSpPr>
+        <p:spPr>
+          <a:xfrm>
+            <a:off x="1028700" y="3931920"/>
+            <a:ext cx="5029200" cy="3017520"/>
+          </a:xfrm>
+          <a:prstGeom prst="rect">
+            <a:avLst/>
+          </a:prstGeom>
+          <a:solidFill>
+            <a:srgbClr val="FFFFFF"/>
+          </a:solidFill>
+          <a:ln w="9525">
+            <a:solidFill>
+              <a:srgbClr val="D0D3D4"/>
+            </a:solidFill>
+            <a:prstDash val="solid"/>
+          </a:ln>
+        </p:spPr>
+      </p:sp>
+      <p:sp>
+        <p:nvSpPr>
+          <p:cNvPr id="11" name="Shape 8"/>
+          <p:cNvSpPr/>
+          <p:nvPr/>
+        </p:nvSpPr>
+        <p:spPr>
+          <a:xfrm>
+            <a:off x="1028700" y="3931920"/>
+            <a:ext cx="5029200" cy="91440"/>
+          </a:xfrm>
+          <a:prstGeom prst="rect">
+            <a:avLst/>
+          </a:prstGeom>
+          <a:solidFill>
+            <a:srgbClr val="07294D"/>
+          </a:solidFill>
+          <a:ln/>
+        </p:spPr>
+      </p:sp>
+      <p:sp>
+        <p:nvSpPr>
+          <p:cNvPr id="12" name="Text 9"/>
+          <p:cNvSpPr txBox="1"/>
+          <p:nvPr/>
+        </p:nvSpPr>
+        <p:spPr>
+          <a:xfrm>
+            <a:off x="1394460" y="4251960"/>
+            <a:ext cx="4297680" cy="868680"/>
+          </a:xfrm>
+          <a:prstGeom prst="rect">
+            <a:avLst/>
+          </a:prstGeom>
+          <a:noFill/>
+          <a:ln/>
+        </p:spPr>
+        <p:txBody>
+          <a:bodyPr wrap="square" lIns="0" tIns="0" rIns="0" bIns="0" rtlCol="0" anchor="t">
+            <a:normAutofit/>
+          </a:bodyPr>
+          <a:lstStyle/>
+          <a:p>
+            <a:pPr indent="0" marL="0">
+              <a:buNone/>
+            </a:pPr>
+            <a:r>
+              <a:rPr lang="en-US" sz="2600" b="1" dirty="0">
+                <a:solidFill>
+                  <a:srgbClr val="07294D"/>
+                </a:solidFill>
+                <a:latin typeface="Georgia" pitchFamily="34" charset="0"/>
+                <a:ea typeface="Georgia" pitchFamily="34" charset="-122"/>
+                <a:cs typeface="Georgia" pitchFamily="34" charset="-120"/>
+              </a:rPr>
+              <a:t>Job A · A Document</a:t>
+            </a:r>
+            <a:endParaRPr lang="en-US" sz="2600" dirty="0"/>
+          </a:p>
+        </p:txBody>
+      </p:sp>
+      <p:sp>
+        <p:nvSpPr>
+          <p:cNvPr id="13" name="Text 10"/>
+          <p:cNvSpPr txBox="1"/>
+          <p:nvPr/>
+        </p:nvSpPr>
+        <p:spPr>
+          <a:xfrm>
+            <a:off x="1394460" y="5166360"/>
+            <a:ext cx="4297680" cy="1600200"/>
+          </a:xfrm>
+          <a:prstGeom prst="rect">
+            <a:avLst/>
+          </a:prstGeom>
+          <a:noFill/>
+          <a:ln/>
+        </p:spPr>
+        <p:txBody>
+          <a:bodyPr wrap="square" lIns="0" tIns="0" rIns="0" bIns="0" rtlCol="0" anchor="t"/>
+          <a:lstStyle/>
+          <a:p>
+            <a:pPr indent="0" marL="0">
+              <a:lnSpc>
+                <a:spcPct val="125000"/>
+              </a:lnSpc>
+              <a:buNone/>
+            </a:pPr>
+            <a:r>
+              <a:rPr lang="en-US" sz="2200" dirty="0">
+                <a:solidFill>
+                  <a:srgbClr val="5A6571"/>
+                </a:solidFill>
+                <a:latin typeface="Futura" pitchFamily="34" charset="0"/>
+                <a:ea typeface="Futura" pitchFamily="34" charset="-122"/>
+                <a:cs typeface="Futura" pitchFamily="34" charset="-120"/>
+              </a:rPr>
+              <a:t>Summarize a study description, rewrite a paragraph for a community board, then find what's missing.</a:t>
+            </a:r>
+            <a:endParaRPr lang="en-US" sz="2200" dirty="0"/>
+          </a:p>
+        </p:txBody>
+      </p:sp>
+      <p:sp>
+        <p:nvSpPr>
+          <p:cNvPr id="14" name="Shape 11"/>
+          <p:cNvSpPr/>
+          <p:nvPr/>
+        </p:nvSpPr>
+        <p:spPr>
+          <a:xfrm>
+            <a:off x="6629400" y="3931920"/>
+            <a:ext cx="5029200" cy="3017520"/>
+          </a:xfrm>
+          <a:prstGeom prst="rect">
+            <a:avLst/>
+          </a:prstGeom>
+          <a:solidFill>
+            <a:srgbClr val="FFFFFF"/>
+          </a:solidFill>
+          <a:ln w="9525">
+            <a:solidFill>
+              <a:srgbClr val="D0D3D4"/>
+            </a:solidFill>
+            <a:prstDash val="solid"/>
+          </a:ln>
+        </p:spPr>
+      </p:sp>
+      <p:sp>
+        <p:nvSpPr>
+          <p:cNvPr id="15" name="Shape 12"/>
+          <p:cNvSpPr/>
+          <p:nvPr/>
+        </p:nvSpPr>
+        <p:spPr>
+          <a:xfrm>
+            <a:off x="6629400" y="3931920"/>
+            <a:ext cx="5029200" cy="91440"/>
+          </a:xfrm>
+          <a:prstGeom prst="rect">
+            <a:avLst/>
+          </a:prstGeom>
+          <a:solidFill>
+            <a:srgbClr val="006699"/>
+          </a:solidFill>
+          <a:ln/>
+        </p:spPr>
+      </p:sp>
+      <p:sp>
+        <p:nvSpPr>
+          <p:cNvPr id="16" name="Text 13"/>
+          <p:cNvSpPr txBox="1"/>
+          <p:nvPr/>
+        </p:nvSpPr>
+        <p:spPr>
+          <a:xfrm>
+            <a:off x="6995160" y="4251960"/>
+            <a:ext cx="4297680" cy="868680"/>
+          </a:xfrm>
+          <a:prstGeom prst="rect">
+            <a:avLst/>
+          </a:prstGeom>
+          <a:noFill/>
+          <a:ln/>
+        </p:spPr>
+        <p:txBody>
+          <a:bodyPr wrap="square" lIns="0" tIns="0" rIns="0" bIns="0" rtlCol="0" anchor="t">
+            <a:normAutofit/>
+          </a:bodyPr>
+          <a:lstStyle/>
+          <a:p>
+            <a:pPr indent="0" marL="0">
+              <a:buNone/>
+            </a:pPr>
+            <a:r>
+              <a:rPr lang="en-US" sz="2600" b="1" dirty="0">
+                <a:solidFill>
+                  <a:srgbClr val="07294D"/>
+                </a:solidFill>
+                <a:latin typeface="Georgia" pitchFamily="34" charset="0"/>
+                <a:ea typeface="Georgia" pitchFamily="34" charset="-122"/>
+                <a:cs typeface="Georgia" pitchFamily="34" charset="-120"/>
+              </a:rPr>
+              <a:t>Job B · An Email Thread</a:t>
+            </a:r>
+            <a:endParaRPr lang="en-US" sz="2600" dirty="0"/>
+          </a:p>
+        </p:txBody>
+      </p:sp>
+      <p:sp>
+        <p:nvSpPr>
+          <p:cNvPr id="17" name="Text 14"/>
+          <p:cNvSpPr txBox="1"/>
+          <p:nvPr/>
+        </p:nvSpPr>
+        <p:spPr>
+          <a:xfrm>
+            <a:off x="6995160" y="5166360"/>
+            <a:ext cx="4297680" cy="1600200"/>
+          </a:xfrm>
+          <a:prstGeom prst="rect">
+            <a:avLst/>
+          </a:prstGeom>
+          <a:noFill/>
+          <a:ln/>
+        </p:spPr>
+        <p:txBody>
+          <a:bodyPr wrap="square" lIns="0" tIns="0" rIns="0" bIns="0" rtlCol="0" anchor="t"/>
+          <a:lstStyle/>
+          <a:p>
+            <a:pPr indent="0" marL="0">
+              <a:lnSpc>
+                <a:spcPct val="125000"/>
+              </a:lnSpc>
+              <a:buNone/>
+            </a:pPr>
+            <a:r>
+              <a:rPr lang="en-US" sz="2200" dirty="0">
+                <a:solidFill>
+                  <a:srgbClr val="5A6571"/>
+                </a:solidFill>
+                <a:latin typeface="Futura" pitchFamily="34" charset="0"/>
+                <a:ea typeface="Futura" pitchFamily="34" charset="-122"/>
+                <a:cs typeface="Futura" pitchFamily="34" charset="-120"/>
+              </a:rPr>
+              <a:t>Find the decisions and open questions, make an action-item table, then draft a reply from your outline.</a:t>
+            </a:r>
+            <a:endParaRPr lang="en-US" sz="2200" dirty="0"/>
+          </a:p>
+        </p:txBody>
+      </p:sp>
+      <p:sp>
+        <p:nvSpPr>
+          <p:cNvPr id="18" name="Shape 15"/>
+          <p:cNvSpPr/>
+          <p:nvPr/>
+        </p:nvSpPr>
+        <p:spPr>
+          <a:xfrm>
+            <a:off x="12230100" y="3931920"/>
+            <a:ext cx="5029200" cy="3017520"/>
+          </a:xfrm>
+          <a:prstGeom prst="rect">
+            <a:avLst/>
+          </a:prstGeom>
+          <a:solidFill>
+            <a:srgbClr val="FFFFFF"/>
+          </a:solidFill>
+          <a:ln w="9525">
+            <a:solidFill>
+              <a:srgbClr val="D0D3D4"/>
+            </a:solidFill>
+            <a:prstDash val="solid"/>
+          </a:ln>
+        </p:spPr>
+      </p:sp>
+      <p:sp>
+        <p:nvSpPr>
+          <p:cNvPr id="19" name="Shape 16"/>
+          <p:cNvSpPr/>
+          <p:nvPr/>
+        </p:nvSpPr>
+        <p:spPr>
+          <a:xfrm>
+            <a:off x="12230100" y="3931920"/>
+            <a:ext cx="5029200" cy="91440"/>
+          </a:xfrm>
+          <a:prstGeom prst="rect">
+            <a:avLst/>
+          </a:prstGeom>
+          <a:solidFill>
+            <a:srgbClr val="FFC600"/>
+          </a:solidFill>
+          <a:ln/>
+        </p:spPr>
+      </p:sp>
+      <p:sp>
+        <p:nvSpPr>
+          <p:cNvPr id="20" name="Text 17"/>
+          <p:cNvSpPr txBox="1"/>
+          <p:nvPr/>
+        </p:nvSpPr>
+        <p:spPr>
+          <a:xfrm>
+            <a:off x="12595860" y="4251960"/>
+            <a:ext cx="4297680" cy="868680"/>
+          </a:xfrm>
+          <a:prstGeom prst="rect">
+            <a:avLst/>
+          </a:prstGeom>
+          <a:noFill/>
+          <a:ln/>
+        </p:spPr>
+        <p:txBody>
+          <a:bodyPr wrap="square" lIns="0" tIns="0" rIns="0" bIns="0" rtlCol="0" anchor="t">
+            <a:normAutofit/>
+          </a:bodyPr>
+          <a:lstStyle/>
+          <a:p>
+            <a:pPr indent="0" marL="0">
+              <a:buNone/>
+            </a:pPr>
+            <a:r>
+              <a:rPr lang="en-US" sz="2600" b="1" dirty="0">
+                <a:solidFill>
+                  <a:srgbClr val="07294D"/>
+                </a:solidFill>
+                <a:latin typeface="Georgia" pitchFamily="34" charset="0"/>
+                <a:ea typeface="Georgia" pitchFamily="34" charset="-122"/>
+                <a:cs typeface="Georgia" pitchFamily="34" charset="-120"/>
+              </a:rPr>
+              <a:t>Job C · A Spreadsheet</a:t>
+            </a:r>
+            <a:endParaRPr lang="en-US" sz="2600" dirty="0"/>
+          </a:p>
+        </p:txBody>
+      </p:sp>
+      <p:sp>
+        <p:nvSpPr>
+          <p:cNvPr id="21" name="Text 18"/>
+          <p:cNvSpPr txBox="1"/>
+          <p:nvPr/>
+        </p:nvSpPr>
+        <p:spPr>
+          <a:xfrm>
+            <a:off x="12595860" y="5166360"/>
+            <a:ext cx="4297680" cy="1600200"/>
+          </a:xfrm>
+          <a:prstGeom prst="rect">
+            <a:avLst/>
+          </a:prstGeom>
+          <a:noFill/>
+          <a:ln/>
+        </p:spPr>
+        <p:txBody>
+          <a:bodyPr wrap="square" lIns="0" tIns="0" rIns="0" bIns="0" rtlCol="0" anchor="t"/>
+          <a:lstStyle/>
+          <a:p>
+            <a:pPr indent="0" marL="0">
+              <a:lnSpc>
+                <a:spcPct val="125000"/>
+              </a:lnSpc>
+              <a:buNone/>
+            </a:pPr>
+            <a:r>
+              <a:rPr lang="en-US" sz="2200" dirty="0">
+                <a:solidFill>
+                  <a:srgbClr val="5A6571"/>
+                </a:solidFill>
+                <a:latin typeface="Futura" pitchFamily="34" charset="0"/>
+                <a:ea typeface="Futura" pitchFamily="34" charset="-122"/>
+                <a:cs typeface="Futura" pitchFamily="34" charset="-120"/>
+              </a:rPr>
+              <a:t>Find what stands out, get an Excel formula to flag rows, pick a chart.</a:t>
+            </a:r>
+            <a:endParaRPr lang="en-US" sz="2200" dirty="0"/>
+          </a:p>
+        </p:txBody>
+      </p:sp>
     </p:spTree>
   </p:cSld>
   <p:clrMapOvr>
@@ -5082,362 +5284,30 @@
           <a:chExt cx="0" cy="0"/>
         </a:xfrm>
       </p:grpSpPr>
-      <p:sp>
-        <p:nvSpPr>
-          <p:cNvPr id="2" name="Text 0"/>
-          <p:cNvSpPr txBox="1"/>
-          <p:nvPr/>
-        </p:nvSpPr>
-        <p:spPr>
-          <a:xfrm>
-            <a:off x="1028700" y="868680"/>
-            <a:ext cx="16230600" cy="274320"/>
-          </a:xfrm>
-          <a:prstGeom prst="rect">
-            <a:avLst/>
-          </a:prstGeom>
-          <a:noFill/>
-          <a:ln/>
-        </p:spPr>
-        <p:txBody>
-          <a:bodyPr wrap="square" lIns="0" tIns="0" rIns="0" bIns="0" rtlCol="0" anchor="t"/>
-          <a:lstStyle/>
-          <a:p>
-            <a:pPr indent="0" marL="0">
-              <a:buNone/>
-            </a:pPr>
-            <a:r>
-              <a:rPr lang="en-US" sz="1800" b="1" spc="300" kern="0" dirty="0">
-                <a:solidFill>
-                  <a:srgbClr val="006699"/>
-                </a:solidFill>
-                <a:latin typeface="Futura" pitchFamily="34" charset="0"/>
-                <a:ea typeface="Futura" pitchFamily="34" charset="-122"/>
-                <a:cs typeface="Futura" pitchFamily="34" charset="-120"/>
-              </a:rPr>
-              <a:t>WRAP-UP</a:t>
-            </a:r>
-            <a:endParaRPr lang="en-US" sz="1800" dirty="0"/>
-          </a:p>
-        </p:txBody>
-      </p:sp>
-      <p:sp>
-        <p:nvSpPr>
-          <p:cNvPr id="3" name="Text 1"/>
-          <p:cNvSpPr txBox="1"/>
-          <p:nvPr/>
-        </p:nvSpPr>
-        <p:spPr>
-          <a:xfrm>
-            <a:off x="1028700" y="1188720"/>
-            <a:ext cx="16230600" cy="822960"/>
-          </a:xfrm>
-          <a:prstGeom prst="rect">
-            <a:avLst/>
-          </a:prstGeom>
-          <a:noFill/>
-          <a:ln/>
-        </p:spPr>
-        <p:txBody>
-          <a:bodyPr wrap="square" lIns="0" tIns="0" rIns="0" bIns="0" rtlCol="0" anchor="ctr"/>
-          <a:lstStyle/>
-          <a:p>
-            <a:pPr indent="0" marL="0">
-              <a:buNone/>
-            </a:pPr>
-            <a:r>
-              <a:rPr lang="en-US" sz="5500" b="1" dirty="0">
-                <a:solidFill>
-                  <a:srgbClr val="07294D"/>
-                </a:solidFill>
-                <a:latin typeface="Georgia" pitchFamily="34" charset="0"/>
-                <a:ea typeface="Georgia" pitchFamily="34" charset="-122"/>
-                <a:cs typeface="Georgia" pitchFamily="34" charset="-120"/>
-              </a:rPr>
-              <a:t>What to Take Away</a:t>
-            </a:r>
-            <a:endParaRPr lang="en-US" sz="5500" dirty="0"/>
-          </a:p>
-        </p:txBody>
-      </p:sp>
-      <p:sp>
-        <p:nvSpPr>
-          <p:cNvPr id="4" name="Shape 2"/>
-          <p:cNvSpPr/>
-          <p:nvPr/>
-        </p:nvSpPr>
-        <p:spPr>
-          <a:xfrm>
-            <a:off x="1028700" y="2103120"/>
-            <a:ext cx="777240" cy="73152"/>
-          </a:xfrm>
-          <a:prstGeom prst="rect">
-            <a:avLst/>
-          </a:prstGeom>
-          <a:solidFill>
-            <a:srgbClr val="FFC600"/>
-          </a:solidFill>
-          <a:ln/>
-        </p:spPr>
-      </p:sp>
-      <p:sp>
-        <p:nvSpPr>
-          <p:cNvPr id="5" name="Shape 3"/>
-          <p:cNvSpPr/>
-          <p:nvPr/>
-        </p:nvSpPr>
-        <p:spPr>
-          <a:xfrm>
-            <a:off x="1028700" y="9646920"/>
-            <a:ext cx="16230600" cy="0"/>
-          </a:xfrm>
-          <a:prstGeom prst="line">
-            <a:avLst/>
-          </a:prstGeom>
-          <a:noFill/>
-          <a:ln w="9525">
-            <a:solidFill>
-              <a:srgbClr val="D0D3D4"/>
-            </a:solidFill>
-            <a:prstDash val="solid"/>
-          </a:ln>
-        </p:spPr>
-      </p:sp>
-      <p:sp>
-        <p:nvSpPr>
-          <p:cNvPr id="6" name="Text 4"/>
-          <p:cNvSpPr txBox="1"/>
-          <p:nvPr/>
-        </p:nvSpPr>
-        <p:spPr>
-          <a:xfrm>
-            <a:off x="1028700" y="9784080"/>
-            <a:ext cx="7315200" cy="274320"/>
-          </a:xfrm>
-          <a:prstGeom prst="rect">
-            <a:avLst/>
-          </a:prstGeom>
-          <a:noFill/>
-          <a:ln/>
-        </p:spPr>
-        <p:txBody>
-          <a:bodyPr wrap="square" lIns="0" tIns="0" rIns="0" bIns="0" rtlCol="0" anchor="t"/>
-          <a:lstStyle/>
-          <a:p>
-            <a:pPr indent="0" marL="0">
-              <a:buNone/>
-            </a:pPr>
-            <a:r>
-              <a:rPr lang="en-US" sz="1400" b="1" dirty="0">
-                <a:solidFill>
-                  <a:srgbClr val="07294D"/>
-                </a:solidFill>
-                <a:latin typeface="Futura" pitchFamily="34" charset="0"/>
-                <a:ea typeface="Futura" pitchFamily="34" charset="-122"/>
-                <a:cs typeface="Futura" pitchFamily="34" charset="-120"/>
-              </a:rPr>
-              <a:t>Environmental &amp; Occupational Health</a:t>
-            </a:r>
-            <a:endParaRPr lang="en-US" sz="1400" dirty="0"/>
-          </a:p>
-        </p:txBody>
-      </p:sp>
-      <p:sp>
-        <p:nvSpPr>
-          <p:cNvPr id="7" name="Text 5"/>
-          <p:cNvSpPr txBox="1"/>
-          <p:nvPr/>
-        </p:nvSpPr>
-        <p:spPr>
-          <a:xfrm>
-            <a:off x="9944100" y="9784080"/>
-            <a:ext cx="7315200" cy="274320"/>
-          </a:xfrm>
-          <a:prstGeom prst="rect">
-            <a:avLst/>
-          </a:prstGeom>
-          <a:noFill/>
-          <a:ln/>
-        </p:spPr>
-        <p:txBody>
-          <a:bodyPr wrap="square" lIns="0" tIns="0" rIns="0" bIns="0" rtlCol="0" anchor="t"/>
-          <a:lstStyle/>
-          <a:p>
-            <a:pPr algn="r" indent="0" marL="0">
-              <a:buNone/>
-            </a:pPr>
-            <a:r>
-              <a:rPr lang="en-US" sz="1400" dirty="0">
-                <a:solidFill>
-                  <a:srgbClr val="5A6571"/>
-                </a:solidFill>
-                <a:latin typeface="Futura" pitchFamily="34" charset="0"/>
-                <a:ea typeface="Futura" pitchFamily="34" charset="-122"/>
-                <a:cs typeface="Futura" pitchFamily="34" charset="-120"/>
-              </a:rPr>
-              <a:t>Dornsife School of Public Health</a:t>
-            </a:r>
-            <a:endParaRPr lang="en-US" sz="1400" dirty="0"/>
-          </a:p>
-        </p:txBody>
-      </p:sp>
-      <p:sp>
-        <p:nvSpPr>
-          <p:cNvPr id="9" name="Text 6"/>
-          <p:cNvSpPr txBox="1"/>
-          <p:nvPr/>
-        </p:nvSpPr>
-        <p:spPr>
-          <a:xfrm>
-            <a:off x="1028700" y="2697480"/>
-            <a:ext cx="15544800" cy="731520"/>
-          </a:xfrm>
-          <a:prstGeom prst="rect">
-            <a:avLst/>
-          </a:prstGeom>
-          <a:noFill/>
-          <a:ln/>
-        </p:spPr>
-        <p:txBody>
-          <a:bodyPr wrap="square" lIns="0" tIns="0" rIns="0" bIns="0" rtlCol="0" anchor="t"/>
-          <a:lstStyle/>
-          <a:p>
-            <a:pPr indent="0" marL="0">
-              <a:buNone/>
-            </a:pPr>
-            <a:r>
-              <a:rPr lang="en-US" sz="2900" dirty="0">
-                <a:solidFill>
-                  <a:srgbClr val="1C2530"/>
-                </a:solidFill>
-                <a:latin typeface="Futura" pitchFamily="34" charset="0"/>
-                <a:ea typeface="Futura" pitchFamily="34" charset="-122"/>
-                <a:cs typeface="Futura" pitchFamily="34" charset="-120"/>
-              </a:rPr>
-              <a:t>Paste or upload, ask, check, copy the answer back. Copilot Chat or ChatGPT Edu both work.</a:t>
-            </a:r>
-            <a:endParaRPr lang="en-US" sz="2900" dirty="0"/>
-          </a:p>
-        </p:txBody>
-      </p:sp>
-      <p:sp>
-        <p:nvSpPr>
-          <p:cNvPr id="10" name="Text 7"/>
-          <p:cNvSpPr txBox="1"/>
-          <p:nvPr/>
-        </p:nvSpPr>
-        <p:spPr>
-          <a:xfrm>
-            <a:off x="1028700" y="3749040"/>
-            <a:ext cx="14904720" cy="3657600"/>
-          </a:xfrm>
-          <a:prstGeom prst="rect">
-            <a:avLst/>
-          </a:prstGeom>
-          <a:noFill/>
-          <a:ln/>
-        </p:spPr>
-        <p:txBody>
-          <a:bodyPr wrap="square" lIns="0" tIns="0" rIns="0" bIns="0" rtlCol="0" anchor="t"/>
-          <a:lstStyle/>
-          <a:p>
-            <a:pPr marL="279400" indent="-279400">
-              <a:lnSpc>
-                <a:spcPct val="120000"/>
-              </a:lnSpc>
-              <a:spcAft>
-                <a:spcPts val="1200"/>
-              </a:spcAft>
-              <a:buSzPct val="100000"/>
-              <a:buChar char="•"/>
-            </a:pPr>
-            <a:r>
-              <a:rPr lang="en-US" sz="2500" dirty="0">
-                <a:solidFill>
-                  <a:srgbClr val="1C2530"/>
-                </a:solidFill>
-                <a:latin typeface="Futura" pitchFamily="34" charset="0"/>
-                <a:ea typeface="Futura" pitchFamily="34" charset="-122"/>
-                <a:cs typeface="Futura" pitchFamily="34" charset="-120"/>
-              </a:rPr>
-              <a:t>Three moves cover most weekly tasks: summarize, rewrite for an audience, make a table.</a:t>
-            </a:r>
-            <a:endParaRPr lang="en-US" sz="2500" dirty="0"/>
-          </a:p>
-          <a:p>
-            <a:pPr marL="279400" indent="-279400">
-              <a:lnSpc>
-                <a:spcPct val="120000"/>
-              </a:lnSpc>
-              <a:spcAft>
-                <a:spcPts val="1200"/>
-              </a:spcAft>
-              <a:buSzPct val="100000"/>
-              <a:buChar char="•"/>
-            </a:pPr>
-            <a:r>
-              <a:rPr lang="en-US" sz="2500" dirty="0">
-                <a:solidFill>
-                  <a:srgbClr val="1C2530"/>
-                </a:solidFill>
-                <a:latin typeface="Futura" pitchFamily="34" charset="0"/>
-                <a:ea typeface="Futura" pitchFamily="34" charset="-122"/>
-                <a:cs typeface="Futura" pitchFamily="34" charset="-120"/>
-              </a:rPr>
-              <a:t>Before you use it: Verified? Disclosed? Yours?</a:t>
-            </a:r>
-            <a:endParaRPr lang="en-US" sz="2500" dirty="0"/>
-          </a:p>
-          <a:p>
-            <a:pPr marL="279400" indent="-279400">
-              <a:lnSpc>
-                <a:spcPct val="120000"/>
-              </a:lnSpc>
-              <a:spcAft>
-                <a:spcPts val="1200"/>
-              </a:spcAft>
-              <a:buSzPct val="100000"/>
-              <a:buChar char="•"/>
-            </a:pPr>
-            <a:r>
-              <a:rPr lang="en-US" sz="2500" dirty="0">
-                <a:solidFill>
-                  <a:srgbClr val="1C2530"/>
-                </a:solidFill>
-                <a:latin typeface="Futura" pitchFamily="34" charset="0"/>
-                <a:ea typeface="Futura" pitchFamily="34" charset="-122"/>
-                <a:cs typeface="Futura" pitchFamily="34" charset="-120"/>
-              </a:rPr>
-              <a:t>Save the prompts that work as recipes.</a:t>
-            </a:r>
-            <a:endParaRPr lang="en-US" sz="2500" dirty="0"/>
-          </a:p>
-          <a:p>
-            <a:pPr marL="279400" indent="-279400">
-              <a:lnSpc>
-                <a:spcPct val="120000"/>
-              </a:lnSpc>
-              <a:spcAft>
-                <a:spcPts val="1200"/>
-              </a:spcAft>
-              <a:buSzPct val="100000"/>
-              <a:buChar char="•"/>
-            </a:pPr>
-            <a:r>
-              <a:rPr lang="en-US" sz="2500" dirty="0">
-                <a:solidFill>
-                  <a:srgbClr val="1C2530"/>
-                </a:solidFill>
-                <a:latin typeface="Futura" pitchFamily="34" charset="0"/>
-                <a:ea typeface="Futura" pitchFamily="34" charset="-122"/>
-                <a:cs typeface="Futura" pitchFamily="34" charset="-120"/>
-              </a:rPr>
-              <a:t>Before Core 3: save two recipes and use one again next week. Bring them.</a:t>
-            </a:r>
-            <a:endParaRPr lang="en-US" sz="2500" dirty="0"/>
-          </a:p>
-        </p:txBody>
-      </p:sp>
+      <p:pic>
+        <p:nvPicPr>
+          <p:cNvPr id="2" name="Image 0" descr="/private/tmp/claude-1279606903/-Users-daq26-Library-CloudStorage-OneDrive-DrexelUniversity-Anthropic-AI-for-UH-Course-workshop-website/f22b16b1-71f0-4e6b-b603-aa7f51f0b99e/scratchpad/w2img/s19.png">    </p:cNvPr>
+          <p:cNvPicPr>
+            <a:picLocks noChangeAspect="1"/>
+          </p:cNvPicPr>
+          <p:nvPr/>
+        </p:nvPicPr>
+        <p:blipFill>
+          <a:blip r:embed="rId1"/>
+          <a:stretch>
+            <a:fillRect/>
+          </a:stretch>
+        </p:blipFill>
+        <p:spPr>
+          <a:xfrm>
+            <a:off x="0" y="0"/>
+            <a:ext cx="18288000" cy="10287000"/>
+          </a:xfrm>
+          <a:prstGeom prst="rect">
+            <a:avLst/>
+          </a:prstGeom>
+        </p:spPr>
+      </p:pic>
     </p:spTree>
   </p:cSld>
   <p:clrMapOvr>
@@ -5753,7 +5623,7 @@
               <a:buNone/>
             </a:pPr>
             <a:r>
-              <a:rPr lang="en-US" sz="2600" dirty="0">
+              <a:rPr lang="en-US" sz="2500" dirty="0">
                 <a:solidFill>
                   <a:srgbClr val="1C2530"/>
                 </a:solidFill>
@@ -5763,7 +5633,7 @@
               </a:rPr>
               <a:t>Pick a weekly task where AI can save you time.</a:t>
             </a:r>
-            <a:endParaRPr lang="en-US" sz="2600" dirty="0"/>
+            <a:endParaRPr lang="en-US" sz="2500" dirty="0"/>
           </a:p>
         </p:txBody>
       </p:sp>
@@ -5851,7 +5721,7 @@
               <a:buNone/>
             </a:pPr>
             <a:r>
-              <a:rPr lang="en-US" sz="2600" dirty="0">
+              <a:rPr lang="en-US" sz="2500" dirty="0">
                 <a:solidFill>
                   <a:srgbClr val="1C2530"/>
                 </a:solidFill>
@@ -5859,9 +5729,9 @@
                 <a:ea typeface="Futura" pitchFamily="34" charset="-122"/>
                 <a:cs typeface="Futura" pitchFamily="34" charset="-120"/>
               </a:rPr>
-              <a:t>Get a document, email, or spreadsheet into Copilot Chat or ChatGPT Edu.</a:t>
-            </a:r>
-            <a:endParaRPr lang="en-US" sz="2600" dirty="0"/>
+              <a:t>Start from your own plan, then decide: should AI draft it, or refine what you wrote?</a:t>
+            </a:r>
+            <a:endParaRPr lang="en-US" sz="2500" dirty="0"/>
           </a:p>
         </p:txBody>
       </p:sp>
@@ -5949,7 +5819,7 @@
               <a:buNone/>
             </a:pPr>
             <a:r>
-              <a:rPr lang="en-US" sz="2600" dirty="0">
+              <a:rPr lang="en-US" sz="2500" dirty="0">
                 <a:solidFill>
                   <a:srgbClr val="1C2530"/>
                 </a:solidFill>
@@ -5957,9 +5827,9 @@
                 <a:ea typeface="Futura" pitchFamily="34" charset="-122"/>
                 <a:cs typeface="Futura" pitchFamily="34" charset="-120"/>
               </a:rPr>
-              <a:t>Use three everyday moves: summarize, rewrite for an audience, make a table.</a:t>
-            </a:r>
-            <a:endParaRPr lang="en-US" sz="2600" dirty="0"/>
+              <a:t>Get a document, email, or spreadsheet into Copilot Chat or ChatGPT Edu.</a:t>
+            </a:r>
+            <a:endParaRPr lang="en-US" sz="2500" dirty="0"/>
           </a:p>
         </p:txBody>
       </p:sp>
@@ -6047,7 +5917,7 @@
               <a:buNone/>
             </a:pPr>
             <a:r>
-              <a:rPr lang="en-US" sz="2600" dirty="0">
+              <a:rPr lang="en-US" sz="2500" dirty="0">
                 <a:solidFill>
                   <a:srgbClr val="1C2530"/>
                 </a:solidFill>
@@ -6055,9 +5925,9 @@
                 <a:ea typeface="Futura" pitchFamily="34" charset="-122"/>
                 <a:cs typeface="Futura" pitchFamily="34" charset="-120"/>
               </a:rPr>
-              <a:t>Check the answer before you use it.</a:t>
-            </a:r>
-            <a:endParaRPr lang="en-US" sz="2600" dirty="0"/>
+              <a:t>Use AI as an editor: tighten language, catch inconsistencies, find what's missing.</a:t>
+            </a:r>
+            <a:endParaRPr lang="en-US" sz="2500" dirty="0"/>
           </a:p>
         </p:txBody>
       </p:sp>
@@ -6145,7 +6015,7 @@
               <a:buNone/>
             </a:pPr>
             <a:r>
-              <a:rPr lang="en-US" sz="2600" dirty="0">
+              <a:rPr lang="en-US" sz="2500" dirty="0">
                 <a:solidFill>
                   <a:srgbClr val="1C2530"/>
                 </a:solidFill>
@@ -6153,9 +6023,9 @@
                 <a:ea typeface="Futura" pitchFamily="34" charset="-122"/>
                 <a:cs typeface="Futura" pitchFamily="34" charset="-120"/>
               </a:rPr>
-              <a:t>Save one prompt you can reuse.</a:t>
-            </a:r>
-            <a:endParaRPr lang="en-US" sz="2600" dirty="0"/>
+              <a:t>Check the answer before you use it, and save one prompt you can reuse.</a:t>
+            </a:r>
+            <a:endParaRPr lang="en-US" sz="2500" dirty="0"/>
           </a:p>
         </p:txBody>
       </p:sp>
@@ -6170,6 +6040,433 @@
 <file path=ppt/slides/slide20.xml><?xml version="1.0" encoding="utf-8"?>
 <p:sld xmlns:a="http://schemas.openxmlformats.org/drawingml/2006/main" xmlns:r="http://schemas.openxmlformats.org/officeDocument/2006/relationships" xmlns:p="http://schemas.openxmlformats.org/presentationml/2006/main">
   <p:cSld name="Slide 20">
+    <p:bg>
+      <p:bgPr>
+        <a:solidFill>
+          <a:srgbClr val="FFFFFF"/>
+        </a:solidFill>
+      </p:bgPr>
+    </p:bg>
+    <p:spTree>
+      <p:nvGrpSpPr>
+        <p:cNvPr id="1" name=""/>
+        <p:cNvGrpSpPr/>
+        <p:nvPr/>
+      </p:nvGrpSpPr>
+      <p:grpSpPr>
+        <a:xfrm>
+          <a:off x="0" y="0"/>
+          <a:ext cx="0" cy="0"/>
+          <a:chOff x="0" y="0"/>
+          <a:chExt cx="0" cy="0"/>
+        </a:xfrm>
+      </p:grpSpPr>
+      <p:sp>
+        <p:nvSpPr>
+          <p:cNvPr id="2" name="Text 0"/>
+          <p:cNvSpPr txBox="1"/>
+          <p:nvPr/>
+        </p:nvSpPr>
+        <p:spPr>
+          <a:xfrm>
+            <a:off x="1028700" y="868680"/>
+            <a:ext cx="16230600" cy="274320"/>
+          </a:xfrm>
+          <a:prstGeom prst="rect">
+            <a:avLst/>
+          </a:prstGeom>
+          <a:noFill/>
+          <a:ln/>
+        </p:spPr>
+        <p:txBody>
+          <a:bodyPr wrap="square" lIns="0" tIns="0" rIns="0" bIns="0" rtlCol="0" anchor="t"/>
+          <a:lstStyle/>
+          <a:p>
+            <a:pPr indent="0" marL="0">
+              <a:buNone/>
+            </a:pPr>
+            <a:r>
+              <a:rPr lang="en-US" sz="1800" b="1" spc="300" kern="0" dirty="0">
+                <a:solidFill>
+                  <a:srgbClr val="006699"/>
+                </a:solidFill>
+                <a:latin typeface="Futura" pitchFamily="34" charset="0"/>
+                <a:ea typeface="Futura" pitchFamily="34" charset="-122"/>
+                <a:cs typeface="Futura" pitchFamily="34" charset="-120"/>
+              </a:rPr>
+              <a:t>WRAP-UP</a:t>
+            </a:r>
+            <a:endParaRPr lang="en-US" sz="1800" dirty="0"/>
+          </a:p>
+        </p:txBody>
+      </p:sp>
+      <p:sp>
+        <p:nvSpPr>
+          <p:cNvPr id="3" name="Text 1"/>
+          <p:cNvSpPr txBox="1"/>
+          <p:nvPr/>
+        </p:nvSpPr>
+        <p:spPr>
+          <a:xfrm>
+            <a:off x="1028700" y="1188720"/>
+            <a:ext cx="16230600" cy="822960"/>
+          </a:xfrm>
+          <a:prstGeom prst="rect">
+            <a:avLst/>
+          </a:prstGeom>
+          <a:noFill/>
+          <a:ln/>
+        </p:spPr>
+        <p:txBody>
+          <a:bodyPr wrap="square" lIns="0" tIns="0" rIns="0" bIns="0" rtlCol="0" anchor="ctr"/>
+          <a:lstStyle/>
+          <a:p>
+            <a:pPr indent="0" marL="0">
+              <a:buNone/>
+            </a:pPr>
+            <a:r>
+              <a:rPr lang="en-US" sz="5500" b="1" dirty="0">
+                <a:solidFill>
+                  <a:srgbClr val="07294D"/>
+                </a:solidFill>
+                <a:latin typeface="Georgia" pitchFamily="34" charset="0"/>
+                <a:ea typeface="Georgia" pitchFamily="34" charset="-122"/>
+                <a:cs typeface="Georgia" pitchFamily="34" charset="-120"/>
+              </a:rPr>
+              <a:t>What to Take Away</a:t>
+            </a:r>
+            <a:endParaRPr lang="en-US" sz="5500" dirty="0"/>
+          </a:p>
+        </p:txBody>
+      </p:sp>
+      <p:sp>
+        <p:nvSpPr>
+          <p:cNvPr id="4" name="Shape 2"/>
+          <p:cNvSpPr/>
+          <p:nvPr/>
+        </p:nvSpPr>
+        <p:spPr>
+          <a:xfrm>
+            <a:off x="1028700" y="2103120"/>
+            <a:ext cx="777240" cy="73152"/>
+          </a:xfrm>
+          <a:prstGeom prst="rect">
+            <a:avLst/>
+          </a:prstGeom>
+          <a:solidFill>
+            <a:srgbClr val="FFC600"/>
+          </a:solidFill>
+          <a:ln/>
+        </p:spPr>
+      </p:sp>
+      <p:sp>
+        <p:nvSpPr>
+          <p:cNvPr id="5" name="Shape 3"/>
+          <p:cNvSpPr/>
+          <p:nvPr/>
+        </p:nvSpPr>
+        <p:spPr>
+          <a:xfrm>
+            <a:off x="1028700" y="9646920"/>
+            <a:ext cx="16230600" cy="0"/>
+          </a:xfrm>
+          <a:prstGeom prst="line">
+            <a:avLst/>
+          </a:prstGeom>
+          <a:noFill/>
+          <a:ln w="9525">
+            <a:solidFill>
+              <a:srgbClr val="D0D3D4"/>
+            </a:solidFill>
+            <a:prstDash val="solid"/>
+          </a:ln>
+        </p:spPr>
+      </p:sp>
+      <p:sp>
+        <p:nvSpPr>
+          <p:cNvPr id="6" name="Text 4"/>
+          <p:cNvSpPr txBox="1"/>
+          <p:nvPr/>
+        </p:nvSpPr>
+        <p:spPr>
+          <a:xfrm>
+            <a:off x="1028700" y="9784080"/>
+            <a:ext cx="7315200" cy="274320"/>
+          </a:xfrm>
+          <a:prstGeom prst="rect">
+            <a:avLst/>
+          </a:prstGeom>
+          <a:noFill/>
+          <a:ln/>
+        </p:spPr>
+        <p:txBody>
+          <a:bodyPr wrap="square" lIns="0" tIns="0" rIns="0" bIns="0" rtlCol="0" anchor="t"/>
+          <a:lstStyle/>
+          <a:p>
+            <a:pPr indent="0" marL="0">
+              <a:buNone/>
+            </a:pPr>
+            <a:r>
+              <a:rPr lang="en-US" sz="1400" b="1" dirty="0">
+                <a:solidFill>
+                  <a:srgbClr val="07294D"/>
+                </a:solidFill>
+                <a:latin typeface="Futura" pitchFamily="34" charset="0"/>
+                <a:ea typeface="Futura" pitchFamily="34" charset="-122"/>
+                <a:cs typeface="Futura" pitchFamily="34" charset="-120"/>
+              </a:rPr>
+              <a:t>Environmental &amp; Occupational Health</a:t>
+            </a:r>
+            <a:endParaRPr lang="en-US" sz="1400" dirty="0"/>
+          </a:p>
+        </p:txBody>
+      </p:sp>
+      <p:sp>
+        <p:nvSpPr>
+          <p:cNvPr id="7" name="Text 5"/>
+          <p:cNvSpPr txBox="1"/>
+          <p:nvPr/>
+        </p:nvSpPr>
+        <p:spPr>
+          <a:xfrm>
+            <a:off x="9944100" y="9784080"/>
+            <a:ext cx="7315200" cy="274320"/>
+          </a:xfrm>
+          <a:prstGeom prst="rect">
+            <a:avLst/>
+          </a:prstGeom>
+          <a:noFill/>
+          <a:ln/>
+        </p:spPr>
+        <p:txBody>
+          <a:bodyPr wrap="square" lIns="0" tIns="0" rIns="0" bIns="0" rtlCol="0" anchor="t"/>
+          <a:lstStyle/>
+          <a:p>
+            <a:pPr algn="r" indent="0" marL="0">
+              <a:buNone/>
+            </a:pPr>
+            <a:r>
+              <a:rPr lang="en-US" sz="1400" dirty="0">
+                <a:solidFill>
+                  <a:srgbClr val="5A6571"/>
+                </a:solidFill>
+                <a:latin typeface="Futura" pitchFamily="34" charset="0"/>
+                <a:ea typeface="Futura" pitchFamily="34" charset="-122"/>
+                <a:cs typeface="Futura" pitchFamily="34" charset="-120"/>
+              </a:rPr>
+              <a:t>Dornsife School of Public Health</a:t>
+            </a:r>
+            <a:endParaRPr lang="en-US" sz="1400" dirty="0"/>
+          </a:p>
+        </p:txBody>
+      </p:sp>
+      <p:sp>
+        <p:nvSpPr>
+          <p:cNvPr id="9" name="Text 6"/>
+          <p:cNvSpPr txBox="1"/>
+          <p:nvPr/>
+        </p:nvSpPr>
+        <p:spPr>
+          <a:xfrm>
+            <a:off x="1028700" y="2697480"/>
+            <a:ext cx="15544800" cy="731520"/>
+          </a:xfrm>
+          <a:prstGeom prst="rect">
+            <a:avLst/>
+          </a:prstGeom>
+          <a:noFill/>
+          <a:ln/>
+        </p:spPr>
+        <p:txBody>
+          <a:bodyPr wrap="square" lIns="0" tIns="0" rIns="0" bIns="0" rtlCol="0" anchor="t"/>
+          <a:lstStyle/>
+          <a:p>
+            <a:pPr indent="0" marL="0">
+              <a:buNone/>
+            </a:pPr>
+            <a:r>
+              <a:rPr lang="en-US" sz="2900" dirty="0">
+                <a:solidFill>
+                  <a:srgbClr val="1C2530"/>
+                </a:solidFill>
+                <a:latin typeface="Futura" pitchFamily="34" charset="0"/>
+                <a:ea typeface="Futura" pitchFamily="34" charset="-122"/>
+                <a:cs typeface="Futura" pitchFamily="34" charset="-120"/>
+              </a:rPr>
+              <a:t>Plan first. Then AI drafts from your outline, or refines what you wrote. Then you check it.</a:t>
+            </a:r>
+            <a:endParaRPr lang="en-US" sz="2900" dirty="0"/>
+          </a:p>
+        </p:txBody>
+      </p:sp>
+      <p:sp>
+        <p:nvSpPr>
+          <p:cNvPr id="10" name="Text 7"/>
+          <p:cNvSpPr txBox="1"/>
+          <p:nvPr/>
+        </p:nvSpPr>
+        <p:spPr>
+          <a:xfrm>
+            <a:off x="1028700" y="3749040"/>
+            <a:ext cx="15544800" cy="3840480"/>
+          </a:xfrm>
+          <a:prstGeom prst="rect">
+            <a:avLst/>
+          </a:prstGeom>
+          <a:noFill/>
+          <a:ln/>
+        </p:spPr>
+        <p:txBody>
+          <a:bodyPr wrap="square" lIns="0" tIns="0" rIns="0" bIns="0" rtlCol="0" anchor="t"/>
+          <a:lstStyle/>
+          <a:p>
+            <a:pPr marL="279400" indent="-279400">
+              <a:lnSpc>
+                <a:spcPct val="120000"/>
+              </a:lnSpc>
+              <a:spcAft>
+                <a:spcPts val="1200"/>
+              </a:spcAft>
+              <a:buSzPct val="100000"/>
+              <a:buChar char="•"/>
+            </a:pPr>
+            <a:r>
+              <a:rPr lang="en-US" sz="2500" dirty="0">
+                <a:solidFill>
+                  <a:srgbClr val="1C2530"/>
+                </a:solidFill>
+                <a:latin typeface="Futura" pitchFamily="34" charset="0"/>
+                <a:ea typeface="Futura" pitchFamily="34" charset="-122"/>
+                <a:cs typeface="Futura" pitchFamily="34" charset="-120"/>
+              </a:rPr>
+              <a:t>Routine and low stakes: AI drafts from your outline. Your expertise or high stakes: you write, AI refines.</a:t>
+            </a:r>
+            <a:endParaRPr lang="en-US" sz="2500" dirty="0"/>
+          </a:p>
+          <a:p>
+            <a:pPr marL="279400" indent="-279400">
+              <a:lnSpc>
+                <a:spcPct val="120000"/>
+              </a:lnSpc>
+              <a:spcAft>
+                <a:spcPts val="1200"/>
+              </a:spcAft>
+              <a:buSzPct val="100000"/>
+              <a:buChar char="•"/>
+            </a:pPr>
+            <a:r>
+              <a:rPr lang="en-US" sz="2500" dirty="0">
+                <a:solidFill>
+                  <a:srgbClr val="1C2530"/>
+                </a:solidFill>
+                <a:latin typeface="Futura" pitchFamily="34" charset="0"/>
+                <a:ea typeface="Futura" pitchFamily="34" charset="-122"/>
+                <a:cs typeface="Futura" pitchFamily="34" charset="-120"/>
+              </a:rPr>
+              <a:t>As an editor, AI tightens language, catches inconsistencies, and finds what's missing. Ask for a list, not a rewrite.</a:t>
+            </a:r>
+            <a:endParaRPr lang="en-US" sz="2500" dirty="0"/>
+          </a:p>
+          <a:p>
+            <a:pPr marL="279400" indent="-279400">
+              <a:lnSpc>
+                <a:spcPct val="120000"/>
+              </a:lnSpc>
+              <a:spcAft>
+                <a:spcPts val="1200"/>
+              </a:spcAft>
+              <a:buSzPct val="100000"/>
+              <a:buChar char="•"/>
+            </a:pPr>
+            <a:r>
+              <a:rPr lang="en-US" sz="2500" dirty="0">
+                <a:solidFill>
+                  <a:srgbClr val="1C2530"/>
+                </a:solidFill>
+                <a:latin typeface="Futura" pitchFamily="34" charset="0"/>
+                <a:ea typeface="Futura" pitchFamily="34" charset="-122"/>
+                <a:cs typeface="Futura" pitchFamily="34" charset="-120"/>
+              </a:rPr>
+              <a:t>Before you use it: Verified? Disclosed? Yours?</a:t>
+            </a:r>
+            <a:endParaRPr lang="en-US" sz="2500" dirty="0"/>
+          </a:p>
+          <a:p>
+            <a:pPr marL="279400" indent="-279400">
+              <a:lnSpc>
+                <a:spcPct val="120000"/>
+              </a:lnSpc>
+              <a:spcAft>
+                <a:spcPts val="1200"/>
+              </a:spcAft>
+              <a:buSzPct val="100000"/>
+              <a:buChar char="•"/>
+            </a:pPr>
+            <a:r>
+              <a:rPr lang="en-US" sz="2500" dirty="0">
+                <a:solidFill>
+                  <a:srgbClr val="1C2530"/>
+                </a:solidFill>
+                <a:latin typeface="Futura" pitchFamily="34" charset="0"/>
+                <a:ea typeface="Futura" pitchFamily="34" charset="-122"/>
+                <a:cs typeface="Futura" pitchFamily="34" charset="-120"/>
+              </a:rPr>
+              <a:t>Before Core 3: save two recipes (one draft, one refine) and use one again next week.</a:t>
+            </a:r>
+            <a:endParaRPr lang="en-US" sz="2500" dirty="0"/>
+          </a:p>
+        </p:txBody>
+      </p:sp>
+      <p:sp>
+        <p:nvSpPr>
+          <p:cNvPr id="11" name="Text 8"/>
+          <p:cNvSpPr txBox="1"/>
+          <p:nvPr/>
+        </p:nvSpPr>
+        <p:spPr>
+          <a:xfrm>
+            <a:off x="1028700" y="7863840"/>
+            <a:ext cx="10972800" cy="365760"/>
+          </a:xfrm>
+          <a:prstGeom prst="rect">
+            <a:avLst/>
+          </a:prstGeom>
+          <a:noFill/>
+          <a:ln/>
+        </p:spPr>
+        <p:txBody>
+          <a:bodyPr wrap="square" lIns="0" tIns="0" rIns="0" bIns="0" rtlCol="0" anchor="t"/>
+          <a:lstStyle/>
+          <a:p>
+            <a:pPr indent="0" marL="0">
+              <a:buNone/>
+            </a:pPr>
+            <a:r>
+              <a:rPr lang="en-US" sz="2000" i="1" dirty="0">
+                <a:solidFill>
+                  <a:srgbClr val="5A6571"/>
+                </a:solidFill>
+                <a:latin typeface="Futura" pitchFamily="34" charset="0"/>
+                <a:ea typeface="Futura" pitchFamily="34" charset="-122"/>
+                <a:cs typeface="Futura" pitchFamily="34" charset="-120"/>
+              </a:rPr>
+              <a:t>In the Zoom chat: one thing you'll try this week.</a:t>
+            </a:r>
+            <a:endParaRPr lang="en-US" sz="2000" dirty="0"/>
+          </a:p>
+        </p:txBody>
+      </p:sp>
+    </p:spTree>
+  </p:cSld>
+  <p:clrMapOvr>
+    <a:masterClrMapping/>
+  </p:clrMapOvr>
+</p:sld>
+</file>
+
+<file path=ppt/slides/slide21.xml><?xml version="1.0" encoding="utf-8"?>
+<p:sld xmlns:a="http://schemas.openxmlformats.org/drawingml/2006/main" xmlns:r="http://schemas.openxmlformats.org/officeDocument/2006/relationships" xmlns:p="http://schemas.openxmlformats.org/presentationml/2006/main">
+  <p:cSld name="Slide 21">
     <p:bg>
       <p:bgPr>
         <a:solidFill>
@@ -6778,53 +7075,98 @@
       </p:sp>
       <p:sp>
         <p:nvSpPr>
-          <p:cNvPr id="9" name="Text 6"/>
-          <p:cNvSpPr txBox="1"/>
+          <p:cNvPr id="9" name="Shape 6"/>
+          <p:cNvSpPr/>
           <p:nvPr/>
         </p:nvSpPr>
         <p:spPr>
           <a:xfrm>
             <a:off x="1028700" y="2697480"/>
-            <a:ext cx="14904720" cy="914400"/>
-          </a:xfrm>
-          <a:prstGeom prst="rect">
-            <a:avLst/>
-          </a:prstGeom>
-          <a:noFill/>
-          <a:ln/>
-        </p:spPr>
-        <p:txBody>
-          <a:bodyPr wrap="square" lIns="0" tIns="0" rIns="0" bIns="0" rtlCol="0" anchor="t"/>
+            <a:ext cx="7863840" cy="4206240"/>
+          </a:xfrm>
+          <a:prstGeom prst="rect">
+            <a:avLst/>
+          </a:prstGeom>
+          <a:solidFill>
+            <a:srgbClr val="FFFFFF"/>
+          </a:solidFill>
+          <a:ln w="9525">
+            <a:solidFill>
+              <a:srgbClr val="D0D3D4"/>
+            </a:solidFill>
+            <a:prstDash val="solid"/>
+          </a:ln>
+        </p:spPr>
+      </p:sp>
+      <p:sp>
+        <p:nvSpPr>
+          <p:cNvPr id="10" name="Shape 7"/>
+          <p:cNvSpPr/>
+          <p:nvPr/>
+        </p:nvSpPr>
+        <p:spPr>
+          <a:xfrm>
+            <a:off x="1028700" y="2697480"/>
+            <a:ext cx="7863840" cy="777240"/>
+          </a:xfrm>
+          <a:prstGeom prst="rect">
+            <a:avLst/>
+          </a:prstGeom>
+          <a:solidFill>
+            <a:srgbClr val="006699"/>
+          </a:solidFill>
+          <a:ln/>
+        </p:spPr>
+      </p:sp>
+      <p:sp>
+        <p:nvSpPr>
+          <p:cNvPr id="11" name="Text 8"/>
+          <p:cNvSpPr txBox="1"/>
+          <p:nvPr/>
+        </p:nvSpPr>
+        <p:spPr>
+          <a:xfrm>
+            <a:off x="1348740" y="2697480"/>
+            <a:ext cx="7223760" cy="777240"/>
+          </a:xfrm>
+          <a:prstGeom prst="rect">
+            <a:avLst/>
+          </a:prstGeom>
+          <a:noFill/>
+          <a:ln/>
+        </p:spPr>
+        <p:txBody>
+          <a:bodyPr wrap="square" lIns="0" tIns="0" rIns="0" bIns="0" rtlCol="0" anchor="ctr"/>
           <a:lstStyle/>
           <a:p>
             <a:pPr indent="0" marL="0">
               <a:buNone/>
             </a:pPr>
             <a:r>
-              <a:rPr lang="en-US" sz="2800" dirty="0">
-                <a:solidFill>
-                  <a:srgbClr val="1C2530"/>
-                </a:solidFill>
-                <a:latin typeface="Futura" pitchFamily="34" charset="0"/>
-                <a:ea typeface="Futura" pitchFamily="34" charset="-122"/>
-                <a:cs typeface="Futura" pitchFamily="34" charset="-120"/>
-              </a:rPr>
-              <a:t>At the end of Core 1 you tried one weekly task with ChatGPT Edu. Turn to a neighbor:</a:t>
-            </a:r>
-            <a:endParaRPr lang="en-US" sz="2800" dirty="0"/>
-          </a:p>
-        </p:txBody>
-      </p:sp>
-      <p:sp>
-        <p:nvSpPr>
-          <p:cNvPr id="10" name="Text 7"/>
-          <p:cNvSpPr txBox="1"/>
-          <p:nvPr/>
-        </p:nvSpPr>
-        <p:spPr>
-          <a:xfrm>
-            <a:off x="1028700" y="3840480"/>
-            <a:ext cx="14904720" cy="2743200"/>
+              <a:rPr lang="en-US" sz="2900" b="1" dirty="0">
+                <a:solidFill>
+                  <a:srgbClr val="FFFFFF"/>
+                </a:solidFill>
+                <a:latin typeface="Georgia" pitchFamily="34" charset="0"/>
+                <a:ea typeface="Georgia" pitchFamily="34" charset="-122"/>
+                <a:cs typeface="Georgia" pitchFamily="34" charset="-120"/>
+              </a:rPr>
+              <a:t>In the Zoom chat, one line</a:t>
+            </a:r>
+            <a:endParaRPr lang="en-US" sz="2900" dirty="0"/>
+          </a:p>
+        </p:txBody>
+      </p:sp>
+      <p:sp>
+        <p:nvSpPr>
+          <p:cNvPr id="12" name="Text 9"/>
+          <p:cNvSpPr txBox="1"/>
+          <p:nvPr/>
+        </p:nvSpPr>
+        <p:spPr>
+          <a:xfrm>
+            <a:off x="1348740" y="3749040"/>
+            <a:ext cx="7223760" cy="2926080"/>
           </a:xfrm>
           <a:prstGeom prst="rect">
             <a:avLst/>
@@ -6847,7 +7189,7 @@
               <a:buChar char="•"/>
             </a:pPr>
             <a:r>
-              <a:rPr lang="en-US" sz="2500" dirty="0">
+              <a:rPr lang="en-US" sz="2400" dirty="0">
                 <a:solidFill>
                   <a:srgbClr val="1C2530"/>
                 </a:solidFill>
@@ -6855,9 +7197,9 @@
                 <a:ea typeface="Futura" pitchFamily="34" charset="-122"/>
                 <a:cs typeface="Futura" pitchFamily="34" charset="-120"/>
               </a:rPr>
-              <a:t>What did you try?</a:t>
-            </a:r>
-            <a:endParaRPr lang="en-US" sz="2500" dirty="0"/>
+              <a:t>What task did you try after Core 1?</a:t>
+            </a:r>
+            <a:endParaRPr lang="en-US" sz="2400" dirty="0"/>
           </a:p>
           <a:p>
             <a:pPr marL="279400" indent="-279400">
@@ -6871,7 +7213,7 @@
               <a:buChar char="•"/>
             </a:pPr>
             <a:r>
-              <a:rPr lang="en-US" sz="2500" dirty="0">
+              <a:rPr lang="en-US" sz="2400" dirty="0">
                 <a:solidFill>
                   <a:srgbClr val="1C2530"/>
                 </a:solidFill>
@@ -6879,9 +7221,9 @@
                 <a:ea typeface="Futura" pitchFamily="34" charset="-122"/>
                 <a:cs typeface="Futura" pitchFamily="34" charset="-120"/>
               </a:rPr>
-              <a:t>Did it save time? What did you have to fix?</a:t>
-            </a:r>
-            <a:endParaRPr lang="en-US" sz="2500" dirty="0"/>
+              <a:t>Did it help? What did you have to fix?</a:t>
+            </a:r>
+            <a:endParaRPr lang="en-US" sz="2400" dirty="0"/>
           </a:p>
           <a:p>
             <a:pPr marL="279400" indent="-279400">
@@ -6895,7 +7237,7 @@
               <a:buChar char="•"/>
             </a:pPr>
             <a:r>
-              <a:rPr lang="en-US" sz="2500" dirty="0">
+              <a:rPr lang="en-US" sz="2400" dirty="0">
                 <a:solidFill>
                   <a:srgbClr val="1C2530"/>
                 </a:solidFill>
@@ -6903,9 +7245,211 @@
                 <a:ea typeface="Futura" pitchFamily="34" charset="-122"/>
                 <a:cs typeface="Futura" pitchFamily="34" charset="-120"/>
               </a:rPr>
-              <a:t>Didn't get to it? Today is the day. Pick the task now.</a:t>
-            </a:r>
-            <a:endParaRPr lang="en-US" sz="2500" dirty="0"/>
+              <a:t>Didn't get to it? Type the task you'll try today.</a:t>
+            </a:r>
+            <a:endParaRPr lang="en-US" sz="2400" dirty="0"/>
+          </a:p>
+        </p:txBody>
+      </p:sp>
+      <p:sp>
+        <p:nvSpPr>
+          <p:cNvPr id="13" name="Shape 10"/>
+          <p:cNvSpPr/>
+          <p:nvPr/>
+        </p:nvSpPr>
+        <p:spPr>
+          <a:xfrm>
+            <a:off x="9395460" y="2697480"/>
+            <a:ext cx="7863840" cy="4206240"/>
+          </a:xfrm>
+          <a:prstGeom prst="rect">
+            <a:avLst/>
+          </a:prstGeom>
+          <a:solidFill>
+            <a:srgbClr val="FFFFFF"/>
+          </a:solidFill>
+          <a:ln w="9525">
+            <a:solidFill>
+              <a:srgbClr val="D0D3D4"/>
+            </a:solidFill>
+            <a:prstDash val="solid"/>
+          </a:ln>
+        </p:spPr>
+      </p:sp>
+      <p:sp>
+        <p:nvSpPr>
+          <p:cNvPr id="14" name="Shape 11"/>
+          <p:cNvSpPr/>
+          <p:nvPr/>
+        </p:nvSpPr>
+        <p:spPr>
+          <a:xfrm>
+            <a:off x="9395460" y="2697480"/>
+            <a:ext cx="7863840" cy="777240"/>
+          </a:xfrm>
+          <a:prstGeom prst="rect">
+            <a:avLst/>
+          </a:prstGeom>
+          <a:solidFill>
+            <a:srgbClr val="07294D"/>
+          </a:solidFill>
+          <a:ln/>
+        </p:spPr>
+      </p:sp>
+      <p:sp>
+        <p:nvSpPr>
+          <p:cNvPr id="15" name="Text 12"/>
+          <p:cNvSpPr txBox="1"/>
+          <p:nvPr/>
+        </p:nvSpPr>
+        <p:spPr>
+          <a:xfrm>
+            <a:off x="9715500" y="2697480"/>
+            <a:ext cx="7223760" cy="777240"/>
+          </a:xfrm>
+          <a:prstGeom prst="rect">
+            <a:avLst/>
+          </a:prstGeom>
+          <a:noFill/>
+          <a:ln/>
+        </p:spPr>
+        <p:txBody>
+          <a:bodyPr wrap="square" lIns="0" tIns="0" rIns="0" bIns="0" rtlCol="0" anchor="ctr"/>
+          <a:lstStyle/>
+          <a:p>
+            <a:pPr indent="0" marL="0">
+              <a:buNone/>
+            </a:pPr>
+            <a:r>
+              <a:rPr lang="en-US" sz="2900" b="1" dirty="0">
+                <a:solidFill>
+                  <a:srgbClr val="FFFFFF"/>
+                </a:solidFill>
+                <a:latin typeface="Georgia" pitchFamily="34" charset="0"/>
+                <a:ea typeface="Georgia" pitchFamily="34" charset="-122"/>
+                <a:cs typeface="Georgia" pitchFamily="34" charset="-120"/>
+              </a:rPr>
+              <a:t>How today works on Zoom</a:t>
+            </a:r>
+            <a:endParaRPr lang="en-US" sz="2900" dirty="0"/>
+          </a:p>
+        </p:txBody>
+      </p:sp>
+      <p:sp>
+        <p:nvSpPr>
+          <p:cNvPr id="16" name="Text 13"/>
+          <p:cNvSpPr txBox="1"/>
+          <p:nvPr/>
+        </p:nvSpPr>
+        <p:spPr>
+          <a:xfrm>
+            <a:off x="9715500" y="3749040"/>
+            <a:ext cx="7223760" cy="2926080"/>
+          </a:xfrm>
+          <a:prstGeom prst="rect">
+            <a:avLst/>
+          </a:prstGeom>
+          <a:noFill/>
+          <a:ln/>
+        </p:spPr>
+        <p:txBody>
+          <a:bodyPr wrap="square" lIns="0" tIns="0" rIns="0" bIns="0" rtlCol="0" anchor="t"/>
+          <a:lstStyle/>
+          <a:p>
+            <a:pPr marL="279400" indent="-279400">
+              <a:lnSpc>
+                <a:spcPct val="120000"/>
+              </a:lnSpc>
+              <a:spcAft>
+                <a:spcPts val="1200"/>
+              </a:spcAft>
+              <a:buSzPct val="100000"/>
+              <a:buChar char="•"/>
+            </a:pPr>
+            <a:r>
+              <a:rPr lang="en-US" sz="2400" dirty="0">
+                <a:solidFill>
+                  <a:srgbClr val="1C2530"/>
+                </a:solidFill>
+                <a:latin typeface="Futura" pitchFamily="34" charset="0"/>
+                <a:ea typeface="Futura" pitchFamily="34" charset="-122"/>
+                <a:cs typeface="Futura" pitchFamily="34" charset="-120"/>
+              </a:rPr>
+              <a:t>Put Zoom and your browser side by side.</a:t>
+            </a:r>
+            <a:endParaRPr lang="en-US" sz="2400" dirty="0"/>
+          </a:p>
+          <a:p>
+            <a:pPr marL="279400" indent="-279400">
+              <a:lnSpc>
+                <a:spcPct val="120000"/>
+              </a:lnSpc>
+              <a:spcAft>
+                <a:spcPts val="1200"/>
+              </a:spcAft>
+              <a:buSzPct val="100000"/>
+              <a:buChar char="•"/>
+            </a:pPr>
+            <a:r>
+              <a:rPr lang="en-US" sz="2400" dirty="0">
+                <a:solidFill>
+                  <a:srgbClr val="1C2530"/>
+                </a:solidFill>
+                <a:latin typeface="Futura" pitchFamily="34" charset="0"/>
+                <a:ea typeface="Futura" pitchFamily="34" charset="-122"/>
+                <a:cs typeface="Futura" pitchFamily="34" charset="-120"/>
+              </a:rPr>
+              <a:t>React with a thumbs-up when you finish a step.</a:t>
+            </a:r>
+            <a:endParaRPr lang="en-US" sz="2400" dirty="0"/>
+          </a:p>
+          <a:p>
+            <a:pPr marL="279400" indent="-279400">
+              <a:lnSpc>
+                <a:spcPct val="120000"/>
+              </a:lnSpc>
+              <a:spcAft>
+                <a:spcPts val="1200"/>
+              </a:spcAft>
+              <a:buSzPct val="100000"/>
+              <a:buChar char="•"/>
+            </a:pPr>
+            <a:r>
+              <a:rPr lang="en-US" sz="2400" dirty="0">
+                <a:solidFill>
+                  <a:srgbClr val="1C2530"/>
+                </a:solidFill>
+                <a:latin typeface="Futura" pitchFamily="34" charset="0"/>
+                <a:ea typeface="Futura" pitchFamily="34" charset="-122"/>
+                <a:cs typeface="Futura" pitchFamily="34" charset="-120"/>
+              </a:rPr>
+              <a:t>Stuck? Say so in the chat and we'll help.</a:t>
+            </a:r>
+            <a:endParaRPr lang="en-US" sz="2400" dirty="0"/>
+          </a:p>
+          <a:p>
+            <a:pPr marL="279400" indent="-279400">
+              <a:lnSpc>
+                <a:spcPct val="120000"/>
+              </a:lnSpc>
+              <a:spcAft>
+                <a:spcPts val="1200"/>
+              </a:spcAft>
+              <a:buSzPct val="100000"/>
+              <a:buChar char="•"/>
+            </a:pPr>
+            <a:r>
+              <a:rPr lang="en-US" sz="2400" dirty="0">
+                <a:solidFill>
+                  <a:srgbClr val="1C2530"/>
+                </a:solidFill>
+                <a:latin typeface="Futura" pitchFamily="34" charset="0"/>
+                <a:ea typeface="Futura" pitchFamily="34" charset="-122"/>
+                <a:cs typeface="Futura" pitchFamily="34" charset="-120"/>
+              </a:rPr>
+              <a:t>Demo file links are in the chat.</a:t>
+            </a:r>
+            <a:endParaRPr lang="en-US" sz="2400" dirty="0"/>
           </a:p>
         </p:txBody>
       </p:sp>
@@ -7013,7 +7557,7 @@
                 <a:ea typeface="Georgia" pitchFamily="34" charset="-122"/>
                 <a:cs typeface="Georgia" pitchFamily="34" charset="-120"/>
               </a:rPr>
-              <a:t>Where AI Fits</a:t>
+              <a:t>Plan First, Then Draft or Refine</a:t>
             </a:r>
             <a:endParaRPr lang="en-US" sz="7400" dirty="0"/>
           </a:p>
@@ -7072,7 +7616,7 @@
                 <a:ea typeface="Futura" pitchFamily="34" charset="-122"/>
                 <a:cs typeface="Futura" pitchFamily="34" charset="-120"/>
               </a:rPr>
-              <a:t>Which tasks to start with, and which tool to open.</a:t>
+              <a:t>Your plan comes before any AI draft. Then decide what AI should do with it.</a:t>
             </a:r>
             <a:endParaRPr lang="en-US" sz="2800" dirty="0"/>
           </a:p>
@@ -7222,668 +7766,30 @@
           <a:chExt cx="0" cy="0"/>
         </a:xfrm>
       </p:grpSpPr>
-      <p:sp>
-        <p:nvSpPr>
-          <p:cNvPr id="2" name="Text 0"/>
-          <p:cNvSpPr txBox="1"/>
-          <p:nvPr/>
-        </p:nvSpPr>
-        <p:spPr>
-          <a:xfrm>
-            <a:off x="1028700" y="868680"/>
-            <a:ext cx="16230600" cy="274320"/>
-          </a:xfrm>
-          <a:prstGeom prst="rect">
-            <a:avLst/>
-          </a:prstGeom>
-          <a:noFill/>
-          <a:ln/>
-        </p:spPr>
-        <p:txBody>
-          <a:bodyPr wrap="square" lIns="0" tIns="0" rIns="0" bIns="0" rtlCol="0" anchor="t"/>
-          <a:lstStyle/>
-          <a:p>
-            <a:pPr indent="0" marL="0">
-              <a:buNone/>
-            </a:pPr>
-            <a:r>
-              <a:rPr lang="en-US" sz="1800" b="1" spc="300" kern="0" dirty="0">
-                <a:solidFill>
-                  <a:srgbClr val="006699"/>
-                </a:solidFill>
-                <a:latin typeface="Futura" pitchFamily="34" charset="0"/>
-                <a:ea typeface="Futura" pitchFamily="34" charset="-122"/>
-                <a:cs typeface="Futura" pitchFamily="34" charset="-120"/>
-              </a:rPr>
-              <a:t>WHICH TOOL TO OPEN</a:t>
-            </a:r>
-            <a:endParaRPr lang="en-US" sz="1800" dirty="0"/>
-          </a:p>
-        </p:txBody>
-      </p:sp>
-      <p:sp>
-        <p:nvSpPr>
-          <p:cNvPr id="3" name="Text 1"/>
-          <p:cNvSpPr txBox="1"/>
-          <p:nvPr/>
-        </p:nvSpPr>
-        <p:spPr>
-          <a:xfrm>
-            <a:off x="1028700" y="1188720"/>
-            <a:ext cx="16230600" cy="822960"/>
-          </a:xfrm>
-          <a:prstGeom prst="rect">
-            <a:avLst/>
-          </a:prstGeom>
-          <a:noFill/>
-          <a:ln/>
-        </p:spPr>
-        <p:txBody>
-          <a:bodyPr wrap="square" lIns="0" tIns="0" rIns="0" bIns="0" rtlCol="0" anchor="ctr"/>
-          <a:lstStyle/>
-          <a:p>
-            <a:pPr indent="0" marL="0">
-              <a:buNone/>
-            </a:pPr>
-            <a:r>
-              <a:rPr lang="en-US" sz="5500" b="1" dirty="0">
-                <a:solidFill>
-                  <a:srgbClr val="07294D"/>
-                </a:solidFill>
-                <a:latin typeface="Georgia" pitchFamily="34" charset="0"/>
-                <a:ea typeface="Georgia" pitchFamily="34" charset="-122"/>
-                <a:cs typeface="Georgia" pitchFamily="34" charset="-120"/>
-              </a:rPr>
-              <a:t>Two Tools, Same Steps</a:t>
-            </a:r>
-            <a:endParaRPr lang="en-US" sz="5500" dirty="0"/>
-          </a:p>
-        </p:txBody>
-      </p:sp>
-      <p:sp>
-        <p:nvSpPr>
-          <p:cNvPr id="4" name="Shape 2"/>
-          <p:cNvSpPr/>
-          <p:nvPr/>
-        </p:nvSpPr>
-        <p:spPr>
-          <a:xfrm>
-            <a:off x="1028700" y="2103120"/>
-            <a:ext cx="777240" cy="73152"/>
-          </a:xfrm>
-          <a:prstGeom prst="rect">
-            <a:avLst/>
-          </a:prstGeom>
-          <a:solidFill>
-            <a:srgbClr val="FFC600"/>
-          </a:solidFill>
-          <a:ln/>
-        </p:spPr>
-      </p:sp>
-      <p:sp>
-        <p:nvSpPr>
-          <p:cNvPr id="5" name="Shape 3"/>
-          <p:cNvSpPr/>
-          <p:nvPr/>
-        </p:nvSpPr>
-        <p:spPr>
-          <a:xfrm>
-            <a:off x="1028700" y="9646920"/>
-            <a:ext cx="16230600" cy="0"/>
-          </a:xfrm>
-          <a:prstGeom prst="line">
-            <a:avLst/>
-          </a:prstGeom>
-          <a:noFill/>
-          <a:ln w="9525">
-            <a:solidFill>
-              <a:srgbClr val="D0D3D4"/>
-            </a:solidFill>
-            <a:prstDash val="solid"/>
-          </a:ln>
-        </p:spPr>
-      </p:sp>
-      <p:sp>
-        <p:nvSpPr>
-          <p:cNvPr id="6" name="Text 4"/>
-          <p:cNvSpPr txBox="1"/>
-          <p:nvPr/>
-        </p:nvSpPr>
-        <p:spPr>
-          <a:xfrm>
-            <a:off x="1028700" y="9784080"/>
-            <a:ext cx="7315200" cy="274320"/>
-          </a:xfrm>
-          <a:prstGeom prst="rect">
-            <a:avLst/>
-          </a:prstGeom>
-          <a:noFill/>
-          <a:ln/>
-        </p:spPr>
-        <p:txBody>
-          <a:bodyPr wrap="square" lIns="0" tIns="0" rIns="0" bIns="0" rtlCol="0" anchor="t"/>
-          <a:lstStyle/>
-          <a:p>
-            <a:pPr indent="0" marL="0">
-              <a:buNone/>
-            </a:pPr>
-            <a:r>
-              <a:rPr lang="en-US" sz="1400" b="1" dirty="0">
-                <a:solidFill>
-                  <a:srgbClr val="07294D"/>
-                </a:solidFill>
-                <a:latin typeface="Futura" pitchFamily="34" charset="0"/>
-                <a:ea typeface="Futura" pitchFamily="34" charset="-122"/>
-                <a:cs typeface="Futura" pitchFamily="34" charset="-120"/>
-              </a:rPr>
-              <a:t>Environmental &amp; Occupational Health</a:t>
-            </a:r>
-            <a:endParaRPr lang="en-US" sz="1400" dirty="0"/>
-          </a:p>
-        </p:txBody>
-      </p:sp>
-      <p:sp>
-        <p:nvSpPr>
-          <p:cNvPr id="7" name="Text 5"/>
-          <p:cNvSpPr txBox="1"/>
-          <p:nvPr/>
-        </p:nvSpPr>
-        <p:spPr>
-          <a:xfrm>
-            <a:off x="9944100" y="9784080"/>
-            <a:ext cx="7315200" cy="274320"/>
-          </a:xfrm>
-          <a:prstGeom prst="rect">
-            <a:avLst/>
-          </a:prstGeom>
-          <a:noFill/>
-          <a:ln/>
-        </p:spPr>
-        <p:txBody>
-          <a:bodyPr wrap="square" lIns="0" tIns="0" rIns="0" bIns="0" rtlCol="0" anchor="t"/>
-          <a:lstStyle/>
-          <a:p>
-            <a:pPr algn="r" indent="0" marL="0">
-              <a:buNone/>
-            </a:pPr>
-            <a:r>
-              <a:rPr lang="en-US" sz="1400" dirty="0">
-                <a:solidFill>
-                  <a:srgbClr val="5A6571"/>
-                </a:solidFill>
-                <a:latin typeface="Futura" pitchFamily="34" charset="0"/>
-                <a:ea typeface="Futura" pitchFamily="34" charset="-122"/>
-                <a:cs typeface="Futura" pitchFamily="34" charset="-120"/>
-              </a:rPr>
-              <a:t>Dornsife School of Public Health</a:t>
-            </a:r>
-            <a:endParaRPr lang="en-US" sz="1400" dirty="0"/>
-          </a:p>
-        </p:txBody>
-      </p:sp>
-      <p:sp>
-        <p:nvSpPr>
-          <p:cNvPr id="9" name="Shape 6"/>
-          <p:cNvSpPr/>
-          <p:nvPr/>
-        </p:nvSpPr>
-        <p:spPr>
-          <a:xfrm>
-            <a:off x="1028700" y="2697480"/>
-            <a:ext cx="5029200" cy="3566160"/>
-          </a:xfrm>
-          <a:prstGeom prst="rect">
-            <a:avLst/>
-          </a:prstGeom>
-          <a:solidFill>
-            <a:srgbClr val="FFFFFF"/>
-          </a:solidFill>
-          <a:ln w="9525">
-            <a:solidFill>
-              <a:srgbClr val="D0D3D4"/>
-            </a:solidFill>
-            <a:prstDash val="solid"/>
-          </a:ln>
-        </p:spPr>
-      </p:sp>
-      <p:sp>
-        <p:nvSpPr>
-          <p:cNvPr id="10" name="Shape 7"/>
-          <p:cNvSpPr/>
-          <p:nvPr/>
-        </p:nvSpPr>
-        <p:spPr>
-          <a:xfrm>
-            <a:off x="1028700" y="2697480"/>
-            <a:ext cx="5029200" cy="91440"/>
-          </a:xfrm>
-          <a:prstGeom prst="rect">
-            <a:avLst/>
-          </a:prstGeom>
-          <a:solidFill>
-            <a:srgbClr val="07294D"/>
-          </a:solidFill>
-          <a:ln/>
-        </p:spPr>
-      </p:sp>
-      <p:sp>
-        <p:nvSpPr>
-          <p:cNvPr id="11" name="Text 8"/>
-          <p:cNvSpPr txBox="1"/>
-          <p:nvPr/>
-        </p:nvSpPr>
-        <p:spPr>
-          <a:xfrm>
-            <a:off x="1394460" y="3017520"/>
-            <a:ext cx="4297680" cy="868680"/>
-          </a:xfrm>
-          <a:prstGeom prst="rect">
-            <a:avLst/>
-          </a:prstGeom>
-          <a:noFill/>
-          <a:ln/>
-        </p:spPr>
-        <p:txBody>
-          <a:bodyPr wrap="square" lIns="0" tIns="0" rIns="0" bIns="0" rtlCol="0" anchor="t">
-            <a:normAutofit/>
-          </a:bodyPr>
-          <a:lstStyle/>
-          <a:p>
-            <a:pPr indent="0" marL="0">
-              <a:buNone/>
-            </a:pPr>
-            <a:r>
-              <a:rPr lang="en-US" sz="2600" b="1" dirty="0">
-                <a:solidFill>
-                  <a:srgbClr val="07294D"/>
-                </a:solidFill>
-                <a:latin typeface="Georgia" pitchFamily="34" charset="0"/>
-                <a:ea typeface="Georgia" pitchFamily="34" charset="-122"/>
-                <a:cs typeface="Georgia" pitchFamily="34" charset="-120"/>
-              </a:rPr>
-              <a:t>Copilot Chat</a:t>
-            </a:r>
-            <a:endParaRPr lang="en-US" sz="2600" dirty="0"/>
-          </a:p>
-        </p:txBody>
-      </p:sp>
-      <p:sp>
-        <p:nvSpPr>
-          <p:cNvPr id="12" name="Text 9"/>
-          <p:cNvSpPr txBox="1"/>
-          <p:nvPr/>
-        </p:nvSpPr>
-        <p:spPr>
-          <a:xfrm>
-            <a:off x="1394460" y="3931920"/>
-            <a:ext cx="4297680" cy="2148840"/>
-          </a:xfrm>
-          <a:prstGeom prst="rect">
-            <a:avLst/>
-          </a:prstGeom>
-          <a:noFill/>
-          <a:ln/>
-        </p:spPr>
-        <p:txBody>
-          <a:bodyPr wrap="square" lIns="0" tIns="0" rIns="0" bIns="0" rtlCol="0" anchor="t"/>
-          <a:lstStyle/>
-          <a:p>
-            <a:pPr indent="0" marL="0">
-              <a:lnSpc>
-                <a:spcPct val="125000"/>
-              </a:lnSpc>
-              <a:buNone/>
-            </a:pPr>
-            <a:r>
-              <a:rPr lang="en-US" sz="2200" dirty="0">
-                <a:solidFill>
-                  <a:srgbClr val="5A6571"/>
-                </a:solidFill>
-                <a:latin typeface="Futura" pitchFamily="34" charset="0"/>
-                <a:ea typeface="Futura" pitchFamily="34" charset="-122"/>
-                <a:cs typeface="Futura" pitchFamily="34" charset="-120"/>
-              </a:rPr>
-              <a:t>m365.cloud.microsoft/chat, signed in with your Drexel account. Good for quick summaries and rewrites of Drexel documents and email.</a:t>
-            </a:r>
-            <a:endParaRPr lang="en-US" sz="2200" dirty="0"/>
-          </a:p>
-        </p:txBody>
-      </p:sp>
-      <p:sp>
-        <p:nvSpPr>
-          <p:cNvPr id="13" name="Shape 10"/>
-          <p:cNvSpPr/>
-          <p:nvPr/>
-        </p:nvSpPr>
-        <p:spPr>
-          <a:xfrm>
-            <a:off x="6629400" y="2697480"/>
-            <a:ext cx="5029200" cy="3566160"/>
-          </a:xfrm>
-          <a:prstGeom prst="rect">
-            <a:avLst/>
-          </a:prstGeom>
-          <a:solidFill>
-            <a:srgbClr val="FFFFFF"/>
-          </a:solidFill>
-          <a:ln w="9525">
-            <a:solidFill>
-              <a:srgbClr val="D0D3D4"/>
-            </a:solidFill>
-            <a:prstDash val="solid"/>
-          </a:ln>
-        </p:spPr>
-      </p:sp>
-      <p:sp>
-        <p:nvSpPr>
-          <p:cNvPr id="14" name="Shape 11"/>
-          <p:cNvSpPr/>
-          <p:nvPr/>
-        </p:nvSpPr>
-        <p:spPr>
-          <a:xfrm>
-            <a:off x="6629400" y="2697480"/>
-            <a:ext cx="5029200" cy="91440"/>
-          </a:xfrm>
-          <a:prstGeom prst="rect">
-            <a:avLst/>
-          </a:prstGeom>
-          <a:solidFill>
-            <a:srgbClr val="006699"/>
-          </a:solidFill>
-          <a:ln/>
-        </p:spPr>
-      </p:sp>
-      <p:sp>
-        <p:nvSpPr>
-          <p:cNvPr id="15" name="Text 12"/>
-          <p:cNvSpPr txBox="1"/>
-          <p:nvPr/>
-        </p:nvSpPr>
-        <p:spPr>
-          <a:xfrm>
-            <a:off x="6995160" y="3017520"/>
-            <a:ext cx="4297680" cy="868680"/>
-          </a:xfrm>
-          <a:prstGeom prst="rect">
-            <a:avLst/>
-          </a:prstGeom>
-          <a:noFill/>
-          <a:ln/>
-        </p:spPr>
-        <p:txBody>
-          <a:bodyPr wrap="square" lIns="0" tIns="0" rIns="0" bIns="0" rtlCol="0" anchor="t">
-            <a:normAutofit/>
-          </a:bodyPr>
-          <a:lstStyle/>
-          <a:p>
-            <a:pPr indent="0" marL="0">
-              <a:buNone/>
-            </a:pPr>
-            <a:r>
-              <a:rPr lang="en-US" sz="2600" b="1" dirty="0">
-                <a:solidFill>
-                  <a:srgbClr val="07294D"/>
-                </a:solidFill>
-                <a:latin typeface="Georgia" pitchFamily="34" charset="0"/>
-                <a:ea typeface="Georgia" pitchFamily="34" charset="-122"/>
-                <a:cs typeface="Georgia" pitchFamily="34" charset="-120"/>
-              </a:rPr>
-              <a:t>ChatGPT Edu</a:t>
-            </a:r>
-            <a:endParaRPr lang="en-US" sz="2600" dirty="0"/>
-          </a:p>
-        </p:txBody>
-      </p:sp>
-      <p:sp>
-        <p:nvSpPr>
-          <p:cNvPr id="16" name="Text 13"/>
-          <p:cNvSpPr txBox="1"/>
-          <p:nvPr/>
-        </p:nvSpPr>
-        <p:spPr>
-          <a:xfrm>
-            <a:off x="6995160" y="3931920"/>
-            <a:ext cx="4297680" cy="2148840"/>
-          </a:xfrm>
-          <a:prstGeom prst="rect">
-            <a:avLst/>
-          </a:prstGeom>
-          <a:noFill/>
-          <a:ln/>
-        </p:spPr>
-        <p:txBody>
-          <a:bodyPr wrap="square" lIns="0" tIns="0" rIns="0" bIns="0" rtlCol="0" anchor="t"/>
-          <a:lstStyle/>
-          <a:p>
-            <a:pPr indent="0" marL="0">
-              <a:lnSpc>
-                <a:spcPct val="125000"/>
-              </a:lnSpc>
-              <a:buNone/>
-            </a:pPr>
-            <a:r>
-              <a:rPr lang="en-US" sz="2200" dirty="0">
-                <a:solidFill>
-                  <a:srgbClr val="5A6571"/>
-                </a:solidFill>
-                <a:latin typeface="Futura" pitchFamily="34" charset="0"/>
-                <a:ea typeface="Futura" pitchFamily="34" charset="-122"/>
-                <a:cs typeface="Futura" pitchFamily="34" charset="-120"/>
-              </a:rPr>
-              <a:t>The Drexel workspace you used in Core 1. Good for longer drafting, going back and forth, and (in Core 3) saved assistants.</a:t>
-            </a:r>
-            <a:endParaRPr lang="en-US" sz="2200" dirty="0"/>
-          </a:p>
-        </p:txBody>
-      </p:sp>
-      <p:sp>
-        <p:nvSpPr>
-          <p:cNvPr id="17" name="Shape 14"/>
-          <p:cNvSpPr/>
-          <p:nvPr/>
-        </p:nvSpPr>
-        <p:spPr>
-          <a:xfrm>
-            <a:off x="12230100" y="2697480"/>
-            <a:ext cx="5029200" cy="3566160"/>
-          </a:xfrm>
-          <a:prstGeom prst="rect">
-            <a:avLst/>
-          </a:prstGeom>
-          <a:solidFill>
-            <a:srgbClr val="FFFFFF"/>
-          </a:solidFill>
-          <a:ln w="9525">
-            <a:solidFill>
-              <a:srgbClr val="D0D3D4"/>
-            </a:solidFill>
-            <a:prstDash val="solid"/>
-          </a:ln>
-        </p:spPr>
-      </p:sp>
-      <p:sp>
-        <p:nvSpPr>
-          <p:cNvPr id="18" name="Shape 15"/>
-          <p:cNvSpPr/>
-          <p:nvPr/>
-        </p:nvSpPr>
-        <p:spPr>
-          <a:xfrm>
-            <a:off x="12230100" y="2697480"/>
-            <a:ext cx="5029200" cy="91440"/>
-          </a:xfrm>
-          <a:prstGeom prst="rect">
-            <a:avLst/>
-          </a:prstGeom>
-          <a:solidFill>
-            <a:srgbClr val="FFC600"/>
-          </a:solidFill>
-          <a:ln/>
-        </p:spPr>
-      </p:sp>
-      <p:sp>
-        <p:nvSpPr>
-          <p:cNvPr id="19" name="Text 16"/>
-          <p:cNvSpPr txBox="1"/>
-          <p:nvPr/>
-        </p:nvSpPr>
-        <p:spPr>
-          <a:xfrm>
-            <a:off x="12595860" y="3017520"/>
-            <a:ext cx="4297680" cy="868680"/>
-          </a:xfrm>
-          <a:prstGeom prst="rect">
-            <a:avLst/>
-          </a:prstGeom>
-          <a:noFill/>
-          <a:ln/>
-        </p:spPr>
-        <p:txBody>
-          <a:bodyPr wrap="square" lIns="0" tIns="0" rIns="0" bIns="0" rtlCol="0" anchor="t">
-            <a:normAutofit/>
-          </a:bodyPr>
-          <a:lstStyle/>
-          <a:p>
-            <a:pPr indent="0" marL="0">
-              <a:buNone/>
-            </a:pPr>
-            <a:r>
-              <a:rPr lang="en-US" sz="2600" b="1" dirty="0">
-                <a:solidFill>
-                  <a:srgbClr val="07294D"/>
-                </a:solidFill>
-                <a:latin typeface="Georgia" pitchFamily="34" charset="0"/>
-                <a:ea typeface="Georgia" pitchFamily="34" charset="-122"/>
-                <a:cs typeface="Georgia" pitchFamily="34" charset="-120"/>
-              </a:rPr>
-              <a:t>Same Steps in Both</a:t>
-            </a:r>
-            <a:endParaRPr lang="en-US" sz="2600" dirty="0"/>
-          </a:p>
-        </p:txBody>
-      </p:sp>
-      <p:sp>
-        <p:nvSpPr>
-          <p:cNvPr id="20" name="Text 17"/>
-          <p:cNvSpPr txBox="1"/>
-          <p:nvPr/>
-        </p:nvSpPr>
-        <p:spPr>
-          <a:xfrm>
-            <a:off x="12595860" y="3931920"/>
-            <a:ext cx="4297680" cy="2148840"/>
-          </a:xfrm>
-          <a:prstGeom prst="rect">
-            <a:avLst/>
-          </a:prstGeom>
-          <a:noFill/>
-          <a:ln/>
-        </p:spPr>
-        <p:txBody>
-          <a:bodyPr wrap="square" lIns="0" tIns="0" rIns="0" bIns="0" rtlCol="0" anchor="t"/>
-          <a:lstStyle/>
-          <a:p>
-            <a:pPr indent="0" marL="0">
-              <a:lnSpc>
-                <a:spcPct val="125000"/>
-              </a:lnSpc>
-              <a:buNone/>
-            </a:pPr>
-            <a:r>
-              <a:rPr lang="en-US" sz="2200" dirty="0">
-                <a:solidFill>
-                  <a:srgbClr val="5A6571"/>
-                </a:solidFill>
-                <a:latin typeface="Futura" pitchFamily="34" charset="0"/>
-                <a:ea typeface="Futura" pitchFamily="34" charset="-122"/>
-                <a:cs typeface="Futura" pitchFamily="34" charset="-120"/>
-              </a:rPr>
-              <a:t>Paste the text, or upload the file with the + button. Ask. Check. Copy the answer back into your document.</a:t>
-            </a:r>
-            <a:endParaRPr lang="en-US" sz="2200" dirty="0"/>
-          </a:p>
-        </p:txBody>
-      </p:sp>
-      <p:sp>
-        <p:nvSpPr>
-          <p:cNvPr id="21" name="Shape 18"/>
-          <p:cNvSpPr/>
-          <p:nvPr/>
-        </p:nvSpPr>
-        <p:spPr>
-          <a:xfrm>
-            <a:off x="1028700" y="6675120"/>
-            <a:ext cx="16230600" cy="914400"/>
-          </a:xfrm>
-          <a:prstGeom prst="rect">
-            <a:avLst/>
-          </a:prstGeom>
-          <a:solidFill>
-            <a:srgbClr val="FFF8DB"/>
-          </a:solidFill>
-          <a:ln/>
-        </p:spPr>
-      </p:sp>
-      <p:sp>
-        <p:nvSpPr>
-          <p:cNvPr id="22" name="Shape 19"/>
-          <p:cNvSpPr/>
-          <p:nvPr/>
-        </p:nvSpPr>
-        <p:spPr>
-          <a:xfrm>
-            <a:off x="1028700" y="6675120"/>
-            <a:ext cx="82296" cy="914400"/>
-          </a:xfrm>
-          <a:prstGeom prst="rect">
-            <a:avLst/>
-          </a:prstGeom>
-          <a:solidFill>
-            <a:srgbClr val="FFC600"/>
-          </a:solidFill>
-          <a:ln/>
-        </p:spPr>
-      </p:sp>
-      <p:sp>
-        <p:nvSpPr>
-          <p:cNvPr id="23" name="Text 20"/>
-          <p:cNvSpPr txBox="1"/>
-          <p:nvPr/>
-        </p:nvSpPr>
-        <p:spPr>
-          <a:xfrm>
-            <a:off x="1348740" y="6675120"/>
-            <a:ext cx="15681960" cy="914400"/>
-          </a:xfrm>
-          <a:prstGeom prst="rect">
-            <a:avLst/>
-          </a:prstGeom>
-          <a:noFill/>
-          <a:ln/>
-        </p:spPr>
-        <p:txBody>
-          <a:bodyPr wrap="square" lIns="0" tIns="0" rIns="0" bIns="0" rtlCol="0" anchor="ctr"/>
-          <a:lstStyle/>
-          <a:p>
-            <a:pPr indent="0" marL="0">
-              <a:buNone/>
-            </a:pPr>
-            <a:r>
-              <a:rPr lang="en-US" sz="2400" b="1" dirty="0">
-                <a:solidFill>
-                  <a:srgbClr val="07294D"/>
-                </a:solidFill>
-                <a:latin typeface="Futura" pitchFamily="34" charset="0"/>
-                <a:ea typeface="Futura" pitchFamily="34" charset="-122"/>
-                <a:cs typeface="Futura" pitchFamily="34" charset="-120"/>
-              </a:rPr>
-              <a:t>No Copilot inside Word or Excel at Drexel. You don't need it: upload the file or paste the text, then copy the answer back.</a:t>
-            </a:r>
-            <a:endParaRPr lang="en-US" sz="2400" dirty="0"/>
-          </a:p>
-        </p:txBody>
-      </p:sp>
+      <p:pic>
+        <p:nvPicPr>
+          <p:cNvPr id="2" name="Image 0" descr="/private/tmp/claude-1279606903/-Users-daq26-Library-CloudStorage-OneDrive-DrexelUniversity-Anthropic-AI-for-UH-Course-workshop-website/f22b16b1-71f0-4e6b-b603-aa7f51f0b99e/scratchpad/w2img/s7.png">    </p:cNvPr>
+          <p:cNvPicPr>
+            <a:picLocks noChangeAspect="1"/>
+          </p:cNvPicPr>
+          <p:nvPr/>
+        </p:nvPicPr>
+        <p:blipFill>
+          <a:blip r:embed="rId1"/>
+          <a:stretch>
+            <a:fillRect/>
+          </a:stretch>
+        </p:blipFill>
+        <p:spPr>
+          <a:xfrm>
+            <a:off x="0" y="0"/>
+            <a:ext cx="18288000" cy="10287000"/>
+          </a:xfrm>
+          <a:prstGeom prst="rect">
+            <a:avLst/>
+          </a:prstGeom>
+        </p:spPr>
+      </p:pic>
     </p:spTree>
   </p:cSld>
   <p:clrMapOvr>
@@ -7949,7 +7855,7 @@
                 <a:ea typeface="Futura" pitchFamily="34" charset="-122"/>
                 <a:cs typeface="Futura" pitchFamily="34" charset="-120"/>
               </a:rPr>
-              <a:t>TOOLS &amp; DATA</a:t>
+              <a:t>WHICH TOOL TO OPEN</a:t>
             </a:r>
             <a:endParaRPr lang="en-US" sz="1800" dirty="0"/>
           </a:p>
@@ -7988,7 +7894,7 @@
                 <a:ea typeface="Georgia" pitchFamily="34" charset="-122"/>
                 <a:cs typeface="Georgia" pitchFamily="34" charset="-120"/>
               </a:rPr>
-              <a:t>Same Data Rule as Core 1</a:t>
+              <a:t>Two Tools, Same Steps</a:t>
             </a:r>
             <a:endParaRPr lang="en-US" sz="5500" dirty="0"/>
           </a:p>
@@ -8124,7 +8030,7 @@
         <p:spPr>
           <a:xfrm>
             <a:off x="1028700" y="2697480"/>
-            <a:ext cx="7863840" cy="4480560"/>
+            <a:ext cx="5029200" cy="3566160"/>
           </a:xfrm>
           <a:prstGeom prst="rect">
             <a:avLst/>
@@ -8149,13 +8055,13 @@
         <p:spPr>
           <a:xfrm>
             <a:off x="1028700" y="2697480"/>
-            <a:ext cx="7863840" cy="777240"/>
+            <a:ext cx="5029200" cy="91440"/>
           </a:xfrm>
           <a:prstGeom prst="rect">
             <a:avLst/>
           </a:prstGeom>
           <a:solidFill>
-            <a:srgbClr val="006699"/>
+            <a:srgbClr val="07294D"/>
           </a:solidFill>
           <a:ln/>
         </p:spPr>
@@ -8168,34 +8074,36 @@
         </p:nvSpPr>
         <p:spPr>
           <a:xfrm>
-            <a:off x="1348740" y="2697480"/>
-            <a:ext cx="7223760" cy="777240"/>
-          </a:xfrm>
-          <a:prstGeom prst="rect">
-            <a:avLst/>
-          </a:prstGeom>
-          <a:noFill/>
-          <a:ln/>
-        </p:spPr>
-        <p:txBody>
-          <a:bodyPr wrap="square" lIns="0" tIns="0" rIns="0" bIns="0" rtlCol="0" anchor="ctr"/>
+            <a:off x="1394460" y="3017520"/>
+            <a:ext cx="4297680" cy="868680"/>
+          </a:xfrm>
+          <a:prstGeom prst="rect">
+            <a:avLst/>
+          </a:prstGeom>
+          <a:noFill/>
+          <a:ln/>
+        </p:spPr>
+        <p:txBody>
+          <a:bodyPr wrap="square" lIns="0" tIns="0" rIns="0" bIns="0" rtlCol="0" anchor="t">
+            <a:normAutofit/>
+          </a:bodyPr>
           <a:lstStyle/>
           <a:p>
             <a:pPr indent="0" marL="0">
               <a:buNone/>
             </a:pPr>
             <a:r>
-              <a:rPr lang="en-US" sz="2900" b="1" dirty="0">
-                <a:solidFill>
-                  <a:srgbClr val="FFFFFF"/>
+              <a:rPr lang="en-US" sz="2600" b="1" dirty="0">
+                <a:solidFill>
+                  <a:srgbClr val="07294D"/>
                 </a:solidFill>
                 <a:latin typeface="Georgia" pitchFamily="34" charset="0"/>
                 <a:ea typeface="Georgia" pitchFamily="34" charset="-122"/>
                 <a:cs typeface="Georgia" pitchFamily="34" charset="-120"/>
               </a:rPr>
-              <a:t>Fine to use</a:t>
-            </a:r>
-            <a:endParaRPr lang="en-US" sz="2900" dirty="0"/>
+              <a:t>Copilot Chat</a:t>
+            </a:r>
+            <a:endParaRPr lang="en-US" sz="2600" dirty="0"/>
           </a:p>
         </p:txBody>
       </p:sp>
@@ -8207,8 +8115,8 @@
         </p:nvSpPr>
         <p:spPr>
           <a:xfrm>
-            <a:off x="1348740" y="3749040"/>
-            <a:ext cx="7223760" cy="3200400"/>
+            <a:off x="1394460" y="3931920"/>
+            <a:ext cx="4297680" cy="2148840"/>
           </a:xfrm>
           <a:prstGeom prst="rect">
             <a:avLst/>
@@ -8220,100 +8128,24 @@
           <a:bodyPr wrap="square" lIns="0" tIns="0" rIns="0" bIns="0" rtlCol="0" anchor="t"/>
           <a:lstStyle/>
           <a:p>
-            <a:pPr marL="279400" indent="-279400">
+            <a:pPr indent="0" marL="0">
               <a:lnSpc>
-                <a:spcPct val="120000"/>
+                <a:spcPct val="125000"/>
               </a:lnSpc>
-              <a:spcAft>
-                <a:spcPts val="1200"/>
-              </a:spcAft>
-              <a:buSzPct val="100000"/>
-              <a:buChar char="•"/>
-            </a:pPr>
-            <a:r>
-              <a:rPr lang="en-US" sz="2400" dirty="0">
-                <a:solidFill>
-                  <a:srgbClr val="1C2530"/>
+              <a:buNone/>
+            </a:pPr>
+            <a:r>
+              <a:rPr lang="en-US" sz="2200" dirty="0">
+                <a:solidFill>
+                  <a:srgbClr val="5A6571"/>
                 </a:solidFill>
                 <a:latin typeface="Futura" pitchFamily="34" charset="0"/>
                 <a:ea typeface="Futura" pitchFamily="34" charset="-122"/>
                 <a:cs typeface="Futura" pitchFamily="34" charset="-120"/>
               </a:rPr>
-              <a:t>Your own drafts, notes, and announcements</a:t>
-            </a:r>
-            <a:endParaRPr lang="en-US" sz="2400" dirty="0"/>
-          </a:p>
-          <a:p>
-            <a:pPr marL="279400" indent="-279400">
-              <a:lnSpc>
-                <a:spcPct val="120000"/>
-              </a:lnSpc>
-              <a:spcAft>
-                <a:spcPts val="1200"/>
-              </a:spcAft>
-              <a:buSzPct val="100000"/>
-              <a:buChar char="•"/>
-            </a:pPr>
-            <a:r>
-              <a:rPr lang="en-US" sz="2400" dirty="0">
-                <a:solidFill>
-                  <a:srgbClr val="1C2530"/>
-                </a:solidFill>
-                <a:latin typeface="Futura" pitchFamily="34" charset="0"/>
-                <a:ea typeface="Futura" pitchFamily="34" charset="-122"/>
-                <a:cs typeface="Futura" pitchFamily="34" charset="-120"/>
-              </a:rPr>
-              <a:t>Committee and project email without sensitive details</a:t>
-            </a:r>
-            <a:endParaRPr lang="en-US" sz="2400" dirty="0"/>
-          </a:p>
-          <a:p>
-            <a:pPr marL="279400" indent="-279400">
-              <a:lnSpc>
-                <a:spcPct val="120000"/>
-              </a:lnSpc>
-              <a:spcAft>
-                <a:spcPts val="1200"/>
-              </a:spcAft>
-              <a:buSzPct val="100000"/>
-              <a:buChar char="•"/>
-            </a:pPr>
-            <a:r>
-              <a:rPr lang="en-US" sz="2400" dirty="0">
-                <a:solidFill>
-                  <a:srgbClr val="1C2530"/>
-                </a:solidFill>
-                <a:latin typeface="Futura" pitchFamily="34" charset="0"/>
-                <a:ea typeface="Futura" pitchFamily="34" charset="-122"/>
-                <a:cs typeface="Futura" pitchFamily="34" charset="-120"/>
-              </a:rPr>
-              <a:t>Public documents and published papers</a:t>
-            </a:r>
-            <a:endParaRPr lang="en-US" sz="2400" dirty="0"/>
-          </a:p>
-          <a:p>
-            <a:pPr marL="279400" indent="-279400">
-              <a:lnSpc>
-                <a:spcPct val="120000"/>
-              </a:lnSpc>
-              <a:spcAft>
-                <a:spcPts val="1200"/>
-              </a:spcAft>
-              <a:buSzPct val="100000"/>
-              <a:buChar char="•"/>
-            </a:pPr>
-            <a:r>
-              <a:rPr lang="en-US" sz="2400" dirty="0">
-                <a:solidFill>
-                  <a:srgbClr val="1C2530"/>
-                </a:solidFill>
-                <a:latin typeface="Futura" pitchFamily="34" charset="0"/>
-                <a:ea typeface="Futura" pitchFamily="34" charset="-122"/>
-                <a:cs typeface="Futura" pitchFamily="34" charset="-120"/>
-              </a:rPr>
-              <a:t>Made-up versions of anything sensitive</a:t>
-            </a:r>
-            <a:endParaRPr lang="en-US" sz="2400" dirty="0"/>
+              <a:t>m365.cloud.microsoft/chat, signed in with your Drexel account. Good for quick summaries and edits of Drexel documents and email.</a:t>
+            </a:r>
+            <a:endParaRPr lang="en-US" sz="2200" dirty="0"/>
           </a:p>
         </p:txBody>
       </p:sp>
@@ -8325,8 +8157,8 @@
         </p:nvSpPr>
         <p:spPr>
           <a:xfrm>
-            <a:off x="9395460" y="2697480"/>
-            <a:ext cx="7863840" cy="4480560"/>
+            <a:off x="6629400" y="2697480"/>
+            <a:ext cx="5029200" cy="3566160"/>
           </a:xfrm>
           <a:prstGeom prst="rect">
             <a:avLst/>
@@ -8350,14 +8182,14 @@
         </p:nvSpPr>
         <p:spPr>
           <a:xfrm>
-            <a:off x="9395460" y="2697480"/>
-            <a:ext cx="7863840" cy="777240"/>
+            <a:off x="6629400" y="2697480"/>
+            <a:ext cx="5029200" cy="91440"/>
           </a:xfrm>
           <a:prstGeom prst="rect">
             <a:avLst/>
           </a:prstGeom>
           <a:solidFill>
-            <a:srgbClr val="971B2F"/>
+            <a:srgbClr val="006699"/>
           </a:solidFill>
           <a:ln/>
         </p:spPr>
@@ -8370,34 +8202,36 @@
         </p:nvSpPr>
         <p:spPr>
           <a:xfrm>
-            <a:off x="9715500" y="2697480"/>
-            <a:ext cx="7223760" cy="777240"/>
-          </a:xfrm>
-          <a:prstGeom prst="rect">
-            <a:avLst/>
-          </a:prstGeom>
-          <a:noFill/>
-          <a:ln/>
-        </p:spPr>
-        <p:txBody>
-          <a:bodyPr wrap="square" lIns="0" tIns="0" rIns="0" bIns="0" rtlCol="0" anchor="ctr"/>
+            <a:off x="6995160" y="3017520"/>
+            <a:ext cx="4297680" cy="868680"/>
+          </a:xfrm>
+          <a:prstGeom prst="rect">
+            <a:avLst/>
+          </a:prstGeom>
+          <a:noFill/>
+          <a:ln/>
+        </p:spPr>
+        <p:txBody>
+          <a:bodyPr wrap="square" lIns="0" tIns="0" rIns="0" bIns="0" rtlCol="0" anchor="t">
+            <a:normAutofit/>
+          </a:bodyPr>
           <a:lstStyle/>
           <a:p>
             <a:pPr indent="0" marL="0">
               <a:buNone/>
             </a:pPr>
             <a:r>
-              <a:rPr lang="en-US" sz="2900" b="1" dirty="0">
-                <a:solidFill>
-                  <a:srgbClr val="FFFFFF"/>
+              <a:rPr lang="en-US" sz="2600" b="1" dirty="0">
+                <a:solidFill>
+                  <a:srgbClr val="07294D"/>
                 </a:solidFill>
                 <a:latin typeface="Georgia" pitchFamily="34" charset="0"/>
                 <a:ea typeface="Georgia" pitchFamily="34" charset="-122"/>
                 <a:cs typeface="Georgia" pitchFamily="34" charset="-120"/>
               </a:rPr>
-              <a:t>Never paste in</a:t>
-            </a:r>
-            <a:endParaRPr lang="en-US" sz="2900" dirty="0"/>
+              <a:t>ChatGPT Edu</a:t>
+            </a:r>
+            <a:endParaRPr lang="en-US" sz="2600" dirty="0"/>
           </a:p>
         </p:txBody>
       </p:sp>
@@ -8409,8 +8243,8 @@
         </p:nvSpPr>
         <p:spPr>
           <a:xfrm>
-            <a:off x="9715500" y="3749040"/>
-            <a:ext cx="7223760" cy="3200400"/>
+            <a:off x="6995160" y="3931920"/>
+            <a:ext cx="4297680" cy="2148840"/>
           </a:xfrm>
           <a:prstGeom prst="rect">
             <a:avLst/>
@@ -8422,98 +8256,229 @@
           <a:bodyPr wrap="square" lIns="0" tIns="0" rIns="0" bIns="0" rtlCol="0" anchor="t"/>
           <a:lstStyle/>
           <a:p>
-            <a:pPr marL="279400" indent="-279400">
+            <a:pPr indent="0" marL="0">
               <a:lnSpc>
-                <a:spcPct val="120000"/>
+                <a:spcPct val="125000"/>
               </a:lnSpc>
-              <a:spcAft>
-                <a:spcPts val="1200"/>
-              </a:spcAft>
-              <a:buSzPct val="100000"/>
-              <a:buChar char="•"/>
-            </a:pPr>
-            <a:r>
-              <a:rPr lang="en-US" sz="2400" dirty="0">
-                <a:solidFill>
-                  <a:srgbClr val="1C2530"/>
+              <a:buNone/>
+            </a:pPr>
+            <a:r>
+              <a:rPr lang="en-US" sz="2200" dirty="0">
+                <a:solidFill>
+                  <a:srgbClr val="5A6571"/>
                 </a:solidFill>
                 <a:latin typeface="Futura" pitchFamily="34" charset="0"/>
                 <a:ea typeface="Futura" pitchFamily="34" charset="-122"/>
                 <a:cs typeface="Futura" pitchFamily="34" charset="-120"/>
               </a:rPr>
-              <a:t>Health information about a person</a:t>
-            </a:r>
-            <a:endParaRPr lang="en-US" sz="2400" dirty="0"/>
-          </a:p>
-          <a:p>
-            <a:pPr marL="279400" indent="-279400">
+              <a:t>The Drexel workspace you used in Core 1. Good for longer drafting, going back and forth, and (in Core 3) saved assistants.</a:t>
+            </a:r>
+            <a:endParaRPr lang="en-US" sz="2200" dirty="0"/>
+          </a:p>
+        </p:txBody>
+      </p:sp>
+      <p:sp>
+        <p:nvSpPr>
+          <p:cNvPr id="17" name="Shape 14"/>
+          <p:cNvSpPr/>
+          <p:nvPr/>
+        </p:nvSpPr>
+        <p:spPr>
+          <a:xfrm>
+            <a:off x="12230100" y="2697480"/>
+            <a:ext cx="5029200" cy="3566160"/>
+          </a:xfrm>
+          <a:prstGeom prst="rect">
+            <a:avLst/>
+          </a:prstGeom>
+          <a:solidFill>
+            <a:srgbClr val="FFFFFF"/>
+          </a:solidFill>
+          <a:ln w="9525">
+            <a:solidFill>
+              <a:srgbClr val="D0D3D4"/>
+            </a:solidFill>
+            <a:prstDash val="solid"/>
+          </a:ln>
+        </p:spPr>
+      </p:sp>
+      <p:sp>
+        <p:nvSpPr>
+          <p:cNvPr id="18" name="Shape 15"/>
+          <p:cNvSpPr/>
+          <p:nvPr/>
+        </p:nvSpPr>
+        <p:spPr>
+          <a:xfrm>
+            <a:off x="12230100" y="2697480"/>
+            <a:ext cx="5029200" cy="91440"/>
+          </a:xfrm>
+          <a:prstGeom prst="rect">
+            <a:avLst/>
+          </a:prstGeom>
+          <a:solidFill>
+            <a:srgbClr val="FFC600"/>
+          </a:solidFill>
+          <a:ln/>
+        </p:spPr>
+      </p:sp>
+      <p:sp>
+        <p:nvSpPr>
+          <p:cNvPr id="19" name="Text 16"/>
+          <p:cNvSpPr txBox="1"/>
+          <p:nvPr/>
+        </p:nvSpPr>
+        <p:spPr>
+          <a:xfrm>
+            <a:off x="12595860" y="3017520"/>
+            <a:ext cx="4297680" cy="868680"/>
+          </a:xfrm>
+          <a:prstGeom prst="rect">
+            <a:avLst/>
+          </a:prstGeom>
+          <a:noFill/>
+          <a:ln/>
+        </p:spPr>
+        <p:txBody>
+          <a:bodyPr wrap="square" lIns="0" tIns="0" rIns="0" bIns="0" rtlCol="0" anchor="t">
+            <a:normAutofit/>
+          </a:bodyPr>
+          <a:lstStyle/>
+          <a:p>
+            <a:pPr indent="0" marL="0">
+              <a:buNone/>
+            </a:pPr>
+            <a:r>
+              <a:rPr lang="en-US" sz="2600" b="1" dirty="0">
+                <a:solidFill>
+                  <a:srgbClr val="07294D"/>
+                </a:solidFill>
+                <a:latin typeface="Georgia" pitchFamily="34" charset="0"/>
+                <a:ea typeface="Georgia" pitchFamily="34" charset="-122"/>
+                <a:cs typeface="Georgia" pitchFamily="34" charset="-120"/>
+              </a:rPr>
+              <a:t>Same Steps in Both</a:t>
+            </a:r>
+            <a:endParaRPr lang="en-US" sz="2600" dirty="0"/>
+          </a:p>
+        </p:txBody>
+      </p:sp>
+      <p:sp>
+        <p:nvSpPr>
+          <p:cNvPr id="20" name="Text 17"/>
+          <p:cNvSpPr txBox="1"/>
+          <p:nvPr/>
+        </p:nvSpPr>
+        <p:spPr>
+          <a:xfrm>
+            <a:off x="12595860" y="3931920"/>
+            <a:ext cx="4297680" cy="2148840"/>
+          </a:xfrm>
+          <a:prstGeom prst="rect">
+            <a:avLst/>
+          </a:prstGeom>
+          <a:noFill/>
+          <a:ln/>
+        </p:spPr>
+        <p:txBody>
+          <a:bodyPr wrap="square" lIns="0" tIns="0" rIns="0" bIns="0" rtlCol="0" anchor="t"/>
+          <a:lstStyle/>
+          <a:p>
+            <a:pPr indent="0" marL="0">
               <a:lnSpc>
-                <a:spcPct val="120000"/>
+                <a:spcPct val="125000"/>
               </a:lnSpc>
-              <a:spcAft>
-                <a:spcPts val="1200"/>
-              </a:spcAft>
-              <a:buSzPct val="100000"/>
-              <a:buChar char="•"/>
-            </a:pPr>
-            <a:r>
-              <a:rPr lang="en-US" sz="2400" dirty="0">
-                <a:solidFill>
-                  <a:srgbClr val="1C2530"/>
+              <a:buNone/>
+            </a:pPr>
+            <a:r>
+              <a:rPr lang="en-US" sz="2200" dirty="0">
+                <a:solidFill>
+                  <a:srgbClr val="5A6571"/>
                 </a:solidFill>
                 <a:latin typeface="Futura" pitchFamily="34" charset="0"/>
                 <a:ea typeface="Futura" pitchFamily="34" charset="-122"/>
                 <a:cs typeface="Futura" pitchFamily="34" charset="-120"/>
               </a:rPr>
-              <a:t>Student records or Social Security numbers</a:t>
-            </a:r>
-            <a:endParaRPr lang="en-US" sz="2400" dirty="0"/>
-          </a:p>
-          <a:p>
-            <a:pPr marL="279400" indent="-279400">
-              <a:lnSpc>
-                <a:spcPct val="120000"/>
-              </a:lnSpc>
-              <a:spcAft>
-                <a:spcPts val="1200"/>
-              </a:spcAft>
-              <a:buSzPct val="100000"/>
-              <a:buChar char="•"/>
-            </a:pPr>
-            <a:r>
-              <a:rPr lang="en-US" sz="2400" dirty="0">
-                <a:solidFill>
-                  <a:srgbClr val="1C2530"/>
+              <a:t>Paste the text, or upload the file with the + button. Ask. Check. Copy the answer back into your document.</a:t>
+            </a:r>
+            <a:endParaRPr lang="en-US" sz="2200" dirty="0"/>
+          </a:p>
+        </p:txBody>
+      </p:sp>
+      <p:sp>
+        <p:nvSpPr>
+          <p:cNvPr id="21" name="Shape 18"/>
+          <p:cNvSpPr/>
+          <p:nvPr/>
+        </p:nvSpPr>
+        <p:spPr>
+          <a:xfrm>
+            <a:off x="1028700" y="6675120"/>
+            <a:ext cx="16230600" cy="914400"/>
+          </a:xfrm>
+          <a:prstGeom prst="rect">
+            <a:avLst/>
+          </a:prstGeom>
+          <a:solidFill>
+            <a:srgbClr val="FFF8DB"/>
+          </a:solidFill>
+          <a:ln/>
+        </p:spPr>
+      </p:sp>
+      <p:sp>
+        <p:nvSpPr>
+          <p:cNvPr id="22" name="Shape 19"/>
+          <p:cNvSpPr/>
+          <p:nvPr/>
+        </p:nvSpPr>
+        <p:spPr>
+          <a:xfrm>
+            <a:off x="1028700" y="6675120"/>
+            <a:ext cx="82296" cy="914400"/>
+          </a:xfrm>
+          <a:prstGeom prst="rect">
+            <a:avLst/>
+          </a:prstGeom>
+          <a:solidFill>
+            <a:srgbClr val="FFC600"/>
+          </a:solidFill>
+          <a:ln/>
+        </p:spPr>
+      </p:sp>
+      <p:sp>
+        <p:nvSpPr>
+          <p:cNvPr id="23" name="Text 20"/>
+          <p:cNvSpPr txBox="1"/>
+          <p:nvPr/>
+        </p:nvSpPr>
+        <p:spPr>
+          <a:xfrm>
+            <a:off x="1348740" y="6675120"/>
+            <a:ext cx="15681960" cy="914400"/>
+          </a:xfrm>
+          <a:prstGeom prst="rect">
+            <a:avLst/>
+          </a:prstGeom>
+          <a:noFill/>
+          <a:ln/>
+        </p:spPr>
+        <p:txBody>
+          <a:bodyPr wrap="square" lIns="0" tIns="0" rIns="0" bIns="0" rtlCol="0" anchor="ctr"/>
+          <a:lstStyle/>
+          <a:p>
+            <a:pPr indent="0" marL="0">
+              <a:buNone/>
+            </a:pPr>
+            <a:r>
+              <a:rPr lang="en-US" sz="2400" b="1" dirty="0">
+                <a:solidFill>
+                  <a:srgbClr val="07294D"/>
                 </a:solidFill>
                 <a:latin typeface="Futura" pitchFamily="34" charset="0"/>
                 <a:ea typeface="Futura" pitchFamily="34" charset="-122"/>
                 <a:cs typeface="Futura" pitchFamily="34" charset="-120"/>
               </a:rPr>
-              <a:t>Identifiable research data</a:t>
-            </a:r>
-            <a:endParaRPr lang="en-US" sz="2400" dirty="0"/>
-          </a:p>
-          <a:p>
-            <a:pPr marL="279400" indent="-279400">
-              <a:lnSpc>
-                <a:spcPct val="120000"/>
-              </a:lnSpc>
-              <a:spcAft>
-                <a:spcPts val="1200"/>
-              </a:spcAft>
-              <a:buSzPct val="100000"/>
-              <a:buChar char="•"/>
-            </a:pPr>
-            <a:r>
-              <a:rPr lang="en-US" sz="2400" dirty="0">
-                <a:solidFill>
-                  <a:srgbClr val="1C2530"/>
-                </a:solidFill>
-                <a:latin typeface="Futura" pitchFamily="34" charset="0"/>
-                <a:ea typeface="Futura" pitchFamily="34" charset="-122"/>
-                <a:cs typeface="Futura" pitchFamily="34" charset="-120"/>
-              </a:rPr>
-              <a:t>When in doubt, leave it out or make the details up</a:t>
+              <a:t>No Copilot inside Word or Excel at Drexel. You don't need it: upload the file or paste the text, then copy the answer back.</a:t>
             </a:r>
             <a:endParaRPr lang="en-US" sz="2400" dirty="0"/>
           </a:p>
@@ -8533,7 +8498,7 @@
     <p:bg>
       <p:bgPr>
         <a:solidFill>
-          <a:srgbClr val="07294D"/>
+          <a:srgbClr val="FFFFFF"/>
         </a:solidFill>
       </p:bgPr>
     </p:bg>
@@ -8559,7 +8524,7 @@
         </p:nvSpPr>
         <p:spPr>
           <a:xfrm>
-            <a:off x="1028700" y="3383280"/>
+            <a:off x="1028700" y="868680"/>
             <a:ext cx="16230600" cy="274320"/>
           </a:xfrm>
           <a:prstGeom prst="rect">
@@ -8578,13 +8543,13 @@
             <a:r>
               <a:rPr lang="en-US" sz="1800" b="1" spc="300" kern="0" dirty="0">
                 <a:solidFill>
-                  <a:srgbClr val="FFC600"/>
+                  <a:srgbClr val="006699"/>
                 </a:solidFill>
                 <a:latin typeface="Futura" pitchFamily="34" charset="0"/>
                 <a:ea typeface="Futura" pitchFamily="34" charset="-122"/>
                 <a:cs typeface="Futura" pitchFamily="34" charset="-120"/>
               </a:rPr>
-              <a:t>SECTION 02</a:t>
+              <a:t>TOOLS &amp; DATA</a:t>
             </a:r>
             <a:endParaRPr lang="en-US" sz="1800" dirty="0"/>
           </a:p>
@@ -8598,8 +8563,8 @@
         </p:nvSpPr>
         <p:spPr>
           <a:xfrm>
-            <a:off x="1028700" y="3749040"/>
-            <a:ext cx="16230600" cy="1097280"/>
+            <a:off x="1028700" y="1188720"/>
+            <a:ext cx="16230600" cy="822960"/>
           </a:xfrm>
           <a:prstGeom prst="rect">
             <a:avLst/>
@@ -8615,17 +8580,17 @@
               <a:buNone/>
             </a:pPr>
             <a:r>
-              <a:rPr lang="en-US" sz="7400" b="1" dirty="0">
-                <a:solidFill>
-                  <a:srgbClr val="FFFFFF"/>
+              <a:rPr lang="en-US" sz="5500" b="1" dirty="0">
+                <a:solidFill>
+                  <a:srgbClr val="07294D"/>
                 </a:solidFill>
                 <a:latin typeface="Georgia" pitchFamily="34" charset="0"/>
                 <a:ea typeface="Georgia" pitchFamily="34" charset="-122"/>
                 <a:cs typeface="Georgia" pitchFamily="34" charset="-120"/>
               </a:rPr>
-              <a:t>Check Before You Use It</a:t>
-            </a:r>
-            <a:endParaRPr lang="en-US" sz="7400" dirty="0"/>
+              <a:t>Same Data Rule as Core 1</a:t>
+            </a:r>
+            <a:endParaRPr lang="en-US" sz="5500" dirty="0"/>
           </a:p>
         </p:txBody>
       </p:sp>
@@ -8637,7 +8602,7 @@
         </p:nvSpPr>
         <p:spPr>
           <a:xfrm>
-            <a:off x="1028700" y="5074920"/>
+            <a:off x="1028700" y="2103120"/>
             <a:ext cx="777240" cy="73152"/>
           </a:xfrm>
           <a:prstGeom prst="rect">
@@ -8651,14 +8616,37 @@
       </p:sp>
       <p:sp>
         <p:nvSpPr>
-          <p:cNvPr id="5" name="Text 3"/>
-          <p:cNvSpPr txBox="1"/>
-          <p:nvPr/>
-        </p:nvSpPr>
-        <p:spPr>
-          <a:xfrm>
-            <a:off x="1028700" y="5486400"/>
-            <a:ext cx="13258800" cy="914400"/>
+          <p:cNvPr id="5" name="Shape 3"/>
+          <p:cNvSpPr/>
+          <p:nvPr/>
+        </p:nvSpPr>
+        <p:spPr>
+          <a:xfrm>
+            <a:off x="1028700" y="9646920"/>
+            <a:ext cx="16230600" cy="0"/>
+          </a:xfrm>
+          <a:prstGeom prst="line">
+            <a:avLst/>
+          </a:prstGeom>
+          <a:noFill/>
+          <a:ln w="9525">
+            <a:solidFill>
+              <a:srgbClr val="D0D3D4"/>
+            </a:solidFill>
+            <a:prstDash val="solid"/>
+          </a:ln>
+        </p:spPr>
+      </p:sp>
+      <p:sp>
+        <p:nvSpPr>
+          <p:cNvPr id="6" name="Text 4"/>
+          <p:cNvSpPr txBox="1"/>
+          <p:nvPr/>
+        </p:nvSpPr>
+        <p:spPr>
+          <a:xfrm>
+            <a:off x="1028700" y="9784080"/>
+            <a:ext cx="7315200" cy="274320"/>
           </a:xfrm>
           <a:prstGeom prst="rect">
             <a:avLst/>
@@ -8674,17 +8662,460 @@
               <a:buNone/>
             </a:pPr>
             <a:r>
-              <a:rPr lang="en-US" sz="2800" dirty="0">
-                <a:solidFill>
-                  <a:srgbClr val="C7D2DF"/>
+              <a:rPr lang="en-US" sz="1400" b="1" dirty="0">
+                <a:solidFill>
+                  <a:srgbClr val="07294D"/>
                 </a:solidFill>
                 <a:latin typeface="Futura" pitchFamily="34" charset="0"/>
                 <a:ea typeface="Futura" pitchFamily="34" charset="-122"/>
                 <a:cs typeface="Futura" pitchFamily="34" charset="-120"/>
               </a:rPr>
-              <a:t>Three quick questions before anything leaves your hands.</a:t>
-            </a:r>
-            <a:endParaRPr lang="en-US" sz="2800" dirty="0"/>
+              <a:t>Environmental &amp; Occupational Health</a:t>
+            </a:r>
+            <a:endParaRPr lang="en-US" sz="1400" dirty="0"/>
+          </a:p>
+        </p:txBody>
+      </p:sp>
+      <p:sp>
+        <p:nvSpPr>
+          <p:cNvPr id="7" name="Text 5"/>
+          <p:cNvSpPr txBox="1"/>
+          <p:nvPr/>
+        </p:nvSpPr>
+        <p:spPr>
+          <a:xfrm>
+            <a:off x="9944100" y="9784080"/>
+            <a:ext cx="7315200" cy="274320"/>
+          </a:xfrm>
+          <a:prstGeom prst="rect">
+            <a:avLst/>
+          </a:prstGeom>
+          <a:noFill/>
+          <a:ln/>
+        </p:spPr>
+        <p:txBody>
+          <a:bodyPr wrap="square" lIns="0" tIns="0" rIns="0" bIns="0" rtlCol="0" anchor="t"/>
+          <a:lstStyle/>
+          <a:p>
+            <a:pPr algn="r" indent="0" marL="0">
+              <a:buNone/>
+            </a:pPr>
+            <a:r>
+              <a:rPr lang="en-US" sz="1400" dirty="0">
+                <a:solidFill>
+                  <a:srgbClr val="5A6571"/>
+                </a:solidFill>
+                <a:latin typeface="Futura" pitchFamily="34" charset="0"/>
+                <a:ea typeface="Futura" pitchFamily="34" charset="-122"/>
+                <a:cs typeface="Futura" pitchFamily="34" charset="-120"/>
+              </a:rPr>
+              <a:t>Dornsife School of Public Health</a:t>
+            </a:r>
+            <a:endParaRPr lang="en-US" sz="1400" dirty="0"/>
+          </a:p>
+        </p:txBody>
+      </p:sp>
+      <p:sp>
+        <p:nvSpPr>
+          <p:cNvPr id="9" name="Shape 6"/>
+          <p:cNvSpPr/>
+          <p:nvPr/>
+        </p:nvSpPr>
+        <p:spPr>
+          <a:xfrm>
+            <a:off x="1028700" y="2697480"/>
+            <a:ext cx="7863840" cy="4480560"/>
+          </a:xfrm>
+          <a:prstGeom prst="rect">
+            <a:avLst/>
+          </a:prstGeom>
+          <a:solidFill>
+            <a:srgbClr val="FFFFFF"/>
+          </a:solidFill>
+          <a:ln w="9525">
+            <a:solidFill>
+              <a:srgbClr val="D0D3D4"/>
+            </a:solidFill>
+            <a:prstDash val="solid"/>
+          </a:ln>
+        </p:spPr>
+      </p:sp>
+      <p:sp>
+        <p:nvSpPr>
+          <p:cNvPr id="10" name="Shape 7"/>
+          <p:cNvSpPr/>
+          <p:nvPr/>
+        </p:nvSpPr>
+        <p:spPr>
+          <a:xfrm>
+            <a:off x="1028700" y="2697480"/>
+            <a:ext cx="7863840" cy="777240"/>
+          </a:xfrm>
+          <a:prstGeom prst="rect">
+            <a:avLst/>
+          </a:prstGeom>
+          <a:solidFill>
+            <a:srgbClr val="006699"/>
+          </a:solidFill>
+          <a:ln/>
+        </p:spPr>
+      </p:sp>
+      <p:sp>
+        <p:nvSpPr>
+          <p:cNvPr id="11" name="Text 8"/>
+          <p:cNvSpPr txBox="1"/>
+          <p:nvPr/>
+        </p:nvSpPr>
+        <p:spPr>
+          <a:xfrm>
+            <a:off x="1348740" y="2697480"/>
+            <a:ext cx="7223760" cy="777240"/>
+          </a:xfrm>
+          <a:prstGeom prst="rect">
+            <a:avLst/>
+          </a:prstGeom>
+          <a:noFill/>
+          <a:ln/>
+        </p:spPr>
+        <p:txBody>
+          <a:bodyPr wrap="square" lIns="0" tIns="0" rIns="0" bIns="0" rtlCol="0" anchor="ctr"/>
+          <a:lstStyle/>
+          <a:p>
+            <a:pPr indent="0" marL="0">
+              <a:buNone/>
+            </a:pPr>
+            <a:r>
+              <a:rPr lang="en-US" sz="2900" b="1" dirty="0">
+                <a:solidFill>
+                  <a:srgbClr val="FFFFFF"/>
+                </a:solidFill>
+                <a:latin typeface="Georgia" pitchFamily="34" charset="0"/>
+                <a:ea typeface="Georgia" pitchFamily="34" charset="-122"/>
+                <a:cs typeface="Georgia" pitchFamily="34" charset="-120"/>
+              </a:rPr>
+              <a:t>Fine to use</a:t>
+            </a:r>
+            <a:endParaRPr lang="en-US" sz="2900" dirty="0"/>
+          </a:p>
+        </p:txBody>
+      </p:sp>
+      <p:sp>
+        <p:nvSpPr>
+          <p:cNvPr id="12" name="Text 9"/>
+          <p:cNvSpPr txBox="1"/>
+          <p:nvPr/>
+        </p:nvSpPr>
+        <p:spPr>
+          <a:xfrm>
+            <a:off x="1348740" y="3749040"/>
+            <a:ext cx="7223760" cy="3200400"/>
+          </a:xfrm>
+          <a:prstGeom prst="rect">
+            <a:avLst/>
+          </a:prstGeom>
+          <a:noFill/>
+          <a:ln/>
+        </p:spPr>
+        <p:txBody>
+          <a:bodyPr wrap="square" lIns="0" tIns="0" rIns="0" bIns="0" rtlCol="0" anchor="t"/>
+          <a:lstStyle/>
+          <a:p>
+            <a:pPr marL="279400" indent="-279400">
+              <a:lnSpc>
+                <a:spcPct val="120000"/>
+              </a:lnSpc>
+              <a:spcAft>
+                <a:spcPts val="1200"/>
+              </a:spcAft>
+              <a:buSzPct val="100000"/>
+              <a:buChar char="•"/>
+            </a:pPr>
+            <a:r>
+              <a:rPr lang="en-US" sz="2400" dirty="0">
+                <a:solidFill>
+                  <a:srgbClr val="1C2530"/>
+                </a:solidFill>
+                <a:latin typeface="Futura" pitchFamily="34" charset="0"/>
+                <a:ea typeface="Futura" pitchFamily="34" charset="-122"/>
+                <a:cs typeface="Futura" pitchFamily="34" charset="-120"/>
+              </a:rPr>
+              <a:t>Your own drafts, notes, and announcements</a:t>
+            </a:r>
+            <a:endParaRPr lang="en-US" sz="2400" dirty="0"/>
+          </a:p>
+          <a:p>
+            <a:pPr marL="279400" indent="-279400">
+              <a:lnSpc>
+                <a:spcPct val="120000"/>
+              </a:lnSpc>
+              <a:spcAft>
+                <a:spcPts val="1200"/>
+              </a:spcAft>
+              <a:buSzPct val="100000"/>
+              <a:buChar char="•"/>
+            </a:pPr>
+            <a:r>
+              <a:rPr lang="en-US" sz="2400" dirty="0">
+                <a:solidFill>
+                  <a:srgbClr val="1C2530"/>
+                </a:solidFill>
+                <a:latin typeface="Futura" pitchFamily="34" charset="0"/>
+                <a:ea typeface="Futura" pitchFamily="34" charset="-122"/>
+                <a:cs typeface="Futura" pitchFamily="34" charset="-120"/>
+              </a:rPr>
+              <a:t>Committee and project email without sensitive details</a:t>
+            </a:r>
+            <a:endParaRPr lang="en-US" sz="2400" dirty="0"/>
+          </a:p>
+          <a:p>
+            <a:pPr marL="279400" indent="-279400">
+              <a:lnSpc>
+                <a:spcPct val="120000"/>
+              </a:lnSpc>
+              <a:spcAft>
+                <a:spcPts val="1200"/>
+              </a:spcAft>
+              <a:buSzPct val="100000"/>
+              <a:buChar char="•"/>
+            </a:pPr>
+            <a:r>
+              <a:rPr lang="en-US" sz="2400" dirty="0">
+                <a:solidFill>
+                  <a:srgbClr val="1C2530"/>
+                </a:solidFill>
+                <a:latin typeface="Futura" pitchFamily="34" charset="0"/>
+                <a:ea typeface="Futura" pitchFamily="34" charset="-122"/>
+                <a:cs typeface="Futura" pitchFamily="34" charset="-120"/>
+              </a:rPr>
+              <a:t>Public documents and published papers</a:t>
+            </a:r>
+            <a:endParaRPr lang="en-US" sz="2400" dirty="0"/>
+          </a:p>
+          <a:p>
+            <a:pPr marL="279400" indent="-279400">
+              <a:lnSpc>
+                <a:spcPct val="120000"/>
+              </a:lnSpc>
+              <a:spcAft>
+                <a:spcPts val="1200"/>
+              </a:spcAft>
+              <a:buSzPct val="100000"/>
+              <a:buChar char="•"/>
+            </a:pPr>
+            <a:r>
+              <a:rPr lang="en-US" sz="2400" dirty="0">
+                <a:solidFill>
+                  <a:srgbClr val="1C2530"/>
+                </a:solidFill>
+                <a:latin typeface="Futura" pitchFamily="34" charset="0"/>
+                <a:ea typeface="Futura" pitchFamily="34" charset="-122"/>
+                <a:cs typeface="Futura" pitchFamily="34" charset="-120"/>
+              </a:rPr>
+              <a:t>Made-up versions of anything sensitive</a:t>
+            </a:r>
+            <a:endParaRPr lang="en-US" sz="2400" dirty="0"/>
+          </a:p>
+        </p:txBody>
+      </p:sp>
+      <p:sp>
+        <p:nvSpPr>
+          <p:cNvPr id="13" name="Shape 10"/>
+          <p:cNvSpPr/>
+          <p:nvPr/>
+        </p:nvSpPr>
+        <p:spPr>
+          <a:xfrm>
+            <a:off x="9395460" y="2697480"/>
+            <a:ext cx="7863840" cy="4480560"/>
+          </a:xfrm>
+          <a:prstGeom prst="rect">
+            <a:avLst/>
+          </a:prstGeom>
+          <a:solidFill>
+            <a:srgbClr val="FFFFFF"/>
+          </a:solidFill>
+          <a:ln w="9525">
+            <a:solidFill>
+              <a:srgbClr val="D0D3D4"/>
+            </a:solidFill>
+            <a:prstDash val="solid"/>
+          </a:ln>
+        </p:spPr>
+      </p:sp>
+      <p:sp>
+        <p:nvSpPr>
+          <p:cNvPr id="14" name="Shape 11"/>
+          <p:cNvSpPr/>
+          <p:nvPr/>
+        </p:nvSpPr>
+        <p:spPr>
+          <a:xfrm>
+            <a:off x="9395460" y="2697480"/>
+            <a:ext cx="7863840" cy="777240"/>
+          </a:xfrm>
+          <a:prstGeom prst="rect">
+            <a:avLst/>
+          </a:prstGeom>
+          <a:solidFill>
+            <a:srgbClr val="971B2F"/>
+          </a:solidFill>
+          <a:ln/>
+        </p:spPr>
+      </p:sp>
+      <p:sp>
+        <p:nvSpPr>
+          <p:cNvPr id="15" name="Text 12"/>
+          <p:cNvSpPr txBox="1"/>
+          <p:nvPr/>
+        </p:nvSpPr>
+        <p:spPr>
+          <a:xfrm>
+            <a:off x="9715500" y="2697480"/>
+            <a:ext cx="7223760" cy="777240"/>
+          </a:xfrm>
+          <a:prstGeom prst="rect">
+            <a:avLst/>
+          </a:prstGeom>
+          <a:noFill/>
+          <a:ln/>
+        </p:spPr>
+        <p:txBody>
+          <a:bodyPr wrap="square" lIns="0" tIns="0" rIns="0" bIns="0" rtlCol="0" anchor="ctr"/>
+          <a:lstStyle/>
+          <a:p>
+            <a:pPr indent="0" marL="0">
+              <a:buNone/>
+            </a:pPr>
+            <a:r>
+              <a:rPr lang="en-US" sz="2900" b="1" dirty="0">
+                <a:solidFill>
+                  <a:srgbClr val="FFFFFF"/>
+                </a:solidFill>
+                <a:latin typeface="Georgia" pitchFamily="34" charset="0"/>
+                <a:ea typeface="Georgia" pitchFamily="34" charset="-122"/>
+                <a:cs typeface="Georgia" pitchFamily="34" charset="-120"/>
+              </a:rPr>
+              <a:t>Never paste in</a:t>
+            </a:r>
+            <a:endParaRPr lang="en-US" sz="2900" dirty="0"/>
+          </a:p>
+        </p:txBody>
+      </p:sp>
+      <p:sp>
+        <p:nvSpPr>
+          <p:cNvPr id="16" name="Text 13"/>
+          <p:cNvSpPr txBox="1"/>
+          <p:nvPr/>
+        </p:nvSpPr>
+        <p:spPr>
+          <a:xfrm>
+            <a:off x="9715500" y="3749040"/>
+            <a:ext cx="7223760" cy="3200400"/>
+          </a:xfrm>
+          <a:prstGeom prst="rect">
+            <a:avLst/>
+          </a:prstGeom>
+          <a:noFill/>
+          <a:ln/>
+        </p:spPr>
+        <p:txBody>
+          <a:bodyPr wrap="square" lIns="0" tIns="0" rIns="0" bIns="0" rtlCol="0" anchor="t"/>
+          <a:lstStyle/>
+          <a:p>
+            <a:pPr marL="279400" indent="-279400">
+              <a:lnSpc>
+                <a:spcPct val="120000"/>
+              </a:lnSpc>
+              <a:spcAft>
+                <a:spcPts val="1200"/>
+              </a:spcAft>
+              <a:buSzPct val="100000"/>
+              <a:buChar char="•"/>
+            </a:pPr>
+            <a:r>
+              <a:rPr lang="en-US" sz="2400" dirty="0">
+                <a:solidFill>
+                  <a:srgbClr val="1C2530"/>
+                </a:solidFill>
+                <a:latin typeface="Futura" pitchFamily="34" charset="0"/>
+                <a:ea typeface="Futura" pitchFamily="34" charset="-122"/>
+                <a:cs typeface="Futura" pitchFamily="34" charset="-120"/>
+              </a:rPr>
+              <a:t>Health information about a person</a:t>
+            </a:r>
+            <a:endParaRPr lang="en-US" sz="2400" dirty="0"/>
+          </a:p>
+          <a:p>
+            <a:pPr marL="279400" indent="-279400">
+              <a:lnSpc>
+                <a:spcPct val="120000"/>
+              </a:lnSpc>
+              <a:spcAft>
+                <a:spcPts val="1200"/>
+              </a:spcAft>
+              <a:buSzPct val="100000"/>
+              <a:buChar char="•"/>
+            </a:pPr>
+            <a:r>
+              <a:rPr lang="en-US" sz="2400" dirty="0">
+                <a:solidFill>
+                  <a:srgbClr val="1C2530"/>
+                </a:solidFill>
+                <a:latin typeface="Futura" pitchFamily="34" charset="0"/>
+                <a:ea typeface="Futura" pitchFamily="34" charset="-122"/>
+                <a:cs typeface="Futura" pitchFamily="34" charset="-120"/>
+              </a:rPr>
+              <a:t>Student records or Social Security numbers</a:t>
+            </a:r>
+            <a:endParaRPr lang="en-US" sz="2400" dirty="0"/>
+          </a:p>
+          <a:p>
+            <a:pPr marL="279400" indent="-279400">
+              <a:lnSpc>
+                <a:spcPct val="120000"/>
+              </a:lnSpc>
+              <a:spcAft>
+                <a:spcPts val="1200"/>
+              </a:spcAft>
+              <a:buSzPct val="100000"/>
+              <a:buChar char="•"/>
+            </a:pPr>
+            <a:r>
+              <a:rPr lang="en-US" sz="2400" dirty="0">
+                <a:solidFill>
+                  <a:srgbClr val="1C2530"/>
+                </a:solidFill>
+                <a:latin typeface="Futura" pitchFamily="34" charset="0"/>
+                <a:ea typeface="Futura" pitchFamily="34" charset="-122"/>
+                <a:cs typeface="Futura" pitchFamily="34" charset="-120"/>
+              </a:rPr>
+              <a:t>Identifiable research data</a:t>
+            </a:r>
+            <a:endParaRPr lang="en-US" sz="2400" dirty="0"/>
+          </a:p>
+          <a:p>
+            <a:pPr marL="279400" indent="-279400">
+              <a:lnSpc>
+                <a:spcPct val="120000"/>
+              </a:lnSpc>
+              <a:spcAft>
+                <a:spcPts val="1200"/>
+              </a:spcAft>
+              <a:buSzPct val="100000"/>
+              <a:buChar char="•"/>
+            </a:pPr>
+            <a:r>
+              <a:rPr lang="en-US" sz="2400" dirty="0">
+                <a:solidFill>
+                  <a:srgbClr val="1C2530"/>
+                </a:solidFill>
+                <a:latin typeface="Futura" pitchFamily="34" charset="0"/>
+                <a:ea typeface="Futura" pitchFamily="34" charset="-122"/>
+                <a:cs typeface="Futura" pitchFamily="34" charset="-120"/>
+              </a:rPr>
+              <a:t>When in doubt, leave it out or make the details up</a:t>
+            </a:r>
+            <a:endParaRPr lang="en-US" sz="2400" dirty="0"/>
           </a:p>
         </p:txBody>
       </p:sp>

--- a/docs/slides/DSPH_Workshop2_Workflow_Enhancement.pptx
+++ b/docs/slides/DSPH_Workshop2_Workflow_Enhancement.pptx
@@ -1314,7 +1314,7 @@
           <a:p>
             <a:r>
               <a:rPr lang="en-US" dirty="0"/>
-              <a:t>8 of 30 rows are over $12 per attendee (Oct EOH and HMP; Dec EOH and HMP; Jan HMP; all three in June). Nov HMP is exactly $12.00: a formula with &gt; will not flag it, &gt;= will. Check the formula, not just the answer.</a:t>
+              <a:t>17 of 60 rows are over $12 per attendee: Oct EOH, HMP, and Autism Institute; all of Dec except Epi &amp; Biostat; Jan HMP, CHP, and Autism Institute; all six in June. Nov HMP is exactly $12.00 ($300 ÷ 25): a formula with &gt; will not flag it, &gt;= will. Check the formula, not just the answer.</a:t>
             </a:r>
             <a:endParaRPr lang="en-US" dirty="0"/>
           </a:p>
